--- a/Anoud.pptx
+++ b/Anoud.pptx
@@ -6,6 +6,7 @@
   </p:sldMasterIdLst>
   <p:sldIdLst>
     <p:sldId id="256" r:id="rId2"/>
+    <p:sldId id="257" r:id="rId3"/>
   </p:sldIdLst>
   <p:sldSz cx="12192000" cy="6858000"/>
   <p:notesSz cx="6858000" cy="9144000"/>
@@ -126,13 +127,7 @@
       </p:grpSpPr>
       <p:sp>
         <p:nvSpPr>
-          <p:cNvPr id="2" name="Title 1">
-            <a:extLst>
-              <a:ext uri="{FF2B5EF4-FFF2-40B4-BE49-F238E27FC236}">
-                <a16:creationId xmlns:a16="http://schemas.microsoft.com/office/drawing/2014/main" id="{9412E62F-E053-D195-2D57-C3257AAAB565}"/>
-              </a:ext>
-            </a:extLst>
-          </p:cNvPr>
+          <p:cNvPr id="2" name="Title 1"/>
           <p:cNvSpPr>
             <a:spLocks noGrp="1"/>
           </p:cNvSpPr>
@@ -155,22 +150,16 @@
           </a:lstStyle>
           <a:p>
             <a:r>
-              <a:rPr lang="en-US"/>
+              <a:rPr lang="en-US" smtClean="0"/>
               <a:t>Click to edit Master title style</a:t>
             </a:r>
-            <a:endParaRPr lang="en-IN"/>
-          </a:p>
-        </p:txBody>
-      </p:sp>
-      <p:sp>
-        <p:nvSpPr>
-          <p:cNvPr id="3" name="Subtitle 2">
-            <a:extLst>
-              <a:ext uri="{FF2B5EF4-FFF2-40B4-BE49-F238E27FC236}">
-                <a16:creationId xmlns:a16="http://schemas.microsoft.com/office/drawing/2014/main" id="{3E328A0F-C76A-A0C8-D07C-3FE34C6DB8AC}"/>
-              </a:ext>
-            </a:extLst>
-          </p:cNvPr>
+            <a:endParaRPr lang="en-US"/>
+          </a:p>
+        </p:txBody>
+      </p:sp>
+      <p:sp>
+        <p:nvSpPr>
+          <p:cNvPr id="3" name="Subtitle 2"/>
           <p:cNvSpPr>
             <a:spLocks noGrp="1"/>
           </p:cNvSpPr>
@@ -226,22 +215,16 @@
           </a:lstStyle>
           <a:p>
             <a:r>
-              <a:rPr lang="en-US"/>
+              <a:rPr lang="en-US" smtClean="0"/>
               <a:t>Click to edit Master subtitle style</a:t>
             </a:r>
-            <a:endParaRPr lang="en-IN"/>
-          </a:p>
-        </p:txBody>
-      </p:sp>
-      <p:sp>
-        <p:nvSpPr>
-          <p:cNvPr id="4" name="Date Placeholder 3">
-            <a:extLst>
-              <a:ext uri="{FF2B5EF4-FFF2-40B4-BE49-F238E27FC236}">
-                <a16:creationId xmlns:a16="http://schemas.microsoft.com/office/drawing/2014/main" id="{225F26DF-89F9-B0D4-B996-05F5A16D5BBE}"/>
-              </a:ext>
-            </a:extLst>
-          </p:cNvPr>
+            <a:endParaRPr lang="en-US"/>
+          </a:p>
+        </p:txBody>
+      </p:sp>
+      <p:sp>
+        <p:nvSpPr>
+          <p:cNvPr id="4" name="Date Placeholder 3"/>
           <p:cNvSpPr>
             <a:spLocks noGrp="1"/>
           </p:cNvSpPr>
@@ -254,23 +237,17 @@
           <a:bodyPr/>
           <a:lstStyle/>
           <a:p>
-            <a:fld id="{E471BDBF-D618-42A7-B9D8-B6E6A6C95C5A}" type="datetimeFigureOut">
-              <a:rPr lang="en-IN" smtClean="0"/>
-              <a:t>26-03-2026</a:t>
+            <a:fld id="{C8619975-09B3-45A9-981B-24156A02B11A}" type="datetimeFigureOut">
+              <a:rPr lang="en-US" smtClean="0"/>
+              <a:t>3/26/2026</a:t>
             </a:fld>
-            <a:endParaRPr lang="en-IN"/>
-          </a:p>
-        </p:txBody>
-      </p:sp>
-      <p:sp>
-        <p:nvSpPr>
-          <p:cNvPr id="5" name="Footer Placeholder 4">
-            <a:extLst>
-              <a:ext uri="{FF2B5EF4-FFF2-40B4-BE49-F238E27FC236}">
-                <a16:creationId xmlns:a16="http://schemas.microsoft.com/office/drawing/2014/main" id="{BF3D165A-06AB-4637-3CDE-361360DD223D}"/>
-              </a:ext>
-            </a:extLst>
-          </p:cNvPr>
+            <a:endParaRPr lang="en-US"/>
+          </a:p>
+        </p:txBody>
+      </p:sp>
+      <p:sp>
+        <p:nvSpPr>
+          <p:cNvPr id="5" name="Footer Placeholder 4"/>
           <p:cNvSpPr>
             <a:spLocks noGrp="1"/>
           </p:cNvSpPr>
@@ -283,19 +260,13 @@
           <a:bodyPr/>
           <a:lstStyle/>
           <a:p>
-            <a:endParaRPr lang="en-IN"/>
-          </a:p>
-        </p:txBody>
-      </p:sp>
-      <p:sp>
-        <p:nvSpPr>
-          <p:cNvPr id="6" name="Slide Number Placeholder 5">
-            <a:extLst>
-              <a:ext uri="{FF2B5EF4-FFF2-40B4-BE49-F238E27FC236}">
-                <a16:creationId xmlns:a16="http://schemas.microsoft.com/office/drawing/2014/main" id="{B690218E-0A38-5122-71F6-1CA5A86F0946}"/>
-              </a:ext>
-            </a:extLst>
-          </p:cNvPr>
+            <a:endParaRPr lang="en-US"/>
+          </a:p>
+        </p:txBody>
+      </p:sp>
+      <p:sp>
+        <p:nvSpPr>
+          <p:cNvPr id="6" name="Slide Number Placeholder 5"/>
           <p:cNvSpPr>
             <a:spLocks noGrp="1"/>
           </p:cNvSpPr>
@@ -308,18 +279,18 @@
           <a:bodyPr/>
           <a:lstStyle/>
           <a:p>
-            <a:fld id="{B8EAE59F-CC89-4136-872C-DCBA0EEB52F5}" type="slidenum">
-              <a:rPr lang="en-IN" smtClean="0"/>
+            <a:fld id="{F8EBE27D-6BE1-4123-A15D-30EC878A573F}" type="slidenum">
+              <a:rPr lang="en-US" smtClean="0"/>
               <a:t>‹#›</a:t>
             </a:fld>
-            <a:endParaRPr lang="en-IN"/>
+            <a:endParaRPr lang="en-US"/>
           </a:p>
         </p:txBody>
       </p:sp>
     </p:spTree>
     <p:extLst>
       <p:ext uri="{BB962C8B-B14F-4D97-AF65-F5344CB8AC3E}">
-        <p14:creationId xmlns:p14="http://schemas.microsoft.com/office/powerpoint/2010/main" val="3806228860"/>
+        <p14:creationId xmlns:p14="http://schemas.microsoft.com/office/powerpoint/2010/main" val="3638977714"/>
       </p:ext>
     </p:extLst>
   </p:cSld>
@@ -348,13 +319,7 @@
       </p:grpSpPr>
       <p:sp>
         <p:nvSpPr>
-          <p:cNvPr id="2" name="Title 1">
-            <a:extLst>
-              <a:ext uri="{FF2B5EF4-FFF2-40B4-BE49-F238E27FC236}">
-                <a16:creationId xmlns:a16="http://schemas.microsoft.com/office/drawing/2014/main" id="{AE5D98BD-CF49-73A2-1716-88F113225161}"/>
-              </a:ext>
-            </a:extLst>
-          </p:cNvPr>
+          <p:cNvPr id="2" name="Title 1"/>
           <p:cNvSpPr>
             <a:spLocks noGrp="1"/>
           </p:cNvSpPr>
@@ -368,22 +333,16 @@
           <a:lstStyle/>
           <a:p>
             <a:r>
-              <a:rPr lang="en-US"/>
+              <a:rPr lang="en-US" smtClean="0"/>
               <a:t>Click to edit Master title style</a:t>
             </a:r>
-            <a:endParaRPr lang="en-IN"/>
-          </a:p>
-        </p:txBody>
-      </p:sp>
-      <p:sp>
-        <p:nvSpPr>
-          <p:cNvPr id="3" name="Vertical Text Placeholder 2">
-            <a:extLst>
-              <a:ext uri="{FF2B5EF4-FFF2-40B4-BE49-F238E27FC236}">
-                <a16:creationId xmlns:a16="http://schemas.microsoft.com/office/drawing/2014/main" id="{A9B3733C-DF58-1098-4E6C-39EB04E88875}"/>
-              </a:ext>
-            </a:extLst>
-          </p:cNvPr>
+            <a:endParaRPr lang="en-US"/>
+          </a:p>
+        </p:txBody>
+      </p:sp>
+      <p:sp>
+        <p:nvSpPr>
+          <p:cNvPr id="3" name="Vertical Text Placeholder 2"/>
           <p:cNvSpPr>
             <a:spLocks noGrp="1"/>
           </p:cNvSpPr>
@@ -398,50 +357,44 @@
           <a:p>
             <a:pPr lvl="0"/>
             <a:r>
-              <a:rPr lang="en-US"/>
-              <a:t>Click to edit Master text styles</a:t>
+              <a:rPr lang="en-US" smtClean="0"/>
+              <a:t>Edit Master text styles</a:t>
             </a:r>
           </a:p>
           <a:p>
             <a:pPr lvl="1"/>
             <a:r>
-              <a:rPr lang="en-US"/>
+              <a:rPr lang="en-US" smtClean="0"/>
               <a:t>Second level</a:t>
             </a:r>
           </a:p>
           <a:p>
             <a:pPr lvl="2"/>
             <a:r>
-              <a:rPr lang="en-US"/>
+              <a:rPr lang="en-US" smtClean="0"/>
               <a:t>Third level</a:t>
             </a:r>
           </a:p>
           <a:p>
             <a:pPr lvl="3"/>
             <a:r>
-              <a:rPr lang="en-US"/>
+              <a:rPr lang="en-US" smtClean="0"/>
               <a:t>Fourth level</a:t>
             </a:r>
           </a:p>
           <a:p>
             <a:pPr lvl="4"/>
             <a:r>
-              <a:rPr lang="en-US"/>
+              <a:rPr lang="en-US" smtClean="0"/>
               <a:t>Fifth level</a:t>
             </a:r>
-            <a:endParaRPr lang="en-IN"/>
-          </a:p>
-        </p:txBody>
-      </p:sp>
-      <p:sp>
-        <p:nvSpPr>
-          <p:cNvPr id="4" name="Date Placeholder 3">
-            <a:extLst>
-              <a:ext uri="{FF2B5EF4-FFF2-40B4-BE49-F238E27FC236}">
-                <a16:creationId xmlns:a16="http://schemas.microsoft.com/office/drawing/2014/main" id="{2C86184D-5EE3-BCBA-C2D6-C3FC9B1E51D8}"/>
-              </a:ext>
-            </a:extLst>
-          </p:cNvPr>
+            <a:endParaRPr lang="en-US"/>
+          </a:p>
+        </p:txBody>
+      </p:sp>
+      <p:sp>
+        <p:nvSpPr>
+          <p:cNvPr id="4" name="Date Placeholder 3"/>
           <p:cNvSpPr>
             <a:spLocks noGrp="1"/>
           </p:cNvSpPr>
@@ -454,23 +407,17 @@
           <a:bodyPr/>
           <a:lstStyle/>
           <a:p>
-            <a:fld id="{E471BDBF-D618-42A7-B9D8-B6E6A6C95C5A}" type="datetimeFigureOut">
-              <a:rPr lang="en-IN" smtClean="0"/>
-              <a:t>26-03-2026</a:t>
+            <a:fld id="{C8619975-09B3-45A9-981B-24156A02B11A}" type="datetimeFigureOut">
+              <a:rPr lang="en-US" smtClean="0"/>
+              <a:t>3/26/2026</a:t>
             </a:fld>
-            <a:endParaRPr lang="en-IN"/>
-          </a:p>
-        </p:txBody>
-      </p:sp>
-      <p:sp>
-        <p:nvSpPr>
-          <p:cNvPr id="5" name="Footer Placeholder 4">
-            <a:extLst>
-              <a:ext uri="{FF2B5EF4-FFF2-40B4-BE49-F238E27FC236}">
-                <a16:creationId xmlns:a16="http://schemas.microsoft.com/office/drawing/2014/main" id="{E4795AD1-015D-8418-931A-8892EB32A539}"/>
-              </a:ext>
-            </a:extLst>
-          </p:cNvPr>
+            <a:endParaRPr lang="en-US"/>
+          </a:p>
+        </p:txBody>
+      </p:sp>
+      <p:sp>
+        <p:nvSpPr>
+          <p:cNvPr id="5" name="Footer Placeholder 4"/>
           <p:cNvSpPr>
             <a:spLocks noGrp="1"/>
           </p:cNvSpPr>
@@ -483,19 +430,13 @@
           <a:bodyPr/>
           <a:lstStyle/>
           <a:p>
-            <a:endParaRPr lang="en-IN"/>
-          </a:p>
-        </p:txBody>
-      </p:sp>
-      <p:sp>
-        <p:nvSpPr>
-          <p:cNvPr id="6" name="Slide Number Placeholder 5">
-            <a:extLst>
-              <a:ext uri="{FF2B5EF4-FFF2-40B4-BE49-F238E27FC236}">
-                <a16:creationId xmlns:a16="http://schemas.microsoft.com/office/drawing/2014/main" id="{6919F904-9A0A-7213-BEF3-C752E6DF2FD0}"/>
-              </a:ext>
-            </a:extLst>
-          </p:cNvPr>
+            <a:endParaRPr lang="en-US"/>
+          </a:p>
+        </p:txBody>
+      </p:sp>
+      <p:sp>
+        <p:nvSpPr>
+          <p:cNvPr id="6" name="Slide Number Placeholder 5"/>
           <p:cNvSpPr>
             <a:spLocks noGrp="1"/>
           </p:cNvSpPr>
@@ -508,18 +449,18 @@
           <a:bodyPr/>
           <a:lstStyle/>
           <a:p>
-            <a:fld id="{B8EAE59F-CC89-4136-872C-DCBA0EEB52F5}" type="slidenum">
-              <a:rPr lang="en-IN" smtClean="0"/>
+            <a:fld id="{F8EBE27D-6BE1-4123-A15D-30EC878A573F}" type="slidenum">
+              <a:rPr lang="en-US" smtClean="0"/>
               <a:t>‹#›</a:t>
             </a:fld>
-            <a:endParaRPr lang="en-IN"/>
+            <a:endParaRPr lang="en-US"/>
           </a:p>
         </p:txBody>
       </p:sp>
     </p:spTree>
     <p:extLst>
       <p:ext uri="{BB962C8B-B14F-4D97-AF65-F5344CB8AC3E}">
-        <p14:creationId xmlns:p14="http://schemas.microsoft.com/office/powerpoint/2010/main" val="1314177792"/>
+        <p14:creationId xmlns:p14="http://schemas.microsoft.com/office/powerpoint/2010/main" val="973167214"/>
       </p:ext>
     </p:extLst>
   </p:cSld>
@@ -548,13 +489,7 @@
       </p:grpSpPr>
       <p:sp>
         <p:nvSpPr>
-          <p:cNvPr id="2" name="Vertical Title 1">
-            <a:extLst>
-              <a:ext uri="{FF2B5EF4-FFF2-40B4-BE49-F238E27FC236}">
-                <a16:creationId xmlns:a16="http://schemas.microsoft.com/office/drawing/2014/main" id="{79B36254-B31E-57A3-609B-52AA9A983A96}"/>
-              </a:ext>
-            </a:extLst>
-          </p:cNvPr>
+          <p:cNvPr id="2" name="Vertical Title 1"/>
           <p:cNvSpPr>
             <a:spLocks noGrp="1"/>
           </p:cNvSpPr>
@@ -573,22 +508,16 @@
           <a:lstStyle/>
           <a:p>
             <a:r>
-              <a:rPr lang="en-US"/>
+              <a:rPr lang="en-US" smtClean="0"/>
               <a:t>Click to edit Master title style</a:t>
             </a:r>
-            <a:endParaRPr lang="en-IN"/>
-          </a:p>
-        </p:txBody>
-      </p:sp>
-      <p:sp>
-        <p:nvSpPr>
-          <p:cNvPr id="3" name="Vertical Text Placeholder 2">
-            <a:extLst>
-              <a:ext uri="{FF2B5EF4-FFF2-40B4-BE49-F238E27FC236}">
-                <a16:creationId xmlns:a16="http://schemas.microsoft.com/office/drawing/2014/main" id="{38CABD68-27C0-C98F-BEBC-5FA4BCE563BC}"/>
-              </a:ext>
-            </a:extLst>
-          </p:cNvPr>
+            <a:endParaRPr lang="en-US"/>
+          </a:p>
+        </p:txBody>
+      </p:sp>
+      <p:sp>
+        <p:nvSpPr>
+          <p:cNvPr id="3" name="Vertical Text Placeholder 2"/>
           <p:cNvSpPr>
             <a:spLocks noGrp="1"/>
           </p:cNvSpPr>
@@ -608,50 +537,44 @@
           <a:p>
             <a:pPr lvl="0"/>
             <a:r>
-              <a:rPr lang="en-US"/>
-              <a:t>Click to edit Master text styles</a:t>
+              <a:rPr lang="en-US" smtClean="0"/>
+              <a:t>Edit Master text styles</a:t>
             </a:r>
           </a:p>
           <a:p>
             <a:pPr lvl="1"/>
             <a:r>
-              <a:rPr lang="en-US"/>
+              <a:rPr lang="en-US" smtClean="0"/>
               <a:t>Second level</a:t>
             </a:r>
           </a:p>
           <a:p>
             <a:pPr lvl="2"/>
             <a:r>
-              <a:rPr lang="en-US"/>
+              <a:rPr lang="en-US" smtClean="0"/>
               <a:t>Third level</a:t>
             </a:r>
           </a:p>
           <a:p>
             <a:pPr lvl="3"/>
             <a:r>
-              <a:rPr lang="en-US"/>
+              <a:rPr lang="en-US" smtClean="0"/>
               <a:t>Fourth level</a:t>
             </a:r>
           </a:p>
           <a:p>
             <a:pPr lvl="4"/>
             <a:r>
-              <a:rPr lang="en-US"/>
+              <a:rPr lang="en-US" smtClean="0"/>
               <a:t>Fifth level</a:t>
             </a:r>
-            <a:endParaRPr lang="en-IN"/>
-          </a:p>
-        </p:txBody>
-      </p:sp>
-      <p:sp>
-        <p:nvSpPr>
-          <p:cNvPr id="4" name="Date Placeholder 3">
-            <a:extLst>
-              <a:ext uri="{FF2B5EF4-FFF2-40B4-BE49-F238E27FC236}">
-                <a16:creationId xmlns:a16="http://schemas.microsoft.com/office/drawing/2014/main" id="{037A4D04-7D76-E7C9-7DB7-32C0DE4637FA}"/>
-              </a:ext>
-            </a:extLst>
-          </p:cNvPr>
+            <a:endParaRPr lang="en-US"/>
+          </a:p>
+        </p:txBody>
+      </p:sp>
+      <p:sp>
+        <p:nvSpPr>
+          <p:cNvPr id="4" name="Date Placeholder 3"/>
           <p:cNvSpPr>
             <a:spLocks noGrp="1"/>
           </p:cNvSpPr>
@@ -664,23 +587,17 @@
           <a:bodyPr/>
           <a:lstStyle/>
           <a:p>
-            <a:fld id="{E471BDBF-D618-42A7-B9D8-B6E6A6C95C5A}" type="datetimeFigureOut">
-              <a:rPr lang="en-IN" smtClean="0"/>
-              <a:t>26-03-2026</a:t>
+            <a:fld id="{C8619975-09B3-45A9-981B-24156A02B11A}" type="datetimeFigureOut">
+              <a:rPr lang="en-US" smtClean="0"/>
+              <a:t>3/26/2026</a:t>
             </a:fld>
-            <a:endParaRPr lang="en-IN"/>
-          </a:p>
-        </p:txBody>
-      </p:sp>
-      <p:sp>
-        <p:nvSpPr>
-          <p:cNvPr id="5" name="Footer Placeholder 4">
-            <a:extLst>
-              <a:ext uri="{FF2B5EF4-FFF2-40B4-BE49-F238E27FC236}">
-                <a16:creationId xmlns:a16="http://schemas.microsoft.com/office/drawing/2014/main" id="{68234FE4-5800-71C7-E65E-52A296B497EE}"/>
-              </a:ext>
-            </a:extLst>
-          </p:cNvPr>
+            <a:endParaRPr lang="en-US"/>
+          </a:p>
+        </p:txBody>
+      </p:sp>
+      <p:sp>
+        <p:nvSpPr>
+          <p:cNvPr id="5" name="Footer Placeholder 4"/>
           <p:cNvSpPr>
             <a:spLocks noGrp="1"/>
           </p:cNvSpPr>
@@ -693,19 +610,13 @@
           <a:bodyPr/>
           <a:lstStyle/>
           <a:p>
-            <a:endParaRPr lang="en-IN"/>
-          </a:p>
-        </p:txBody>
-      </p:sp>
-      <p:sp>
-        <p:nvSpPr>
-          <p:cNvPr id="6" name="Slide Number Placeholder 5">
-            <a:extLst>
-              <a:ext uri="{FF2B5EF4-FFF2-40B4-BE49-F238E27FC236}">
-                <a16:creationId xmlns:a16="http://schemas.microsoft.com/office/drawing/2014/main" id="{FF9C5846-79BF-695E-D4E4-08BC0D2BB636}"/>
-              </a:ext>
-            </a:extLst>
-          </p:cNvPr>
+            <a:endParaRPr lang="en-US"/>
+          </a:p>
+        </p:txBody>
+      </p:sp>
+      <p:sp>
+        <p:nvSpPr>
+          <p:cNvPr id="6" name="Slide Number Placeholder 5"/>
           <p:cNvSpPr>
             <a:spLocks noGrp="1"/>
           </p:cNvSpPr>
@@ -718,18 +629,18 @@
           <a:bodyPr/>
           <a:lstStyle/>
           <a:p>
-            <a:fld id="{B8EAE59F-CC89-4136-872C-DCBA0EEB52F5}" type="slidenum">
-              <a:rPr lang="en-IN" smtClean="0"/>
+            <a:fld id="{F8EBE27D-6BE1-4123-A15D-30EC878A573F}" type="slidenum">
+              <a:rPr lang="en-US" smtClean="0"/>
               <a:t>‹#›</a:t>
             </a:fld>
-            <a:endParaRPr lang="en-IN"/>
+            <a:endParaRPr lang="en-US"/>
           </a:p>
         </p:txBody>
       </p:sp>
     </p:spTree>
     <p:extLst>
       <p:ext uri="{BB962C8B-B14F-4D97-AF65-F5344CB8AC3E}">
-        <p14:creationId xmlns:p14="http://schemas.microsoft.com/office/powerpoint/2010/main" val="1318167179"/>
+        <p14:creationId xmlns:p14="http://schemas.microsoft.com/office/powerpoint/2010/main" val="2613128845"/>
       </p:ext>
     </p:extLst>
   </p:cSld>
@@ -758,13 +669,7 @@
       </p:grpSpPr>
       <p:sp>
         <p:nvSpPr>
-          <p:cNvPr id="2" name="Title 1">
-            <a:extLst>
-              <a:ext uri="{FF2B5EF4-FFF2-40B4-BE49-F238E27FC236}">
-                <a16:creationId xmlns:a16="http://schemas.microsoft.com/office/drawing/2014/main" id="{A4DBC0BC-61B6-FCE7-4A46-ED11F5A5F2BC}"/>
-              </a:ext>
-            </a:extLst>
-          </p:cNvPr>
+          <p:cNvPr id="2" name="Title 1"/>
           <p:cNvSpPr>
             <a:spLocks noGrp="1"/>
           </p:cNvSpPr>
@@ -778,22 +683,16 @@
           <a:lstStyle/>
           <a:p>
             <a:r>
-              <a:rPr lang="en-US"/>
+              <a:rPr lang="en-US" smtClean="0"/>
               <a:t>Click to edit Master title style</a:t>
             </a:r>
-            <a:endParaRPr lang="en-IN"/>
-          </a:p>
-        </p:txBody>
-      </p:sp>
-      <p:sp>
-        <p:nvSpPr>
-          <p:cNvPr id="3" name="Content Placeholder 2">
-            <a:extLst>
-              <a:ext uri="{FF2B5EF4-FFF2-40B4-BE49-F238E27FC236}">
-                <a16:creationId xmlns:a16="http://schemas.microsoft.com/office/drawing/2014/main" id="{8837341F-1CCA-D163-27F4-D61130485866}"/>
-              </a:ext>
-            </a:extLst>
-          </p:cNvPr>
+            <a:endParaRPr lang="en-US"/>
+          </a:p>
+        </p:txBody>
+      </p:sp>
+      <p:sp>
+        <p:nvSpPr>
+          <p:cNvPr id="3" name="Content Placeholder 2"/>
           <p:cNvSpPr>
             <a:spLocks noGrp="1"/>
           </p:cNvSpPr>
@@ -808,50 +707,44 @@
           <a:p>
             <a:pPr lvl="0"/>
             <a:r>
-              <a:rPr lang="en-US"/>
-              <a:t>Click to edit Master text styles</a:t>
+              <a:rPr lang="en-US" smtClean="0"/>
+              <a:t>Edit Master text styles</a:t>
             </a:r>
           </a:p>
           <a:p>
             <a:pPr lvl="1"/>
             <a:r>
-              <a:rPr lang="en-US"/>
+              <a:rPr lang="en-US" smtClean="0"/>
               <a:t>Second level</a:t>
             </a:r>
           </a:p>
           <a:p>
             <a:pPr lvl="2"/>
             <a:r>
-              <a:rPr lang="en-US"/>
+              <a:rPr lang="en-US" smtClean="0"/>
               <a:t>Third level</a:t>
             </a:r>
           </a:p>
           <a:p>
             <a:pPr lvl="3"/>
             <a:r>
-              <a:rPr lang="en-US"/>
+              <a:rPr lang="en-US" smtClean="0"/>
               <a:t>Fourth level</a:t>
             </a:r>
           </a:p>
           <a:p>
             <a:pPr lvl="4"/>
             <a:r>
-              <a:rPr lang="en-US"/>
+              <a:rPr lang="en-US" smtClean="0"/>
               <a:t>Fifth level</a:t>
             </a:r>
-            <a:endParaRPr lang="en-IN"/>
-          </a:p>
-        </p:txBody>
-      </p:sp>
-      <p:sp>
-        <p:nvSpPr>
-          <p:cNvPr id="4" name="Date Placeholder 3">
-            <a:extLst>
-              <a:ext uri="{FF2B5EF4-FFF2-40B4-BE49-F238E27FC236}">
-                <a16:creationId xmlns:a16="http://schemas.microsoft.com/office/drawing/2014/main" id="{FBA9010C-C6EF-16C1-27BA-EFDCEFBF804E}"/>
-              </a:ext>
-            </a:extLst>
-          </p:cNvPr>
+            <a:endParaRPr lang="en-US"/>
+          </a:p>
+        </p:txBody>
+      </p:sp>
+      <p:sp>
+        <p:nvSpPr>
+          <p:cNvPr id="4" name="Date Placeholder 3"/>
           <p:cNvSpPr>
             <a:spLocks noGrp="1"/>
           </p:cNvSpPr>
@@ -864,23 +757,17 @@
           <a:bodyPr/>
           <a:lstStyle/>
           <a:p>
-            <a:fld id="{E471BDBF-D618-42A7-B9D8-B6E6A6C95C5A}" type="datetimeFigureOut">
-              <a:rPr lang="en-IN" smtClean="0"/>
-              <a:t>26-03-2026</a:t>
+            <a:fld id="{C8619975-09B3-45A9-981B-24156A02B11A}" type="datetimeFigureOut">
+              <a:rPr lang="en-US" smtClean="0"/>
+              <a:t>3/26/2026</a:t>
             </a:fld>
-            <a:endParaRPr lang="en-IN"/>
-          </a:p>
-        </p:txBody>
-      </p:sp>
-      <p:sp>
-        <p:nvSpPr>
-          <p:cNvPr id="5" name="Footer Placeholder 4">
-            <a:extLst>
-              <a:ext uri="{FF2B5EF4-FFF2-40B4-BE49-F238E27FC236}">
-                <a16:creationId xmlns:a16="http://schemas.microsoft.com/office/drawing/2014/main" id="{884C7055-3D4C-74C5-2F4F-F7FADCF1B314}"/>
-              </a:ext>
-            </a:extLst>
-          </p:cNvPr>
+            <a:endParaRPr lang="en-US"/>
+          </a:p>
+        </p:txBody>
+      </p:sp>
+      <p:sp>
+        <p:nvSpPr>
+          <p:cNvPr id="5" name="Footer Placeholder 4"/>
           <p:cNvSpPr>
             <a:spLocks noGrp="1"/>
           </p:cNvSpPr>
@@ -893,19 +780,13 @@
           <a:bodyPr/>
           <a:lstStyle/>
           <a:p>
-            <a:endParaRPr lang="en-IN"/>
-          </a:p>
-        </p:txBody>
-      </p:sp>
-      <p:sp>
-        <p:nvSpPr>
-          <p:cNvPr id="6" name="Slide Number Placeholder 5">
-            <a:extLst>
-              <a:ext uri="{FF2B5EF4-FFF2-40B4-BE49-F238E27FC236}">
-                <a16:creationId xmlns:a16="http://schemas.microsoft.com/office/drawing/2014/main" id="{FE212FA3-EE87-720E-22C2-8117F4AD79E9}"/>
-              </a:ext>
-            </a:extLst>
-          </p:cNvPr>
+            <a:endParaRPr lang="en-US"/>
+          </a:p>
+        </p:txBody>
+      </p:sp>
+      <p:sp>
+        <p:nvSpPr>
+          <p:cNvPr id="6" name="Slide Number Placeholder 5"/>
           <p:cNvSpPr>
             <a:spLocks noGrp="1"/>
           </p:cNvSpPr>
@@ -918,18 +799,18 @@
           <a:bodyPr/>
           <a:lstStyle/>
           <a:p>
-            <a:fld id="{B8EAE59F-CC89-4136-872C-DCBA0EEB52F5}" type="slidenum">
-              <a:rPr lang="en-IN" smtClean="0"/>
+            <a:fld id="{F8EBE27D-6BE1-4123-A15D-30EC878A573F}" type="slidenum">
+              <a:rPr lang="en-US" smtClean="0"/>
               <a:t>‹#›</a:t>
             </a:fld>
-            <a:endParaRPr lang="en-IN"/>
+            <a:endParaRPr lang="en-US"/>
           </a:p>
         </p:txBody>
       </p:sp>
     </p:spTree>
     <p:extLst>
       <p:ext uri="{BB962C8B-B14F-4D97-AF65-F5344CB8AC3E}">
-        <p14:creationId xmlns:p14="http://schemas.microsoft.com/office/powerpoint/2010/main" val="962627378"/>
+        <p14:creationId xmlns:p14="http://schemas.microsoft.com/office/powerpoint/2010/main" val="1382944240"/>
       </p:ext>
     </p:extLst>
   </p:cSld>
@@ -958,13 +839,7 @@
       </p:grpSpPr>
       <p:sp>
         <p:nvSpPr>
-          <p:cNvPr id="2" name="Title 1">
-            <a:extLst>
-              <a:ext uri="{FF2B5EF4-FFF2-40B4-BE49-F238E27FC236}">
-                <a16:creationId xmlns:a16="http://schemas.microsoft.com/office/drawing/2014/main" id="{94323431-5192-AE86-D02C-FA4A35A12D78}"/>
-              </a:ext>
-            </a:extLst>
-          </p:cNvPr>
+          <p:cNvPr id="2" name="Title 1"/>
           <p:cNvSpPr>
             <a:spLocks noGrp="1"/>
           </p:cNvSpPr>
@@ -987,22 +862,16 @@
           </a:lstStyle>
           <a:p>
             <a:r>
-              <a:rPr lang="en-US"/>
+              <a:rPr lang="en-US" smtClean="0"/>
               <a:t>Click to edit Master title style</a:t>
             </a:r>
-            <a:endParaRPr lang="en-IN"/>
-          </a:p>
-        </p:txBody>
-      </p:sp>
-      <p:sp>
-        <p:nvSpPr>
-          <p:cNvPr id="3" name="Text Placeholder 2">
-            <a:extLst>
-              <a:ext uri="{FF2B5EF4-FFF2-40B4-BE49-F238E27FC236}">
-                <a16:creationId xmlns:a16="http://schemas.microsoft.com/office/drawing/2014/main" id="{0FC9BCAF-A9C5-3648-614D-7A643257D3E7}"/>
-              </a:ext>
-            </a:extLst>
-          </p:cNvPr>
+            <a:endParaRPr lang="en-US"/>
+          </a:p>
+        </p:txBody>
+      </p:sp>
+      <p:sp>
+        <p:nvSpPr>
+          <p:cNvPr id="3" name="Text Placeholder 2"/>
           <p:cNvSpPr>
             <a:spLocks noGrp="1"/>
           </p:cNvSpPr>
@@ -1024,7 +893,7 @@
               <a:defRPr sz="2400">
                 <a:solidFill>
                   <a:schemeClr val="tx1">
-                    <a:tint val="82000"/>
+                    <a:tint val="75000"/>
                   </a:schemeClr>
                 </a:solidFill>
               </a:defRPr>
@@ -1034,7 +903,7 @@
               <a:defRPr sz="2000">
                 <a:solidFill>
                   <a:schemeClr val="tx1">
-                    <a:tint val="82000"/>
+                    <a:tint val="75000"/>
                   </a:schemeClr>
                 </a:solidFill>
               </a:defRPr>
@@ -1044,7 +913,7 @@
               <a:defRPr sz="1800">
                 <a:solidFill>
                   <a:schemeClr val="tx1">
-                    <a:tint val="82000"/>
+                    <a:tint val="75000"/>
                   </a:schemeClr>
                 </a:solidFill>
               </a:defRPr>
@@ -1054,7 +923,7 @@
               <a:defRPr sz="1600">
                 <a:solidFill>
                   <a:schemeClr val="tx1">
-                    <a:tint val="82000"/>
+                    <a:tint val="75000"/>
                   </a:schemeClr>
                 </a:solidFill>
               </a:defRPr>
@@ -1064,7 +933,7 @@
               <a:defRPr sz="1600">
                 <a:solidFill>
                   <a:schemeClr val="tx1">
-                    <a:tint val="82000"/>
+                    <a:tint val="75000"/>
                   </a:schemeClr>
                 </a:solidFill>
               </a:defRPr>
@@ -1074,7 +943,7 @@
               <a:defRPr sz="1600">
                 <a:solidFill>
                   <a:schemeClr val="tx1">
-                    <a:tint val="82000"/>
+                    <a:tint val="75000"/>
                   </a:schemeClr>
                 </a:solidFill>
               </a:defRPr>
@@ -1084,7 +953,7 @@
               <a:defRPr sz="1600">
                 <a:solidFill>
                   <a:schemeClr val="tx1">
-                    <a:tint val="82000"/>
+                    <a:tint val="75000"/>
                   </a:schemeClr>
                 </a:solidFill>
               </a:defRPr>
@@ -1094,7 +963,7 @@
               <a:defRPr sz="1600">
                 <a:solidFill>
                   <a:schemeClr val="tx1">
-                    <a:tint val="82000"/>
+                    <a:tint val="75000"/>
                   </a:schemeClr>
                 </a:solidFill>
               </a:defRPr>
@@ -1104,7 +973,7 @@
               <a:defRPr sz="1600">
                 <a:solidFill>
                   <a:schemeClr val="tx1">
-                    <a:tint val="82000"/>
+                    <a:tint val="75000"/>
                   </a:schemeClr>
                 </a:solidFill>
               </a:defRPr>
@@ -1113,21 +982,15 @@
           <a:p>
             <a:pPr lvl="0"/>
             <a:r>
-              <a:rPr lang="en-US"/>
-              <a:t>Click to edit Master text styles</a:t>
-            </a:r>
-          </a:p>
-        </p:txBody>
-      </p:sp>
-      <p:sp>
-        <p:nvSpPr>
-          <p:cNvPr id="4" name="Date Placeholder 3">
-            <a:extLst>
-              <a:ext uri="{FF2B5EF4-FFF2-40B4-BE49-F238E27FC236}">
-                <a16:creationId xmlns:a16="http://schemas.microsoft.com/office/drawing/2014/main" id="{0B0FF40C-A67F-C261-FDFD-1206AA425489}"/>
-              </a:ext>
-            </a:extLst>
-          </p:cNvPr>
+              <a:rPr lang="en-US" smtClean="0"/>
+              <a:t>Edit Master text styles</a:t>
+            </a:r>
+          </a:p>
+        </p:txBody>
+      </p:sp>
+      <p:sp>
+        <p:nvSpPr>
+          <p:cNvPr id="4" name="Date Placeholder 3"/>
           <p:cNvSpPr>
             <a:spLocks noGrp="1"/>
           </p:cNvSpPr>
@@ -1140,23 +1003,17 @@
           <a:bodyPr/>
           <a:lstStyle/>
           <a:p>
-            <a:fld id="{E471BDBF-D618-42A7-B9D8-B6E6A6C95C5A}" type="datetimeFigureOut">
-              <a:rPr lang="en-IN" smtClean="0"/>
-              <a:t>26-03-2026</a:t>
+            <a:fld id="{C8619975-09B3-45A9-981B-24156A02B11A}" type="datetimeFigureOut">
+              <a:rPr lang="en-US" smtClean="0"/>
+              <a:t>3/26/2026</a:t>
             </a:fld>
-            <a:endParaRPr lang="en-IN"/>
-          </a:p>
-        </p:txBody>
-      </p:sp>
-      <p:sp>
-        <p:nvSpPr>
-          <p:cNvPr id="5" name="Footer Placeholder 4">
-            <a:extLst>
-              <a:ext uri="{FF2B5EF4-FFF2-40B4-BE49-F238E27FC236}">
-                <a16:creationId xmlns:a16="http://schemas.microsoft.com/office/drawing/2014/main" id="{EC7A8E04-047A-F182-F0C9-FE0F1C1E35FC}"/>
-              </a:ext>
-            </a:extLst>
-          </p:cNvPr>
+            <a:endParaRPr lang="en-US"/>
+          </a:p>
+        </p:txBody>
+      </p:sp>
+      <p:sp>
+        <p:nvSpPr>
+          <p:cNvPr id="5" name="Footer Placeholder 4"/>
           <p:cNvSpPr>
             <a:spLocks noGrp="1"/>
           </p:cNvSpPr>
@@ -1169,19 +1026,13 @@
           <a:bodyPr/>
           <a:lstStyle/>
           <a:p>
-            <a:endParaRPr lang="en-IN"/>
-          </a:p>
-        </p:txBody>
-      </p:sp>
-      <p:sp>
-        <p:nvSpPr>
-          <p:cNvPr id="6" name="Slide Number Placeholder 5">
-            <a:extLst>
-              <a:ext uri="{FF2B5EF4-FFF2-40B4-BE49-F238E27FC236}">
-                <a16:creationId xmlns:a16="http://schemas.microsoft.com/office/drawing/2014/main" id="{34F56166-C823-24A6-B3B9-1D8B901327B4}"/>
-              </a:ext>
-            </a:extLst>
-          </p:cNvPr>
+            <a:endParaRPr lang="en-US"/>
+          </a:p>
+        </p:txBody>
+      </p:sp>
+      <p:sp>
+        <p:nvSpPr>
+          <p:cNvPr id="6" name="Slide Number Placeholder 5"/>
           <p:cNvSpPr>
             <a:spLocks noGrp="1"/>
           </p:cNvSpPr>
@@ -1194,18 +1045,18 @@
           <a:bodyPr/>
           <a:lstStyle/>
           <a:p>
-            <a:fld id="{B8EAE59F-CC89-4136-872C-DCBA0EEB52F5}" type="slidenum">
-              <a:rPr lang="en-IN" smtClean="0"/>
+            <a:fld id="{F8EBE27D-6BE1-4123-A15D-30EC878A573F}" type="slidenum">
+              <a:rPr lang="en-US" smtClean="0"/>
               <a:t>‹#›</a:t>
             </a:fld>
-            <a:endParaRPr lang="en-IN"/>
+            <a:endParaRPr lang="en-US"/>
           </a:p>
         </p:txBody>
       </p:sp>
     </p:spTree>
     <p:extLst>
       <p:ext uri="{BB962C8B-B14F-4D97-AF65-F5344CB8AC3E}">
-        <p14:creationId xmlns:p14="http://schemas.microsoft.com/office/powerpoint/2010/main" val="653848327"/>
+        <p14:creationId xmlns:p14="http://schemas.microsoft.com/office/powerpoint/2010/main" val="3208345847"/>
       </p:ext>
     </p:extLst>
   </p:cSld>
@@ -1234,13 +1085,7 @@
       </p:grpSpPr>
       <p:sp>
         <p:nvSpPr>
-          <p:cNvPr id="2" name="Title 1">
-            <a:extLst>
-              <a:ext uri="{FF2B5EF4-FFF2-40B4-BE49-F238E27FC236}">
-                <a16:creationId xmlns:a16="http://schemas.microsoft.com/office/drawing/2014/main" id="{09AF2B45-98DF-2630-3820-4BF21BDB7040}"/>
-              </a:ext>
-            </a:extLst>
-          </p:cNvPr>
+          <p:cNvPr id="2" name="Title 1"/>
           <p:cNvSpPr>
             <a:spLocks noGrp="1"/>
           </p:cNvSpPr>
@@ -1254,22 +1099,16 @@
           <a:lstStyle/>
           <a:p>
             <a:r>
-              <a:rPr lang="en-US"/>
+              <a:rPr lang="en-US" smtClean="0"/>
               <a:t>Click to edit Master title style</a:t>
             </a:r>
-            <a:endParaRPr lang="en-IN"/>
-          </a:p>
-        </p:txBody>
-      </p:sp>
-      <p:sp>
-        <p:nvSpPr>
-          <p:cNvPr id="3" name="Content Placeholder 2">
-            <a:extLst>
-              <a:ext uri="{FF2B5EF4-FFF2-40B4-BE49-F238E27FC236}">
-                <a16:creationId xmlns:a16="http://schemas.microsoft.com/office/drawing/2014/main" id="{5F2132C0-6C0B-7FAE-EF52-D930271396A0}"/>
-              </a:ext>
-            </a:extLst>
-          </p:cNvPr>
+            <a:endParaRPr lang="en-US"/>
+          </a:p>
+        </p:txBody>
+      </p:sp>
+      <p:sp>
+        <p:nvSpPr>
+          <p:cNvPr id="3" name="Content Placeholder 2"/>
           <p:cNvSpPr>
             <a:spLocks noGrp="1"/>
           </p:cNvSpPr>
@@ -1289,50 +1128,44 @@
           <a:p>
             <a:pPr lvl="0"/>
             <a:r>
-              <a:rPr lang="en-US"/>
-              <a:t>Click to edit Master text styles</a:t>
+              <a:rPr lang="en-US" smtClean="0"/>
+              <a:t>Edit Master text styles</a:t>
             </a:r>
           </a:p>
           <a:p>
             <a:pPr lvl="1"/>
             <a:r>
-              <a:rPr lang="en-US"/>
+              <a:rPr lang="en-US" smtClean="0"/>
               <a:t>Second level</a:t>
             </a:r>
           </a:p>
           <a:p>
             <a:pPr lvl="2"/>
             <a:r>
-              <a:rPr lang="en-US"/>
+              <a:rPr lang="en-US" smtClean="0"/>
               <a:t>Third level</a:t>
             </a:r>
           </a:p>
           <a:p>
             <a:pPr lvl="3"/>
             <a:r>
-              <a:rPr lang="en-US"/>
+              <a:rPr lang="en-US" smtClean="0"/>
               <a:t>Fourth level</a:t>
             </a:r>
           </a:p>
           <a:p>
             <a:pPr lvl="4"/>
             <a:r>
-              <a:rPr lang="en-US"/>
+              <a:rPr lang="en-US" smtClean="0"/>
               <a:t>Fifth level</a:t>
             </a:r>
-            <a:endParaRPr lang="en-IN"/>
-          </a:p>
-        </p:txBody>
-      </p:sp>
-      <p:sp>
-        <p:nvSpPr>
-          <p:cNvPr id="4" name="Content Placeholder 3">
-            <a:extLst>
-              <a:ext uri="{FF2B5EF4-FFF2-40B4-BE49-F238E27FC236}">
-                <a16:creationId xmlns:a16="http://schemas.microsoft.com/office/drawing/2014/main" id="{E27A8CA1-0D40-7E81-6D19-40450E7443A2}"/>
-              </a:ext>
-            </a:extLst>
-          </p:cNvPr>
+            <a:endParaRPr lang="en-US"/>
+          </a:p>
+        </p:txBody>
+      </p:sp>
+      <p:sp>
+        <p:nvSpPr>
+          <p:cNvPr id="4" name="Content Placeholder 3"/>
           <p:cNvSpPr>
             <a:spLocks noGrp="1"/>
           </p:cNvSpPr>
@@ -1352,50 +1185,44 @@
           <a:p>
             <a:pPr lvl="0"/>
             <a:r>
-              <a:rPr lang="en-US"/>
-              <a:t>Click to edit Master text styles</a:t>
+              <a:rPr lang="en-US" smtClean="0"/>
+              <a:t>Edit Master text styles</a:t>
             </a:r>
           </a:p>
           <a:p>
             <a:pPr lvl="1"/>
             <a:r>
-              <a:rPr lang="en-US"/>
+              <a:rPr lang="en-US" smtClean="0"/>
               <a:t>Second level</a:t>
             </a:r>
           </a:p>
           <a:p>
             <a:pPr lvl="2"/>
             <a:r>
-              <a:rPr lang="en-US"/>
+              <a:rPr lang="en-US" smtClean="0"/>
               <a:t>Third level</a:t>
             </a:r>
           </a:p>
           <a:p>
             <a:pPr lvl="3"/>
             <a:r>
-              <a:rPr lang="en-US"/>
+              <a:rPr lang="en-US" smtClean="0"/>
               <a:t>Fourth level</a:t>
             </a:r>
           </a:p>
           <a:p>
             <a:pPr lvl="4"/>
             <a:r>
-              <a:rPr lang="en-US"/>
+              <a:rPr lang="en-US" smtClean="0"/>
               <a:t>Fifth level</a:t>
             </a:r>
-            <a:endParaRPr lang="en-IN"/>
-          </a:p>
-        </p:txBody>
-      </p:sp>
-      <p:sp>
-        <p:nvSpPr>
-          <p:cNvPr id="5" name="Date Placeholder 4">
-            <a:extLst>
-              <a:ext uri="{FF2B5EF4-FFF2-40B4-BE49-F238E27FC236}">
-                <a16:creationId xmlns:a16="http://schemas.microsoft.com/office/drawing/2014/main" id="{04769E2B-6439-6E24-CA6A-053F64E610EC}"/>
-              </a:ext>
-            </a:extLst>
-          </p:cNvPr>
+            <a:endParaRPr lang="en-US"/>
+          </a:p>
+        </p:txBody>
+      </p:sp>
+      <p:sp>
+        <p:nvSpPr>
+          <p:cNvPr id="5" name="Date Placeholder 4"/>
           <p:cNvSpPr>
             <a:spLocks noGrp="1"/>
           </p:cNvSpPr>
@@ -1408,23 +1235,17 @@
           <a:bodyPr/>
           <a:lstStyle/>
           <a:p>
-            <a:fld id="{E471BDBF-D618-42A7-B9D8-B6E6A6C95C5A}" type="datetimeFigureOut">
-              <a:rPr lang="en-IN" smtClean="0"/>
-              <a:t>26-03-2026</a:t>
+            <a:fld id="{C8619975-09B3-45A9-981B-24156A02B11A}" type="datetimeFigureOut">
+              <a:rPr lang="en-US" smtClean="0"/>
+              <a:t>3/26/2026</a:t>
             </a:fld>
-            <a:endParaRPr lang="en-IN"/>
-          </a:p>
-        </p:txBody>
-      </p:sp>
-      <p:sp>
-        <p:nvSpPr>
-          <p:cNvPr id="6" name="Footer Placeholder 5">
-            <a:extLst>
-              <a:ext uri="{FF2B5EF4-FFF2-40B4-BE49-F238E27FC236}">
-                <a16:creationId xmlns:a16="http://schemas.microsoft.com/office/drawing/2014/main" id="{3606059F-1DC5-04B2-5FC5-998552E0EE94}"/>
-              </a:ext>
-            </a:extLst>
-          </p:cNvPr>
+            <a:endParaRPr lang="en-US"/>
+          </a:p>
+        </p:txBody>
+      </p:sp>
+      <p:sp>
+        <p:nvSpPr>
+          <p:cNvPr id="6" name="Footer Placeholder 5"/>
           <p:cNvSpPr>
             <a:spLocks noGrp="1"/>
           </p:cNvSpPr>
@@ -1437,19 +1258,13 @@
           <a:bodyPr/>
           <a:lstStyle/>
           <a:p>
-            <a:endParaRPr lang="en-IN"/>
-          </a:p>
-        </p:txBody>
-      </p:sp>
-      <p:sp>
-        <p:nvSpPr>
-          <p:cNvPr id="7" name="Slide Number Placeholder 6">
-            <a:extLst>
-              <a:ext uri="{FF2B5EF4-FFF2-40B4-BE49-F238E27FC236}">
-                <a16:creationId xmlns:a16="http://schemas.microsoft.com/office/drawing/2014/main" id="{ADB4BF12-25E2-ED7A-6B79-D7DEAD9A2458}"/>
-              </a:ext>
-            </a:extLst>
-          </p:cNvPr>
+            <a:endParaRPr lang="en-US"/>
+          </a:p>
+        </p:txBody>
+      </p:sp>
+      <p:sp>
+        <p:nvSpPr>
+          <p:cNvPr id="7" name="Slide Number Placeholder 6"/>
           <p:cNvSpPr>
             <a:spLocks noGrp="1"/>
           </p:cNvSpPr>
@@ -1462,18 +1277,18 @@
           <a:bodyPr/>
           <a:lstStyle/>
           <a:p>
-            <a:fld id="{B8EAE59F-CC89-4136-872C-DCBA0EEB52F5}" type="slidenum">
-              <a:rPr lang="en-IN" smtClean="0"/>
+            <a:fld id="{F8EBE27D-6BE1-4123-A15D-30EC878A573F}" type="slidenum">
+              <a:rPr lang="en-US" smtClean="0"/>
               <a:t>‹#›</a:t>
             </a:fld>
-            <a:endParaRPr lang="en-IN"/>
+            <a:endParaRPr lang="en-US"/>
           </a:p>
         </p:txBody>
       </p:sp>
     </p:spTree>
     <p:extLst>
       <p:ext uri="{BB962C8B-B14F-4D97-AF65-F5344CB8AC3E}">
-        <p14:creationId xmlns:p14="http://schemas.microsoft.com/office/powerpoint/2010/main" val="215496065"/>
+        <p14:creationId xmlns:p14="http://schemas.microsoft.com/office/powerpoint/2010/main" val="4108430967"/>
       </p:ext>
     </p:extLst>
   </p:cSld>
@@ -1502,13 +1317,7 @@
       </p:grpSpPr>
       <p:sp>
         <p:nvSpPr>
-          <p:cNvPr id="2" name="Title 1">
-            <a:extLst>
-              <a:ext uri="{FF2B5EF4-FFF2-40B4-BE49-F238E27FC236}">
-                <a16:creationId xmlns:a16="http://schemas.microsoft.com/office/drawing/2014/main" id="{DF285D3C-3EE2-12DA-6A94-9CEA037C22C2}"/>
-              </a:ext>
-            </a:extLst>
-          </p:cNvPr>
+          <p:cNvPr id="2" name="Title 1"/>
           <p:cNvSpPr>
             <a:spLocks noGrp="1"/>
           </p:cNvSpPr>
@@ -1527,22 +1336,16 @@
           <a:lstStyle/>
           <a:p>
             <a:r>
-              <a:rPr lang="en-US"/>
+              <a:rPr lang="en-US" smtClean="0"/>
               <a:t>Click to edit Master title style</a:t>
             </a:r>
-            <a:endParaRPr lang="en-IN"/>
-          </a:p>
-        </p:txBody>
-      </p:sp>
-      <p:sp>
-        <p:nvSpPr>
-          <p:cNvPr id="3" name="Text Placeholder 2">
-            <a:extLst>
-              <a:ext uri="{FF2B5EF4-FFF2-40B4-BE49-F238E27FC236}">
-                <a16:creationId xmlns:a16="http://schemas.microsoft.com/office/drawing/2014/main" id="{65342437-BAC3-7E91-D9D6-F02D54F6578B}"/>
-              </a:ext>
-            </a:extLst>
-          </p:cNvPr>
+            <a:endParaRPr lang="en-US"/>
+          </a:p>
+        </p:txBody>
+      </p:sp>
+      <p:sp>
+        <p:nvSpPr>
+          <p:cNvPr id="3" name="Text Placeholder 2"/>
           <p:cNvSpPr>
             <a:spLocks noGrp="1"/>
           </p:cNvSpPr>
@@ -1599,21 +1402,15 @@
           <a:p>
             <a:pPr lvl="0"/>
             <a:r>
-              <a:rPr lang="en-US"/>
-              <a:t>Click to edit Master text styles</a:t>
-            </a:r>
-          </a:p>
-        </p:txBody>
-      </p:sp>
-      <p:sp>
-        <p:nvSpPr>
-          <p:cNvPr id="4" name="Content Placeholder 3">
-            <a:extLst>
-              <a:ext uri="{FF2B5EF4-FFF2-40B4-BE49-F238E27FC236}">
-                <a16:creationId xmlns:a16="http://schemas.microsoft.com/office/drawing/2014/main" id="{A4E74866-A0B9-49A5-62DB-F77EE50C25BC}"/>
-              </a:ext>
-            </a:extLst>
-          </p:cNvPr>
+              <a:rPr lang="en-US" smtClean="0"/>
+              <a:t>Edit Master text styles</a:t>
+            </a:r>
+          </a:p>
+        </p:txBody>
+      </p:sp>
+      <p:sp>
+        <p:nvSpPr>
+          <p:cNvPr id="4" name="Content Placeholder 3"/>
           <p:cNvSpPr>
             <a:spLocks noGrp="1"/>
           </p:cNvSpPr>
@@ -1633,50 +1430,44 @@
           <a:p>
             <a:pPr lvl="0"/>
             <a:r>
-              <a:rPr lang="en-US"/>
-              <a:t>Click to edit Master text styles</a:t>
+              <a:rPr lang="en-US" smtClean="0"/>
+              <a:t>Edit Master text styles</a:t>
             </a:r>
           </a:p>
           <a:p>
             <a:pPr lvl="1"/>
             <a:r>
-              <a:rPr lang="en-US"/>
+              <a:rPr lang="en-US" smtClean="0"/>
               <a:t>Second level</a:t>
             </a:r>
           </a:p>
           <a:p>
             <a:pPr lvl="2"/>
             <a:r>
-              <a:rPr lang="en-US"/>
+              <a:rPr lang="en-US" smtClean="0"/>
               <a:t>Third level</a:t>
             </a:r>
           </a:p>
           <a:p>
             <a:pPr lvl="3"/>
             <a:r>
-              <a:rPr lang="en-US"/>
+              <a:rPr lang="en-US" smtClean="0"/>
               <a:t>Fourth level</a:t>
             </a:r>
           </a:p>
           <a:p>
             <a:pPr lvl="4"/>
             <a:r>
-              <a:rPr lang="en-US"/>
+              <a:rPr lang="en-US" smtClean="0"/>
               <a:t>Fifth level</a:t>
             </a:r>
-            <a:endParaRPr lang="en-IN"/>
-          </a:p>
-        </p:txBody>
-      </p:sp>
-      <p:sp>
-        <p:nvSpPr>
-          <p:cNvPr id="5" name="Text Placeholder 4">
-            <a:extLst>
-              <a:ext uri="{FF2B5EF4-FFF2-40B4-BE49-F238E27FC236}">
-                <a16:creationId xmlns:a16="http://schemas.microsoft.com/office/drawing/2014/main" id="{28D94C41-07E2-5F86-A7A6-4EA2325B5F8B}"/>
-              </a:ext>
-            </a:extLst>
-          </p:cNvPr>
+            <a:endParaRPr lang="en-US"/>
+          </a:p>
+        </p:txBody>
+      </p:sp>
+      <p:sp>
+        <p:nvSpPr>
+          <p:cNvPr id="5" name="Text Placeholder 4"/>
           <p:cNvSpPr>
             <a:spLocks noGrp="1"/>
           </p:cNvSpPr>
@@ -1733,21 +1524,15 @@
           <a:p>
             <a:pPr lvl="0"/>
             <a:r>
-              <a:rPr lang="en-US"/>
-              <a:t>Click to edit Master text styles</a:t>
-            </a:r>
-          </a:p>
-        </p:txBody>
-      </p:sp>
-      <p:sp>
-        <p:nvSpPr>
-          <p:cNvPr id="6" name="Content Placeholder 5">
-            <a:extLst>
-              <a:ext uri="{FF2B5EF4-FFF2-40B4-BE49-F238E27FC236}">
-                <a16:creationId xmlns:a16="http://schemas.microsoft.com/office/drawing/2014/main" id="{62B7345B-A2AF-E200-B13A-CBEA69C3CE2C}"/>
-              </a:ext>
-            </a:extLst>
-          </p:cNvPr>
+              <a:rPr lang="en-US" smtClean="0"/>
+              <a:t>Edit Master text styles</a:t>
+            </a:r>
+          </a:p>
+        </p:txBody>
+      </p:sp>
+      <p:sp>
+        <p:nvSpPr>
+          <p:cNvPr id="6" name="Content Placeholder 5"/>
           <p:cNvSpPr>
             <a:spLocks noGrp="1"/>
           </p:cNvSpPr>
@@ -1767,50 +1552,44 @@
           <a:p>
             <a:pPr lvl="0"/>
             <a:r>
-              <a:rPr lang="en-US"/>
-              <a:t>Click to edit Master text styles</a:t>
+              <a:rPr lang="en-US" smtClean="0"/>
+              <a:t>Edit Master text styles</a:t>
             </a:r>
           </a:p>
           <a:p>
             <a:pPr lvl="1"/>
             <a:r>
-              <a:rPr lang="en-US"/>
+              <a:rPr lang="en-US" smtClean="0"/>
               <a:t>Second level</a:t>
             </a:r>
           </a:p>
           <a:p>
             <a:pPr lvl="2"/>
             <a:r>
-              <a:rPr lang="en-US"/>
+              <a:rPr lang="en-US" smtClean="0"/>
               <a:t>Third level</a:t>
             </a:r>
           </a:p>
           <a:p>
             <a:pPr lvl="3"/>
             <a:r>
-              <a:rPr lang="en-US"/>
+              <a:rPr lang="en-US" smtClean="0"/>
               <a:t>Fourth level</a:t>
             </a:r>
           </a:p>
           <a:p>
             <a:pPr lvl="4"/>
             <a:r>
-              <a:rPr lang="en-US"/>
+              <a:rPr lang="en-US" smtClean="0"/>
               <a:t>Fifth level</a:t>
             </a:r>
-            <a:endParaRPr lang="en-IN"/>
-          </a:p>
-        </p:txBody>
-      </p:sp>
-      <p:sp>
-        <p:nvSpPr>
-          <p:cNvPr id="7" name="Date Placeholder 6">
-            <a:extLst>
-              <a:ext uri="{FF2B5EF4-FFF2-40B4-BE49-F238E27FC236}">
-                <a16:creationId xmlns:a16="http://schemas.microsoft.com/office/drawing/2014/main" id="{DD4C3074-DA8A-01CA-9094-3AF3CC32E9DF}"/>
-              </a:ext>
-            </a:extLst>
-          </p:cNvPr>
+            <a:endParaRPr lang="en-US"/>
+          </a:p>
+        </p:txBody>
+      </p:sp>
+      <p:sp>
+        <p:nvSpPr>
+          <p:cNvPr id="7" name="Date Placeholder 6"/>
           <p:cNvSpPr>
             <a:spLocks noGrp="1"/>
           </p:cNvSpPr>
@@ -1823,23 +1602,17 @@
           <a:bodyPr/>
           <a:lstStyle/>
           <a:p>
-            <a:fld id="{E471BDBF-D618-42A7-B9D8-B6E6A6C95C5A}" type="datetimeFigureOut">
-              <a:rPr lang="en-IN" smtClean="0"/>
-              <a:t>26-03-2026</a:t>
+            <a:fld id="{C8619975-09B3-45A9-981B-24156A02B11A}" type="datetimeFigureOut">
+              <a:rPr lang="en-US" smtClean="0"/>
+              <a:t>3/26/2026</a:t>
             </a:fld>
-            <a:endParaRPr lang="en-IN"/>
-          </a:p>
-        </p:txBody>
-      </p:sp>
-      <p:sp>
-        <p:nvSpPr>
-          <p:cNvPr id="8" name="Footer Placeholder 7">
-            <a:extLst>
-              <a:ext uri="{FF2B5EF4-FFF2-40B4-BE49-F238E27FC236}">
-                <a16:creationId xmlns:a16="http://schemas.microsoft.com/office/drawing/2014/main" id="{55EBA05F-B126-493F-4AE5-C4987F8C6A17}"/>
-              </a:ext>
-            </a:extLst>
-          </p:cNvPr>
+            <a:endParaRPr lang="en-US"/>
+          </a:p>
+        </p:txBody>
+      </p:sp>
+      <p:sp>
+        <p:nvSpPr>
+          <p:cNvPr id="8" name="Footer Placeholder 7"/>
           <p:cNvSpPr>
             <a:spLocks noGrp="1"/>
           </p:cNvSpPr>
@@ -1852,19 +1625,13 @@
           <a:bodyPr/>
           <a:lstStyle/>
           <a:p>
-            <a:endParaRPr lang="en-IN"/>
-          </a:p>
-        </p:txBody>
-      </p:sp>
-      <p:sp>
-        <p:nvSpPr>
-          <p:cNvPr id="9" name="Slide Number Placeholder 8">
-            <a:extLst>
-              <a:ext uri="{FF2B5EF4-FFF2-40B4-BE49-F238E27FC236}">
-                <a16:creationId xmlns:a16="http://schemas.microsoft.com/office/drawing/2014/main" id="{2F7F5D63-E7F9-B3CF-9949-5E156C662B80}"/>
-              </a:ext>
-            </a:extLst>
-          </p:cNvPr>
+            <a:endParaRPr lang="en-US"/>
+          </a:p>
+        </p:txBody>
+      </p:sp>
+      <p:sp>
+        <p:nvSpPr>
+          <p:cNvPr id="9" name="Slide Number Placeholder 8"/>
           <p:cNvSpPr>
             <a:spLocks noGrp="1"/>
           </p:cNvSpPr>
@@ -1877,18 +1644,18 @@
           <a:bodyPr/>
           <a:lstStyle/>
           <a:p>
-            <a:fld id="{B8EAE59F-CC89-4136-872C-DCBA0EEB52F5}" type="slidenum">
-              <a:rPr lang="en-IN" smtClean="0"/>
+            <a:fld id="{F8EBE27D-6BE1-4123-A15D-30EC878A573F}" type="slidenum">
+              <a:rPr lang="en-US" smtClean="0"/>
               <a:t>‹#›</a:t>
             </a:fld>
-            <a:endParaRPr lang="en-IN"/>
+            <a:endParaRPr lang="en-US"/>
           </a:p>
         </p:txBody>
       </p:sp>
     </p:spTree>
     <p:extLst>
       <p:ext uri="{BB962C8B-B14F-4D97-AF65-F5344CB8AC3E}">
-        <p14:creationId xmlns:p14="http://schemas.microsoft.com/office/powerpoint/2010/main" val="1853618347"/>
+        <p14:creationId xmlns:p14="http://schemas.microsoft.com/office/powerpoint/2010/main" val="770302015"/>
       </p:ext>
     </p:extLst>
   </p:cSld>
@@ -1917,13 +1684,7 @@
       </p:grpSpPr>
       <p:sp>
         <p:nvSpPr>
-          <p:cNvPr id="2" name="Title 1">
-            <a:extLst>
-              <a:ext uri="{FF2B5EF4-FFF2-40B4-BE49-F238E27FC236}">
-                <a16:creationId xmlns:a16="http://schemas.microsoft.com/office/drawing/2014/main" id="{2EB76744-6D27-092C-8753-0F4C10456E21}"/>
-              </a:ext>
-            </a:extLst>
-          </p:cNvPr>
+          <p:cNvPr id="2" name="Title 1"/>
           <p:cNvSpPr>
             <a:spLocks noGrp="1"/>
           </p:cNvSpPr>
@@ -1937,22 +1698,16 @@
           <a:lstStyle/>
           <a:p>
             <a:r>
-              <a:rPr lang="en-US"/>
+              <a:rPr lang="en-US" smtClean="0"/>
               <a:t>Click to edit Master title style</a:t>
             </a:r>
-            <a:endParaRPr lang="en-IN"/>
-          </a:p>
-        </p:txBody>
-      </p:sp>
-      <p:sp>
-        <p:nvSpPr>
-          <p:cNvPr id="3" name="Date Placeholder 2">
-            <a:extLst>
-              <a:ext uri="{FF2B5EF4-FFF2-40B4-BE49-F238E27FC236}">
-                <a16:creationId xmlns:a16="http://schemas.microsoft.com/office/drawing/2014/main" id="{50C60CF3-C455-8F50-AB42-AE636ED5FC00}"/>
-              </a:ext>
-            </a:extLst>
-          </p:cNvPr>
+            <a:endParaRPr lang="en-US"/>
+          </a:p>
+        </p:txBody>
+      </p:sp>
+      <p:sp>
+        <p:nvSpPr>
+          <p:cNvPr id="3" name="Date Placeholder 2"/>
           <p:cNvSpPr>
             <a:spLocks noGrp="1"/>
           </p:cNvSpPr>
@@ -1965,23 +1720,17 @@
           <a:bodyPr/>
           <a:lstStyle/>
           <a:p>
-            <a:fld id="{E471BDBF-D618-42A7-B9D8-B6E6A6C95C5A}" type="datetimeFigureOut">
-              <a:rPr lang="en-IN" smtClean="0"/>
-              <a:t>26-03-2026</a:t>
+            <a:fld id="{C8619975-09B3-45A9-981B-24156A02B11A}" type="datetimeFigureOut">
+              <a:rPr lang="en-US" smtClean="0"/>
+              <a:t>3/26/2026</a:t>
             </a:fld>
-            <a:endParaRPr lang="en-IN"/>
-          </a:p>
-        </p:txBody>
-      </p:sp>
-      <p:sp>
-        <p:nvSpPr>
-          <p:cNvPr id="4" name="Footer Placeholder 3">
-            <a:extLst>
-              <a:ext uri="{FF2B5EF4-FFF2-40B4-BE49-F238E27FC236}">
-                <a16:creationId xmlns:a16="http://schemas.microsoft.com/office/drawing/2014/main" id="{09077850-44DD-6460-1EEB-C5FC0F48768F}"/>
-              </a:ext>
-            </a:extLst>
-          </p:cNvPr>
+            <a:endParaRPr lang="en-US"/>
+          </a:p>
+        </p:txBody>
+      </p:sp>
+      <p:sp>
+        <p:nvSpPr>
+          <p:cNvPr id="4" name="Footer Placeholder 3"/>
           <p:cNvSpPr>
             <a:spLocks noGrp="1"/>
           </p:cNvSpPr>
@@ -1994,19 +1743,13 @@
           <a:bodyPr/>
           <a:lstStyle/>
           <a:p>
-            <a:endParaRPr lang="en-IN"/>
-          </a:p>
-        </p:txBody>
-      </p:sp>
-      <p:sp>
-        <p:nvSpPr>
-          <p:cNvPr id="5" name="Slide Number Placeholder 4">
-            <a:extLst>
-              <a:ext uri="{FF2B5EF4-FFF2-40B4-BE49-F238E27FC236}">
-                <a16:creationId xmlns:a16="http://schemas.microsoft.com/office/drawing/2014/main" id="{AA49F0AF-0524-763D-31A4-A6EE7CEC85F0}"/>
-              </a:ext>
-            </a:extLst>
-          </p:cNvPr>
+            <a:endParaRPr lang="en-US"/>
+          </a:p>
+        </p:txBody>
+      </p:sp>
+      <p:sp>
+        <p:nvSpPr>
+          <p:cNvPr id="5" name="Slide Number Placeholder 4"/>
           <p:cNvSpPr>
             <a:spLocks noGrp="1"/>
           </p:cNvSpPr>
@@ -2019,18 +1762,18 @@
           <a:bodyPr/>
           <a:lstStyle/>
           <a:p>
-            <a:fld id="{B8EAE59F-CC89-4136-872C-DCBA0EEB52F5}" type="slidenum">
-              <a:rPr lang="en-IN" smtClean="0"/>
+            <a:fld id="{F8EBE27D-6BE1-4123-A15D-30EC878A573F}" type="slidenum">
+              <a:rPr lang="en-US" smtClean="0"/>
               <a:t>‹#›</a:t>
             </a:fld>
-            <a:endParaRPr lang="en-IN"/>
+            <a:endParaRPr lang="en-US"/>
           </a:p>
         </p:txBody>
       </p:sp>
     </p:spTree>
     <p:extLst>
       <p:ext uri="{BB962C8B-B14F-4D97-AF65-F5344CB8AC3E}">
-        <p14:creationId xmlns:p14="http://schemas.microsoft.com/office/powerpoint/2010/main" val="29177909"/>
+        <p14:creationId xmlns:p14="http://schemas.microsoft.com/office/powerpoint/2010/main" val="2260709"/>
       </p:ext>
     </p:extLst>
   </p:cSld>
@@ -2059,13 +1802,7 @@
       </p:grpSpPr>
       <p:sp>
         <p:nvSpPr>
-          <p:cNvPr id="2" name="Date Placeholder 1">
-            <a:extLst>
-              <a:ext uri="{FF2B5EF4-FFF2-40B4-BE49-F238E27FC236}">
-                <a16:creationId xmlns:a16="http://schemas.microsoft.com/office/drawing/2014/main" id="{A2B6B6EC-AD41-40CA-A702-5ACC13BB6D1D}"/>
-              </a:ext>
-            </a:extLst>
-          </p:cNvPr>
+          <p:cNvPr id="2" name="Date Placeholder 1"/>
           <p:cNvSpPr>
             <a:spLocks noGrp="1"/>
           </p:cNvSpPr>
@@ -2078,23 +1815,17 @@
           <a:bodyPr/>
           <a:lstStyle/>
           <a:p>
-            <a:fld id="{E471BDBF-D618-42A7-B9D8-B6E6A6C95C5A}" type="datetimeFigureOut">
-              <a:rPr lang="en-IN" smtClean="0"/>
-              <a:t>26-03-2026</a:t>
+            <a:fld id="{C8619975-09B3-45A9-981B-24156A02B11A}" type="datetimeFigureOut">
+              <a:rPr lang="en-US" smtClean="0"/>
+              <a:t>3/26/2026</a:t>
             </a:fld>
-            <a:endParaRPr lang="en-IN"/>
-          </a:p>
-        </p:txBody>
-      </p:sp>
-      <p:sp>
-        <p:nvSpPr>
-          <p:cNvPr id="3" name="Footer Placeholder 2">
-            <a:extLst>
-              <a:ext uri="{FF2B5EF4-FFF2-40B4-BE49-F238E27FC236}">
-                <a16:creationId xmlns:a16="http://schemas.microsoft.com/office/drawing/2014/main" id="{AA0E4CFC-E20B-9D8C-2D7D-578004D863B2}"/>
-              </a:ext>
-            </a:extLst>
-          </p:cNvPr>
+            <a:endParaRPr lang="en-US"/>
+          </a:p>
+        </p:txBody>
+      </p:sp>
+      <p:sp>
+        <p:nvSpPr>
+          <p:cNvPr id="3" name="Footer Placeholder 2"/>
           <p:cNvSpPr>
             <a:spLocks noGrp="1"/>
           </p:cNvSpPr>
@@ -2107,19 +1838,13 @@
           <a:bodyPr/>
           <a:lstStyle/>
           <a:p>
-            <a:endParaRPr lang="en-IN"/>
-          </a:p>
-        </p:txBody>
-      </p:sp>
-      <p:sp>
-        <p:nvSpPr>
-          <p:cNvPr id="4" name="Slide Number Placeholder 3">
-            <a:extLst>
-              <a:ext uri="{FF2B5EF4-FFF2-40B4-BE49-F238E27FC236}">
-                <a16:creationId xmlns:a16="http://schemas.microsoft.com/office/drawing/2014/main" id="{DFE8398D-DD33-5E29-6776-67724C240BF2}"/>
-              </a:ext>
-            </a:extLst>
-          </p:cNvPr>
+            <a:endParaRPr lang="en-US"/>
+          </a:p>
+        </p:txBody>
+      </p:sp>
+      <p:sp>
+        <p:nvSpPr>
+          <p:cNvPr id="4" name="Slide Number Placeholder 3"/>
           <p:cNvSpPr>
             <a:spLocks noGrp="1"/>
           </p:cNvSpPr>
@@ -2132,18 +1857,18 @@
           <a:bodyPr/>
           <a:lstStyle/>
           <a:p>
-            <a:fld id="{B8EAE59F-CC89-4136-872C-DCBA0EEB52F5}" type="slidenum">
-              <a:rPr lang="en-IN" smtClean="0"/>
+            <a:fld id="{F8EBE27D-6BE1-4123-A15D-30EC878A573F}" type="slidenum">
+              <a:rPr lang="en-US" smtClean="0"/>
               <a:t>‹#›</a:t>
             </a:fld>
-            <a:endParaRPr lang="en-IN"/>
+            <a:endParaRPr lang="en-US"/>
           </a:p>
         </p:txBody>
       </p:sp>
     </p:spTree>
     <p:extLst>
       <p:ext uri="{BB962C8B-B14F-4D97-AF65-F5344CB8AC3E}">
-        <p14:creationId xmlns:p14="http://schemas.microsoft.com/office/powerpoint/2010/main" val="1892577295"/>
+        <p14:creationId xmlns:p14="http://schemas.microsoft.com/office/powerpoint/2010/main" val="173712499"/>
       </p:ext>
     </p:extLst>
   </p:cSld>
@@ -2172,13 +1897,7 @@
       </p:grpSpPr>
       <p:sp>
         <p:nvSpPr>
-          <p:cNvPr id="2" name="Title 1">
-            <a:extLst>
-              <a:ext uri="{FF2B5EF4-FFF2-40B4-BE49-F238E27FC236}">
-                <a16:creationId xmlns:a16="http://schemas.microsoft.com/office/drawing/2014/main" id="{EF683DC2-8D50-F1A2-A8AB-B5D698B89271}"/>
-              </a:ext>
-            </a:extLst>
-          </p:cNvPr>
+          <p:cNvPr id="2" name="Title 1"/>
           <p:cNvSpPr>
             <a:spLocks noGrp="1"/>
           </p:cNvSpPr>
@@ -2201,22 +1920,16 @@
           </a:lstStyle>
           <a:p>
             <a:r>
-              <a:rPr lang="en-US"/>
+              <a:rPr lang="en-US" smtClean="0"/>
               <a:t>Click to edit Master title style</a:t>
             </a:r>
-            <a:endParaRPr lang="en-IN"/>
-          </a:p>
-        </p:txBody>
-      </p:sp>
-      <p:sp>
-        <p:nvSpPr>
-          <p:cNvPr id="3" name="Content Placeholder 2">
-            <a:extLst>
-              <a:ext uri="{FF2B5EF4-FFF2-40B4-BE49-F238E27FC236}">
-                <a16:creationId xmlns:a16="http://schemas.microsoft.com/office/drawing/2014/main" id="{6A94D157-A066-6559-9253-FDBEBC1016D7}"/>
-              </a:ext>
-            </a:extLst>
-          </p:cNvPr>
+            <a:endParaRPr lang="en-US"/>
+          </a:p>
+        </p:txBody>
+      </p:sp>
+      <p:sp>
+        <p:nvSpPr>
+          <p:cNvPr id="3" name="Content Placeholder 2"/>
           <p:cNvSpPr>
             <a:spLocks noGrp="1"/>
           </p:cNvSpPr>
@@ -2264,50 +1977,44 @@
           <a:p>
             <a:pPr lvl="0"/>
             <a:r>
-              <a:rPr lang="en-US"/>
-              <a:t>Click to edit Master text styles</a:t>
+              <a:rPr lang="en-US" smtClean="0"/>
+              <a:t>Edit Master text styles</a:t>
             </a:r>
           </a:p>
           <a:p>
             <a:pPr lvl="1"/>
             <a:r>
-              <a:rPr lang="en-US"/>
+              <a:rPr lang="en-US" smtClean="0"/>
               <a:t>Second level</a:t>
             </a:r>
           </a:p>
           <a:p>
             <a:pPr lvl="2"/>
             <a:r>
-              <a:rPr lang="en-US"/>
+              <a:rPr lang="en-US" smtClean="0"/>
               <a:t>Third level</a:t>
             </a:r>
           </a:p>
           <a:p>
             <a:pPr lvl="3"/>
             <a:r>
-              <a:rPr lang="en-US"/>
+              <a:rPr lang="en-US" smtClean="0"/>
               <a:t>Fourth level</a:t>
             </a:r>
           </a:p>
           <a:p>
             <a:pPr lvl="4"/>
             <a:r>
-              <a:rPr lang="en-US"/>
+              <a:rPr lang="en-US" smtClean="0"/>
               <a:t>Fifth level</a:t>
             </a:r>
-            <a:endParaRPr lang="en-IN"/>
-          </a:p>
-        </p:txBody>
-      </p:sp>
-      <p:sp>
-        <p:nvSpPr>
-          <p:cNvPr id="4" name="Text Placeholder 3">
-            <a:extLst>
-              <a:ext uri="{FF2B5EF4-FFF2-40B4-BE49-F238E27FC236}">
-                <a16:creationId xmlns:a16="http://schemas.microsoft.com/office/drawing/2014/main" id="{8EF6F78C-BEF6-8C7A-878C-2AA9CC2635BE}"/>
-              </a:ext>
-            </a:extLst>
-          </p:cNvPr>
+            <a:endParaRPr lang="en-US"/>
+          </a:p>
+        </p:txBody>
+      </p:sp>
+      <p:sp>
+        <p:nvSpPr>
+          <p:cNvPr id="4" name="Text Placeholder 3"/>
           <p:cNvSpPr>
             <a:spLocks noGrp="1"/>
           </p:cNvSpPr>
@@ -2364,21 +2071,15 @@
           <a:p>
             <a:pPr lvl="0"/>
             <a:r>
-              <a:rPr lang="en-US"/>
-              <a:t>Click to edit Master text styles</a:t>
-            </a:r>
-          </a:p>
-        </p:txBody>
-      </p:sp>
-      <p:sp>
-        <p:nvSpPr>
-          <p:cNvPr id="5" name="Date Placeholder 4">
-            <a:extLst>
-              <a:ext uri="{FF2B5EF4-FFF2-40B4-BE49-F238E27FC236}">
-                <a16:creationId xmlns:a16="http://schemas.microsoft.com/office/drawing/2014/main" id="{F76FF910-B684-A145-6838-A1EF9C138D80}"/>
-              </a:ext>
-            </a:extLst>
-          </p:cNvPr>
+              <a:rPr lang="en-US" smtClean="0"/>
+              <a:t>Edit Master text styles</a:t>
+            </a:r>
+          </a:p>
+        </p:txBody>
+      </p:sp>
+      <p:sp>
+        <p:nvSpPr>
+          <p:cNvPr id="5" name="Date Placeholder 4"/>
           <p:cNvSpPr>
             <a:spLocks noGrp="1"/>
           </p:cNvSpPr>
@@ -2391,23 +2092,17 @@
           <a:bodyPr/>
           <a:lstStyle/>
           <a:p>
-            <a:fld id="{E471BDBF-D618-42A7-B9D8-B6E6A6C95C5A}" type="datetimeFigureOut">
-              <a:rPr lang="en-IN" smtClean="0"/>
-              <a:t>26-03-2026</a:t>
+            <a:fld id="{C8619975-09B3-45A9-981B-24156A02B11A}" type="datetimeFigureOut">
+              <a:rPr lang="en-US" smtClean="0"/>
+              <a:t>3/26/2026</a:t>
             </a:fld>
-            <a:endParaRPr lang="en-IN"/>
-          </a:p>
-        </p:txBody>
-      </p:sp>
-      <p:sp>
-        <p:nvSpPr>
-          <p:cNvPr id="6" name="Footer Placeholder 5">
-            <a:extLst>
-              <a:ext uri="{FF2B5EF4-FFF2-40B4-BE49-F238E27FC236}">
-                <a16:creationId xmlns:a16="http://schemas.microsoft.com/office/drawing/2014/main" id="{FFF51B16-65CF-E8A2-1C28-E30981308CF1}"/>
-              </a:ext>
-            </a:extLst>
-          </p:cNvPr>
+            <a:endParaRPr lang="en-US"/>
+          </a:p>
+        </p:txBody>
+      </p:sp>
+      <p:sp>
+        <p:nvSpPr>
+          <p:cNvPr id="6" name="Footer Placeholder 5"/>
           <p:cNvSpPr>
             <a:spLocks noGrp="1"/>
           </p:cNvSpPr>
@@ -2420,19 +2115,13 @@
           <a:bodyPr/>
           <a:lstStyle/>
           <a:p>
-            <a:endParaRPr lang="en-IN"/>
-          </a:p>
-        </p:txBody>
-      </p:sp>
-      <p:sp>
-        <p:nvSpPr>
-          <p:cNvPr id="7" name="Slide Number Placeholder 6">
-            <a:extLst>
-              <a:ext uri="{FF2B5EF4-FFF2-40B4-BE49-F238E27FC236}">
-                <a16:creationId xmlns:a16="http://schemas.microsoft.com/office/drawing/2014/main" id="{006A8045-4A64-BAF6-DBD4-5DB34016132E}"/>
-              </a:ext>
-            </a:extLst>
-          </p:cNvPr>
+            <a:endParaRPr lang="en-US"/>
+          </a:p>
+        </p:txBody>
+      </p:sp>
+      <p:sp>
+        <p:nvSpPr>
+          <p:cNvPr id="7" name="Slide Number Placeholder 6"/>
           <p:cNvSpPr>
             <a:spLocks noGrp="1"/>
           </p:cNvSpPr>
@@ -2445,18 +2134,18 @@
           <a:bodyPr/>
           <a:lstStyle/>
           <a:p>
-            <a:fld id="{B8EAE59F-CC89-4136-872C-DCBA0EEB52F5}" type="slidenum">
-              <a:rPr lang="en-IN" smtClean="0"/>
+            <a:fld id="{F8EBE27D-6BE1-4123-A15D-30EC878A573F}" type="slidenum">
+              <a:rPr lang="en-US" smtClean="0"/>
               <a:t>‹#›</a:t>
             </a:fld>
-            <a:endParaRPr lang="en-IN"/>
+            <a:endParaRPr lang="en-US"/>
           </a:p>
         </p:txBody>
       </p:sp>
     </p:spTree>
     <p:extLst>
       <p:ext uri="{BB962C8B-B14F-4D97-AF65-F5344CB8AC3E}">
-        <p14:creationId xmlns:p14="http://schemas.microsoft.com/office/powerpoint/2010/main" val="1858079475"/>
+        <p14:creationId xmlns:p14="http://schemas.microsoft.com/office/powerpoint/2010/main" val="348877746"/>
       </p:ext>
     </p:extLst>
   </p:cSld>
@@ -2485,13 +2174,7 @@
       </p:grpSpPr>
       <p:sp>
         <p:nvSpPr>
-          <p:cNvPr id="2" name="Title 1">
-            <a:extLst>
-              <a:ext uri="{FF2B5EF4-FFF2-40B4-BE49-F238E27FC236}">
-                <a16:creationId xmlns:a16="http://schemas.microsoft.com/office/drawing/2014/main" id="{5FCE24F6-1F93-BC6D-22A8-8FDA40E23F95}"/>
-              </a:ext>
-            </a:extLst>
-          </p:cNvPr>
+          <p:cNvPr id="2" name="Title 1"/>
           <p:cNvSpPr>
             <a:spLocks noGrp="1"/>
           </p:cNvSpPr>
@@ -2514,22 +2197,16 @@
           </a:lstStyle>
           <a:p>
             <a:r>
-              <a:rPr lang="en-US"/>
+              <a:rPr lang="en-US" smtClean="0"/>
               <a:t>Click to edit Master title style</a:t>
             </a:r>
-            <a:endParaRPr lang="en-IN"/>
-          </a:p>
-        </p:txBody>
-      </p:sp>
-      <p:sp>
-        <p:nvSpPr>
-          <p:cNvPr id="3" name="Picture Placeholder 2">
-            <a:extLst>
-              <a:ext uri="{FF2B5EF4-FFF2-40B4-BE49-F238E27FC236}">
-                <a16:creationId xmlns:a16="http://schemas.microsoft.com/office/drawing/2014/main" id="{A8DAD4DA-E3B3-1FBB-E76F-9A4BEDC5A609}"/>
-              </a:ext>
-            </a:extLst>
-          </p:cNvPr>
+            <a:endParaRPr lang="en-US"/>
+          </a:p>
+        </p:txBody>
+      </p:sp>
+      <p:sp>
+        <p:nvSpPr>
+          <p:cNvPr id="3" name="Picture Placeholder 2"/>
           <p:cNvSpPr>
             <a:spLocks noGrp="1"/>
           </p:cNvSpPr>
@@ -2584,19 +2261,13 @@
             </a:lvl9pPr>
           </a:lstStyle>
           <a:p>
-            <a:endParaRPr lang="en-IN"/>
-          </a:p>
-        </p:txBody>
-      </p:sp>
-      <p:sp>
-        <p:nvSpPr>
-          <p:cNvPr id="4" name="Text Placeholder 3">
-            <a:extLst>
-              <a:ext uri="{FF2B5EF4-FFF2-40B4-BE49-F238E27FC236}">
-                <a16:creationId xmlns:a16="http://schemas.microsoft.com/office/drawing/2014/main" id="{AC3E698C-BA30-5024-B008-FF7493BDC46A}"/>
-              </a:ext>
-            </a:extLst>
-          </p:cNvPr>
+            <a:endParaRPr lang="en-US"/>
+          </a:p>
+        </p:txBody>
+      </p:sp>
+      <p:sp>
+        <p:nvSpPr>
+          <p:cNvPr id="4" name="Text Placeholder 3"/>
           <p:cNvSpPr>
             <a:spLocks noGrp="1"/>
           </p:cNvSpPr>
@@ -2653,21 +2324,15 @@
           <a:p>
             <a:pPr lvl="0"/>
             <a:r>
-              <a:rPr lang="en-US"/>
-              <a:t>Click to edit Master text styles</a:t>
-            </a:r>
-          </a:p>
-        </p:txBody>
-      </p:sp>
-      <p:sp>
-        <p:nvSpPr>
-          <p:cNvPr id="5" name="Date Placeholder 4">
-            <a:extLst>
-              <a:ext uri="{FF2B5EF4-FFF2-40B4-BE49-F238E27FC236}">
-                <a16:creationId xmlns:a16="http://schemas.microsoft.com/office/drawing/2014/main" id="{7382D247-D68F-9750-D587-1A4545CCF107}"/>
-              </a:ext>
-            </a:extLst>
-          </p:cNvPr>
+              <a:rPr lang="en-US" smtClean="0"/>
+              <a:t>Edit Master text styles</a:t>
+            </a:r>
+          </a:p>
+        </p:txBody>
+      </p:sp>
+      <p:sp>
+        <p:nvSpPr>
+          <p:cNvPr id="5" name="Date Placeholder 4"/>
           <p:cNvSpPr>
             <a:spLocks noGrp="1"/>
           </p:cNvSpPr>
@@ -2680,23 +2345,17 @@
           <a:bodyPr/>
           <a:lstStyle/>
           <a:p>
-            <a:fld id="{E471BDBF-D618-42A7-B9D8-B6E6A6C95C5A}" type="datetimeFigureOut">
-              <a:rPr lang="en-IN" smtClean="0"/>
-              <a:t>26-03-2026</a:t>
+            <a:fld id="{C8619975-09B3-45A9-981B-24156A02B11A}" type="datetimeFigureOut">
+              <a:rPr lang="en-US" smtClean="0"/>
+              <a:t>3/26/2026</a:t>
             </a:fld>
-            <a:endParaRPr lang="en-IN"/>
-          </a:p>
-        </p:txBody>
-      </p:sp>
-      <p:sp>
-        <p:nvSpPr>
-          <p:cNvPr id="6" name="Footer Placeholder 5">
-            <a:extLst>
-              <a:ext uri="{FF2B5EF4-FFF2-40B4-BE49-F238E27FC236}">
-                <a16:creationId xmlns:a16="http://schemas.microsoft.com/office/drawing/2014/main" id="{798F805B-17AB-BB45-B444-2B2CEA47930A}"/>
-              </a:ext>
-            </a:extLst>
-          </p:cNvPr>
+            <a:endParaRPr lang="en-US"/>
+          </a:p>
+        </p:txBody>
+      </p:sp>
+      <p:sp>
+        <p:nvSpPr>
+          <p:cNvPr id="6" name="Footer Placeholder 5"/>
           <p:cNvSpPr>
             <a:spLocks noGrp="1"/>
           </p:cNvSpPr>
@@ -2709,19 +2368,13 @@
           <a:bodyPr/>
           <a:lstStyle/>
           <a:p>
-            <a:endParaRPr lang="en-IN"/>
-          </a:p>
-        </p:txBody>
-      </p:sp>
-      <p:sp>
-        <p:nvSpPr>
-          <p:cNvPr id="7" name="Slide Number Placeholder 6">
-            <a:extLst>
-              <a:ext uri="{FF2B5EF4-FFF2-40B4-BE49-F238E27FC236}">
-                <a16:creationId xmlns:a16="http://schemas.microsoft.com/office/drawing/2014/main" id="{0F27A691-5B6E-FFDD-F397-F7EAD8A91DCB}"/>
-              </a:ext>
-            </a:extLst>
-          </p:cNvPr>
+            <a:endParaRPr lang="en-US"/>
+          </a:p>
+        </p:txBody>
+      </p:sp>
+      <p:sp>
+        <p:nvSpPr>
+          <p:cNvPr id="7" name="Slide Number Placeholder 6"/>
           <p:cNvSpPr>
             <a:spLocks noGrp="1"/>
           </p:cNvSpPr>
@@ -2734,18 +2387,18 @@
           <a:bodyPr/>
           <a:lstStyle/>
           <a:p>
-            <a:fld id="{B8EAE59F-CC89-4136-872C-DCBA0EEB52F5}" type="slidenum">
-              <a:rPr lang="en-IN" smtClean="0"/>
+            <a:fld id="{F8EBE27D-6BE1-4123-A15D-30EC878A573F}" type="slidenum">
+              <a:rPr lang="en-US" smtClean="0"/>
               <a:t>‹#›</a:t>
             </a:fld>
-            <a:endParaRPr lang="en-IN"/>
+            <a:endParaRPr lang="en-US"/>
           </a:p>
         </p:txBody>
       </p:sp>
     </p:spTree>
     <p:extLst>
       <p:ext uri="{BB962C8B-B14F-4D97-AF65-F5344CB8AC3E}">
-        <p14:creationId xmlns:p14="http://schemas.microsoft.com/office/powerpoint/2010/main" val="2090622244"/>
+        <p14:creationId xmlns:p14="http://schemas.microsoft.com/office/powerpoint/2010/main" val="2802308386"/>
       </p:ext>
     </p:extLst>
   </p:cSld>
@@ -2779,13 +2432,7 @@
       </p:grpSpPr>
       <p:sp>
         <p:nvSpPr>
-          <p:cNvPr id="2" name="Title Placeholder 1">
-            <a:extLst>
-              <a:ext uri="{FF2B5EF4-FFF2-40B4-BE49-F238E27FC236}">
-                <a16:creationId xmlns:a16="http://schemas.microsoft.com/office/drawing/2014/main" id="{04525D1C-CC34-6AE5-680C-81E07FCB215E}"/>
-              </a:ext>
-            </a:extLst>
-          </p:cNvPr>
+          <p:cNvPr id="2" name="Title Placeholder 1"/>
           <p:cNvSpPr>
             <a:spLocks noGrp="1"/>
           </p:cNvSpPr>
@@ -2809,22 +2456,16 @@
           <a:lstStyle/>
           <a:p>
             <a:r>
-              <a:rPr lang="en-US"/>
+              <a:rPr lang="en-US" smtClean="0"/>
               <a:t>Click to edit Master title style</a:t>
             </a:r>
-            <a:endParaRPr lang="en-IN"/>
-          </a:p>
-        </p:txBody>
-      </p:sp>
-      <p:sp>
-        <p:nvSpPr>
-          <p:cNvPr id="3" name="Text Placeholder 2">
-            <a:extLst>
-              <a:ext uri="{FF2B5EF4-FFF2-40B4-BE49-F238E27FC236}">
-                <a16:creationId xmlns:a16="http://schemas.microsoft.com/office/drawing/2014/main" id="{5C329796-E377-CAB3-5B44-24EC257D7194}"/>
-              </a:ext>
-            </a:extLst>
-          </p:cNvPr>
+            <a:endParaRPr lang="en-US"/>
+          </a:p>
+        </p:txBody>
+      </p:sp>
+      <p:sp>
+        <p:nvSpPr>
+          <p:cNvPr id="3" name="Text Placeholder 2"/>
           <p:cNvSpPr>
             <a:spLocks noGrp="1"/>
           </p:cNvSpPr>
@@ -2849,50 +2490,44 @@
           <a:p>
             <a:pPr lvl="0"/>
             <a:r>
-              <a:rPr lang="en-US"/>
-              <a:t>Click to edit Master text styles</a:t>
+              <a:rPr lang="en-US" smtClean="0"/>
+              <a:t>Edit Master text styles</a:t>
             </a:r>
           </a:p>
           <a:p>
             <a:pPr lvl="1"/>
             <a:r>
-              <a:rPr lang="en-US"/>
+              <a:rPr lang="en-US" smtClean="0"/>
               <a:t>Second level</a:t>
             </a:r>
           </a:p>
           <a:p>
             <a:pPr lvl="2"/>
             <a:r>
-              <a:rPr lang="en-US"/>
+              <a:rPr lang="en-US" smtClean="0"/>
               <a:t>Third level</a:t>
             </a:r>
           </a:p>
           <a:p>
             <a:pPr lvl="3"/>
             <a:r>
-              <a:rPr lang="en-US"/>
+              <a:rPr lang="en-US" smtClean="0"/>
               <a:t>Fourth level</a:t>
             </a:r>
           </a:p>
           <a:p>
             <a:pPr lvl="4"/>
             <a:r>
-              <a:rPr lang="en-US"/>
+              <a:rPr lang="en-US" smtClean="0"/>
               <a:t>Fifth level</a:t>
             </a:r>
-            <a:endParaRPr lang="en-IN"/>
-          </a:p>
-        </p:txBody>
-      </p:sp>
-      <p:sp>
-        <p:nvSpPr>
-          <p:cNvPr id="4" name="Date Placeholder 3">
-            <a:extLst>
-              <a:ext uri="{FF2B5EF4-FFF2-40B4-BE49-F238E27FC236}">
-                <a16:creationId xmlns:a16="http://schemas.microsoft.com/office/drawing/2014/main" id="{377401F3-4CCF-97EB-1B4F-FDF954175F1B}"/>
-              </a:ext>
-            </a:extLst>
-          </p:cNvPr>
+            <a:endParaRPr lang="en-US"/>
+          </a:p>
+        </p:txBody>
+      </p:sp>
+      <p:sp>
+        <p:nvSpPr>
+          <p:cNvPr id="4" name="Date Placeholder 3"/>
           <p:cNvSpPr>
             <a:spLocks noGrp="1"/>
           </p:cNvSpPr>
@@ -2916,30 +2551,24 @@
               <a:defRPr sz="1200">
                 <a:solidFill>
                   <a:schemeClr val="tx1">
-                    <a:tint val="82000"/>
+                    <a:tint val="75000"/>
                   </a:schemeClr>
                 </a:solidFill>
               </a:defRPr>
             </a:lvl1pPr>
           </a:lstStyle>
           <a:p>
-            <a:fld id="{E471BDBF-D618-42A7-B9D8-B6E6A6C95C5A}" type="datetimeFigureOut">
-              <a:rPr lang="en-IN" smtClean="0"/>
-              <a:t>26-03-2026</a:t>
+            <a:fld id="{C8619975-09B3-45A9-981B-24156A02B11A}" type="datetimeFigureOut">
+              <a:rPr lang="en-US" smtClean="0"/>
+              <a:t>3/26/2026</a:t>
             </a:fld>
-            <a:endParaRPr lang="en-IN"/>
-          </a:p>
-        </p:txBody>
-      </p:sp>
-      <p:sp>
-        <p:nvSpPr>
-          <p:cNvPr id="5" name="Footer Placeholder 4">
-            <a:extLst>
-              <a:ext uri="{FF2B5EF4-FFF2-40B4-BE49-F238E27FC236}">
-                <a16:creationId xmlns:a16="http://schemas.microsoft.com/office/drawing/2014/main" id="{9478DF53-0935-6528-A47C-DF085C23F59A}"/>
-              </a:ext>
-            </a:extLst>
-          </p:cNvPr>
+            <a:endParaRPr lang="en-US"/>
+          </a:p>
+        </p:txBody>
+      </p:sp>
+      <p:sp>
+        <p:nvSpPr>
+          <p:cNvPr id="5" name="Footer Placeholder 4"/>
           <p:cNvSpPr>
             <a:spLocks noGrp="1"/>
           </p:cNvSpPr>
@@ -2963,26 +2592,20 @@
               <a:defRPr sz="1200">
                 <a:solidFill>
                   <a:schemeClr val="tx1">
-                    <a:tint val="82000"/>
+                    <a:tint val="75000"/>
                   </a:schemeClr>
                 </a:solidFill>
               </a:defRPr>
             </a:lvl1pPr>
           </a:lstStyle>
           <a:p>
-            <a:endParaRPr lang="en-IN"/>
-          </a:p>
-        </p:txBody>
-      </p:sp>
-      <p:sp>
-        <p:nvSpPr>
-          <p:cNvPr id="6" name="Slide Number Placeholder 5">
-            <a:extLst>
-              <a:ext uri="{FF2B5EF4-FFF2-40B4-BE49-F238E27FC236}">
-                <a16:creationId xmlns:a16="http://schemas.microsoft.com/office/drawing/2014/main" id="{F83CDCC5-7F7B-DB26-366E-96F3F9171304}"/>
-              </a:ext>
-            </a:extLst>
-          </p:cNvPr>
+            <a:endParaRPr lang="en-US"/>
+          </a:p>
+        </p:txBody>
+      </p:sp>
+      <p:sp>
+        <p:nvSpPr>
+          <p:cNvPr id="6" name="Slide Number Placeholder 5"/>
           <p:cNvSpPr>
             <a:spLocks noGrp="1"/>
           </p:cNvSpPr>
@@ -3006,25 +2629,25 @@
               <a:defRPr sz="1200">
                 <a:solidFill>
                   <a:schemeClr val="tx1">
-                    <a:tint val="82000"/>
+                    <a:tint val="75000"/>
                   </a:schemeClr>
                 </a:solidFill>
               </a:defRPr>
             </a:lvl1pPr>
           </a:lstStyle>
           <a:p>
-            <a:fld id="{B8EAE59F-CC89-4136-872C-DCBA0EEB52F5}" type="slidenum">
-              <a:rPr lang="en-IN" smtClean="0"/>
+            <a:fld id="{F8EBE27D-6BE1-4123-A15D-30EC878A573F}" type="slidenum">
+              <a:rPr lang="en-US" smtClean="0"/>
               <a:t>‹#›</a:t>
             </a:fld>
-            <a:endParaRPr lang="en-IN"/>
+            <a:endParaRPr lang="en-US"/>
           </a:p>
         </p:txBody>
       </p:sp>
     </p:spTree>
     <p:extLst>
       <p:ext uri="{BB962C8B-B14F-4D97-AF65-F5344CB8AC3E}">
-        <p14:creationId xmlns:p14="http://schemas.microsoft.com/office/powerpoint/2010/main" val="178466310"/>
+        <p14:creationId xmlns:p14="http://schemas.microsoft.com/office/powerpoint/2010/main" val="1088947322"/>
       </p:ext>
     </p:extLst>
   </p:cSld>
@@ -3342,15 +2965,35 @@
           <a:chExt cx="0" cy="0"/>
         </a:xfrm>
       </p:grpSpPr>
+      <p:sp>
+        <p:nvSpPr>
+          <p:cNvPr id="3" name="Subtitle 2"/>
+          <p:cNvSpPr>
+            <a:spLocks noGrp="1"/>
+          </p:cNvSpPr>
+          <p:nvPr>
+            <p:ph type="subTitle" idx="1"/>
+          </p:nvPr>
+        </p:nvSpPr>
+        <p:spPr>
+          <a:xfrm>
+            <a:off x="1524000" y="5110480"/>
+            <a:ext cx="9144000" cy="147320"/>
+          </a:xfrm>
+        </p:spPr>
+        <p:txBody>
+          <a:bodyPr>
+            <a:normAutofit fontScale="25000" lnSpcReduction="20000"/>
+          </a:bodyPr>
+          <a:lstStyle/>
+          <a:p>
+            <a:endParaRPr lang="en-US" dirty="0"/>
+          </a:p>
+        </p:txBody>
+      </p:sp>
       <p:pic>
         <p:nvPicPr>
-          <p:cNvPr id="1028" name="Picture 4">
-            <a:extLst>
-              <a:ext uri="{FF2B5EF4-FFF2-40B4-BE49-F238E27FC236}">
-                <a16:creationId xmlns:a16="http://schemas.microsoft.com/office/drawing/2014/main" id="{33F16738-2734-7BCC-B83E-7D72FE06033B}"/>
-              </a:ext>
-            </a:extLst>
-          </p:cNvPr>
+          <p:cNvPr id="1030" name="Picture 6" descr="https://anoudtechnologies.com/wp-content/uploads/2021/01/banner0033.png"/>
           <p:cNvPicPr>
             <a:picLocks noChangeAspect="1" noChangeArrowheads="1"/>
           </p:cNvPicPr>
@@ -3371,8 +3014,8 @@
         </p:blipFill>
         <p:spPr bwMode="auto">
           <a:xfrm>
-            <a:off x="64558" y="1"/>
-            <a:ext cx="1357842" cy="1167969"/>
+            <a:off x="0" y="0"/>
+            <a:ext cx="12192000" cy="6858000"/>
           </a:xfrm>
           <a:prstGeom prst="rect">
             <a:avLst/>
@@ -3389,183 +3032,487 @@
           </a:extLst>
         </p:spPr>
       </p:pic>
-      <p:sp>
-        <p:nvSpPr>
-          <p:cNvPr id="5" name="TextBox 4">
-            <a:extLst>
-              <a:ext uri="{FF2B5EF4-FFF2-40B4-BE49-F238E27FC236}">
-                <a16:creationId xmlns:a16="http://schemas.microsoft.com/office/drawing/2014/main" id="{E0ECCF53-CD69-EFC0-41D5-CC9CBF64FACD}"/>
-              </a:ext>
-            </a:extLst>
-          </p:cNvPr>
-          <p:cNvSpPr txBox="1"/>
-          <p:nvPr/>
+    </p:spTree>
+    <p:extLst>
+      <p:ext uri="{BB962C8B-B14F-4D97-AF65-F5344CB8AC3E}">
+        <p14:creationId xmlns:p14="http://schemas.microsoft.com/office/powerpoint/2010/main" val="3662180199"/>
+      </p:ext>
+    </p:extLst>
+  </p:cSld>
+  <p:clrMapOvr>
+    <a:masterClrMapping/>
+  </p:clrMapOvr>
+</p:sld>
+</file>
+
+<file path=ppt/slides/slide2.xml><?xml version="1.0" encoding="utf-8"?>
+<p:sld xmlns:a="http://schemas.openxmlformats.org/drawingml/2006/main" xmlns:r="http://schemas.openxmlformats.org/officeDocument/2006/relationships" xmlns:p="http://schemas.openxmlformats.org/presentationml/2006/main">
+  <p:cSld>
+    <p:spTree>
+      <p:nvGrpSpPr>
+        <p:cNvPr id="1" name=""/>
+        <p:cNvGrpSpPr/>
+        <p:nvPr/>
+      </p:nvGrpSpPr>
+      <p:grpSpPr>
+        <a:xfrm>
+          <a:off x="0" y="0"/>
+          <a:ext cx="0" cy="0"/>
+          <a:chOff x="0" y="0"/>
+          <a:chExt cx="0" cy="0"/>
+        </a:xfrm>
+      </p:grpSpPr>
+      <p:sp>
+        <p:nvSpPr>
+          <p:cNvPr id="3" name="Content Placeholder 2"/>
+          <p:cNvSpPr>
+            <a:spLocks noGrp="1"/>
+          </p:cNvSpPr>
+          <p:nvPr>
+            <p:ph idx="1"/>
+          </p:nvPr>
         </p:nvSpPr>
         <p:spPr>
           <a:xfrm>
-            <a:off x="330200" y="1015032"/>
-            <a:ext cx="11514668" cy="5339923"/>
+            <a:off x="838200" y="243840"/>
+            <a:ext cx="10515600" cy="6167120"/>
           </a:xfrm>
-          <a:prstGeom prst="rect">
-            <a:avLst/>
-          </a:prstGeom>
-          <a:noFill/>
         </p:spPr>
         <p:txBody>
-          <a:bodyPr wrap="square" rtlCol="0">
-            <a:spAutoFit/>
-          </a:bodyPr>
-          <a:lstStyle/>
-          <a:p>
-            <a:pPr marL="285750" indent="-285750">
-              <a:lnSpc>
-                <a:spcPct val="150000"/>
-              </a:lnSpc>
-              <a:buFont typeface="Wingdings" panose="05000000000000000000" pitchFamily="2" charset="2"/>
-              <a:buChar char="q"/>
+          <a:bodyPr/>
+          <a:lstStyle/>
+          <a:p>
+            <a:pPr marL="0" indent="0">
+              <a:buNone/>
             </a:pPr>
             <a:r>
-              <a:rPr lang="en-IN" sz="1600" dirty="0">
-                <a:latin typeface="Times New Roman" panose="02020603050405020304" pitchFamily="18" charset="0"/>
-                <a:cs typeface="Times New Roman" panose="02020603050405020304" pitchFamily="18" charset="0"/>
-              </a:rPr>
-              <a:t>About Anoud- Anoud Technologies LLC MENA-headquartered</a:t>
-            </a:r>
-            <a:r>
-              <a:rPr lang="en-IN" dirty="0"/>
-              <a:t> </a:t>
-            </a:r>
-            <a:r>
-              <a:rPr lang="en-US" sz="1600" dirty="0" err="1">
-                <a:latin typeface="Times New Roman" panose="02020603050405020304" pitchFamily="18" charset="0"/>
-                <a:cs typeface="Times New Roman" panose="02020603050405020304" pitchFamily="18" charset="0"/>
-              </a:rPr>
-              <a:t>InsurTech</a:t>
-            </a:r>
-            <a:r>
-              <a:rPr lang="en-US" sz="1600" dirty="0">
-                <a:latin typeface="Times New Roman" panose="02020603050405020304" pitchFamily="18" charset="0"/>
-                <a:cs typeface="Times New Roman" panose="02020603050405020304" pitchFamily="18" charset="0"/>
-              </a:rPr>
-              <a:t> / insurance core systems and digital solutions , around 2020 via QIC–Swiss Re collaboration.</a:t>
-            </a:r>
-          </a:p>
-          <a:p>
-            <a:pPr marL="285750" indent="-285750">
-              <a:lnSpc>
-                <a:spcPct val="150000"/>
-              </a:lnSpc>
-              <a:buFont typeface="Wingdings" panose="05000000000000000000" pitchFamily="2" charset="2"/>
-              <a:buChar char="q"/>
-            </a:pPr>
-            <a:r>
-              <a:rPr lang="en-US" sz="1600" dirty="0">
-                <a:latin typeface="Times New Roman" panose="02020603050405020304" pitchFamily="18" charset="0"/>
-                <a:cs typeface="Times New Roman" panose="02020603050405020304" pitchFamily="18" charset="0"/>
-              </a:rPr>
-              <a:t>About my Role- I work closely with business requirements to ensure the system aligns with real-world insurance workflows.</a:t>
-            </a:r>
-          </a:p>
-          <a:p>
-            <a:pPr marL="285750" indent="-285750">
-              <a:lnSpc>
-                <a:spcPct val="150000"/>
-              </a:lnSpc>
-              <a:buFont typeface="Wingdings" panose="05000000000000000000" pitchFamily="2" charset="2"/>
-              <a:buChar char="q"/>
-            </a:pPr>
-            <a:r>
-              <a:rPr lang="en-US" sz="1600" dirty="0">
-                <a:latin typeface="Times New Roman" panose="02020603050405020304" pitchFamily="18" charset="0"/>
-                <a:cs typeface="Times New Roman" panose="02020603050405020304" pitchFamily="18" charset="0"/>
-              </a:rPr>
-              <a:t>About Anoud+ Product- Anoud is an end-to-end digital insurance platform that streamlines operations, offering high-speed performance and platform independence across both Android and iOS.</a:t>
-            </a:r>
-          </a:p>
-          <a:p>
-            <a:pPr>
-              <a:lnSpc>
-                <a:spcPct val="150000"/>
-              </a:lnSpc>
-            </a:pPr>
-            <a:r>
-              <a:rPr lang="en-US" sz="1600" dirty="0">
-                <a:latin typeface="Times New Roman" panose="02020603050405020304" pitchFamily="18" charset="0"/>
-                <a:cs typeface="Times New Roman" panose="02020603050405020304" pitchFamily="18" charset="0"/>
-              </a:rPr>
-              <a:t>        Anoud+ consists of Core Solutions for insurance operations and Digital Solutions for analytics and business support.</a:t>
-            </a:r>
-          </a:p>
-          <a:p>
-            <a:pPr marL="285750" indent="-285750">
-              <a:lnSpc>
-                <a:spcPct val="150000"/>
-              </a:lnSpc>
-              <a:buFont typeface="Wingdings" panose="05000000000000000000" pitchFamily="2" charset="2"/>
-              <a:buChar char="q"/>
-            </a:pPr>
-            <a:r>
-              <a:rPr lang="en-US" sz="1600" dirty="0">
-                <a:latin typeface="Times New Roman" panose="02020603050405020304" pitchFamily="18" charset="0"/>
-                <a:cs typeface="Times New Roman" panose="02020603050405020304" pitchFamily="18" charset="0"/>
-              </a:rPr>
-              <a:t>Clients of Anoud: Anoud Technologies provides solutions to insurance companies globally, especially in the MENA region, Europe, and the Caribbean, enabling them to efficiently manage their business through the Anoud+ platform.</a:t>
-            </a:r>
-          </a:p>
-          <a:p>
-            <a:pPr marL="285750" indent="-285750">
-              <a:lnSpc>
-                <a:spcPct val="150000"/>
-              </a:lnSpc>
-              <a:buFont typeface="Wingdings" panose="05000000000000000000" pitchFamily="2" charset="2"/>
-              <a:buChar char="q"/>
-            </a:pPr>
-            <a:r>
-              <a:rPr lang="en-US" sz="1600" dirty="0">
-                <a:latin typeface="Times New Roman" panose="02020603050405020304" pitchFamily="18" charset="0"/>
-                <a:cs typeface="Times New Roman" panose="02020603050405020304" pitchFamily="18" charset="0"/>
-              </a:rPr>
-              <a:t>About QIC : In the Qatar Insurance Company (QIC) application, different user roles such as admin, user, and employee access modules like underwriting, reports, and claims to manage policies and process customer claims efficiently.</a:t>
-            </a:r>
-          </a:p>
-          <a:p>
-            <a:pPr marL="285750" indent="-285750">
-              <a:lnSpc>
-                <a:spcPct val="150000"/>
-              </a:lnSpc>
-              <a:buFont typeface="Wingdings" panose="05000000000000000000" pitchFamily="2" charset="2"/>
-              <a:buChar char="q"/>
-            </a:pPr>
-            <a:r>
-              <a:rPr lang="en-US" sz="1600" dirty="0">
-                <a:latin typeface="Times New Roman" panose="02020603050405020304" pitchFamily="18" charset="0"/>
-                <a:cs typeface="Times New Roman" panose="02020603050405020304" pitchFamily="18" charset="0"/>
-              </a:rPr>
-              <a:t>About Policies : Anoud+ supports multiple insurance policies such as motor insurance (including comprehensive and third-party), medical, life, travel, corporate, property, and liability insurance. These policies are configurable based on client requirements.</a:t>
-            </a:r>
-          </a:p>
-          <a:p>
+              <a:rPr lang="en-US" sz="1600" dirty="0" err="1" smtClean="0">
+                <a:solidFill>
+                  <a:srgbClr val="C00000"/>
+                </a:solidFill>
+                <a:latin typeface="Times New Roman" panose="02020603050405020304" pitchFamily="18" charset="0"/>
+                <a:cs typeface="Times New Roman" panose="02020603050405020304" pitchFamily="18" charset="0"/>
+              </a:rPr>
+              <a:t>Anoud</a:t>
+            </a:r>
+            <a:r>
+              <a:rPr lang="en-US" sz="1600" dirty="0" smtClean="0">
+                <a:solidFill>
+                  <a:srgbClr val="C00000"/>
+                </a:solidFill>
+                <a:latin typeface="Times New Roman" panose="02020603050405020304" pitchFamily="18" charset="0"/>
+                <a:cs typeface="Times New Roman" panose="02020603050405020304" pitchFamily="18" charset="0"/>
+              </a:rPr>
+              <a:t> :</a:t>
+            </a:r>
+            <a:r>
+              <a:rPr lang="en-US" sz="1600" dirty="0" smtClean="0">
+                <a:solidFill>
+                  <a:srgbClr val="FF0000"/>
+                </a:solidFill>
+                <a:latin typeface="Times New Roman" panose="02020603050405020304" pitchFamily="18" charset="0"/>
+                <a:cs typeface="Times New Roman" panose="02020603050405020304" pitchFamily="18" charset="0"/>
+              </a:rPr>
+              <a:t>  </a:t>
+            </a:r>
+            <a:r>
+              <a:rPr lang="en-GB" sz="1600" dirty="0" err="1" smtClean="0">
+                <a:latin typeface="Times New Roman" panose="02020603050405020304" pitchFamily="18" charset="0"/>
+                <a:cs typeface="Times New Roman" panose="02020603050405020304" pitchFamily="18" charset="0"/>
+              </a:rPr>
+              <a:t>Anoud</a:t>
+            </a:r>
+            <a:r>
+              <a:rPr lang="en-GB" sz="1600" dirty="0" smtClean="0">
+                <a:latin typeface="Times New Roman" panose="02020603050405020304" pitchFamily="18" charset="0"/>
+                <a:cs typeface="Times New Roman" panose="02020603050405020304" pitchFamily="18" charset="0"/>
+              </a:rPr>
+              <a:t> is a technology company that builds software solutions for insurance companies to manage their entire business digitally.</a:t>
+            </a:r>
             <a:endParaRPr lang="en-US" sz="1600" dirty="0">
+              <a:solidFill>
+                <a:srgbClr val="FF0000"/>
+              </a:solidFill>
               <a:latin typeface="Times New Roman" panose="02020603050405020304" pitchFamily="18" charset="0"/>
               <a:cs typeface="Times New Roman" panose="02020603050405020304" pitchFamily="18" charset="0"/>
             </a:endParaRPr>
           </a:p>
           <a:p>
-            <a:endParaRPr lang="en-IN" sz="1600" dirty="0">
-              <a:effectLst/>
+            <a:pPr marL="0" indent="0">
+              <a:buNone/>
+            </a:pPr>
+            <a:r>
+              <a:rPr lang="en-US" sz="1600" dirty="0" smtClean="0">
+                <a:solidFill>
+                  <a:srgbClr val="C00000"/>
+                </a:solidFill>
+                <a:latin typeface="Times New Roman" panose="02020603050405020304" pitchFamily="18" charset="0"/>
+                <a:cs typeface="Times New Roman" panose="02020603050405020304" pitchFamily="18" charset="0"/>
+              </a:rPr>
+              <a:t>Product : </a:t>
+            </a:r>
+            <a:r>
+              <a:rPr lang="en-GB" sz="1600" b="1" dirty="0" err="1" smtClean="0">
+                <a:latin typeface="Times New Roman" panose="02020603050405020304" pitchFamily="18" charset="0"/>
+                <a:cs typeface="Times New Roman" panose="02020603050405020304" pitchFamily="18" charset="0"/>
+              </a:rPr>
+              <a:t>Anoud</a:t>
+            </a:r>
+            <a:r>
+              <a:rPr lang="en-GB" sz="1600" b="1" dirty="0" smtClean="0">
+                <a:latin typeface="Times New Roman" panose="02020603050405020304" pitchFamily="18" charset="0"/>
+                <a:cs typeface="Times New Roman" panose="02020603050405020304" pitchFamily="18" charset="0"/>
+              </a:rPr>
+              <a:t>+</a:t>
+            </a:r>
+            <a:r>
+              <a:rPr lang="en-GB" sz="1600" dirty="0" smtClean="0">
+                <a:latin typeface="Times New Roman" panose="02020603050405020304" pitchFamily="18" charset="0"/>
+                <a:cs typeface="Times New Roman" panose="02020603050405020304" pitchFamily="18" charset="0"/>
+              </a:rPr>
+              <a:t> is a </a:t>
+            </a:r>
+            <a:r>
+              <a:rPr lang="en-GB" sz="1600" b="1" dirty="0" smtClean="0">
+                <a:latin typeface="Times New Roman" panose="02020603050405020304" pitchFamily="18" charset="0"/>
+                <a:cs typeface="Times New Roman" panose="02020603050405020304" pitchFamily="18" charset="0"/>
+              </a:rPr>
+              <a:t>cloud-based insurance software platform</a:t>
+            </a:r>
+            <a:r>
+              <a:rPr lang="en-GB" sz="1600" dirty="0" smtClean="0">
+                <a:latin typeface="Times New Roman" panose="02020603050405020304" pitchFamily="18" charset="0"/>
+                <a:cs typeface="Times New Roman" panose="02020603050405020304" pitchFamily="18" charset="0"/>
+              </a:rPr>
+              <a:t> used by insurance companies to manage their entire business in one place.</a:t>
+            </a:r>
+          </a:p>
+          <a:p>
+            <a:pPr marL="0" indent="0">
+              <a:buNone/>
+            </a:pPr>
+            <a:r>
+              <a:rPr lang="en-GB" sz="1600" dirty="0" smtClean="0">
+                <a:solidFill>
+                  <a:srgbClr val="C00000"/>
+                </a:solidFill>
+                <a:latin typeface="Times New Roman" panose="02020603050405020304" pitchFamily="18" charset="0"/>
+                <a:cs typeface="Times New Roman" panose="02020603050405020304" pitchFamily="18" charset="0"/>
+              </a:rPr>
+              <a:t>What </a:t>
+            </a:r>
+            <a:r>
+              <a:rPr lang="en-GB" sz="1600" dirty="0" err="1" smtClean="0">
+                <a:solidFill>
+                  <a:srgbClr val="C00000"/>
+                </a:solidFill>
+                <a:latin typeface="Times New Roman" panose="02020603050405020304" pitchFamily="18" charset="0"/>
+                <a:cs typeface="Times New Roman" panose="02020603050405020304" pitchFamily="18" charset="0"/>
+              </a:rPr>
+              <a:t>Anoud</a:t>
+            </a:r>
+            <a:r>
+              <a:rPr lang="en-GB" sz="1600" dirty="0" smtClean="0">
+                <a:solidFill>
+                  <a:srgbClr val="C00000"/>
+                </a:solidFill>
+                <a:latin typeface="Times New Roman" panose="02020603050405020304" pitchFamily="18" charset="0"/>
+                <a:cs typeface="Times New Roman" panose="02020603050405020304" pitchFamily="18" charset="0"/>
+              </a:rPr>
+              <a:t>+ does : </a:t>
+            </a:r>
+            <a:r>
+              <a:rPr lang="en-GB" sz="1600" dirty="0" smtClean="0">
+                <a:latin typeface="Times New Roman" panose="02020603050405020304" pitchFamily="18" charset="0"/>
+                <a:cs typeface="Times New Roman" panose="02020603050405020304" pitchFamily="18" charset="0"/>
+              </a:rPr>
+              <a:t>It handles the </a:t>
+            </a:r>
+            <a:r>
+              <a:rPr lang="en-GB" sz="1600" b="1" dirty="0" smtClean="0">
+                <a:latin typeface="Times New Roman" panose="02020603050405020304" pitchFamily="18" charset="0"/>
+                <a:cs typeface="Times New Roman" panose="02020603050405020304" pitchFamily="18" charset="0"/>
+              </a:rPr>
+              <a:t>complete insurance lifecycle</a:t>
+            </a:r>
+            <a:r>
+              <a:rPr lang="en-GB" sz="1600" dirty="0">
+                <a:latin typeface="Times New Roman" panose="02020603050405020304" pitchFamily="18" charset="0"/>
+                <a:cs typeface="Times New Roman" panose="02020603050405020304" pitchFamily="18" charset="0"/>
+              </a:rPr>
+              <a:t> </a:t>
+            </a:r>
+            <a:r>
+              <a:rPr lang="en-GB" sz="1600" dirty="0" smtClean="0">
+                <a:latin typeface="Times New Roman" panose="02020603050405020304" pitchFamily="18" charset="0"/>
+                <a:cs typeface="Times New Roman" panose="02020603050405020304" pitchFamily="18" charset="0"/>
+              </a:rPr>
+              <a:t>Customer </a:t>
+            </a:r>
+            <a:r>
+              <a:rPr lang="en-GB" sz="1600" dirty="0" err="1" smtClean="0">
+                <a:latin typeface="Times New Roman" panose="02020603050405020304" pitchFamily="18" charset="0"/>
+                <a:cs typeface="Times New Roman" panose="02020603050405020304" pitchFamily="18" charset="0"/>
+              </a:rPr>
+              <a:t>onboarding</a:t>
+            </a:r>
+            <a:r>
+              <a:rPr lang="en-GB" sz="1600" dirty="0" smtClean="0">
+                <a:latin typeface="Times New Roman" panose="02020603050405020304" pitchFamily="18" charset="0"/>
+                <a:cs typeface="Times New Roman" panose="02020603050405020304" pitchFamily="18" charset="0"/>
+              </a:rPr>
+              <a:t> , Policy creation and management , Premium calculation , Claims processing , Reports and analytics.</a:t>
+            </a:r>
+          </a:p>
+          <a:p>
+            <a:pPr marL="0" indent="0">
+              <a:buNone/>
+            </a:pPr>
+            <a:r>
+              <a:rPr lang="en-GB" sz="1600" dirty="0" smtClean="0">
+                <a:solidFill>
+                  <a:srgbClr val="C00000"/>
+                </a:solidFill>
+                <a:latin typeface="Times New Roman" panose="02020603050405020304" pitchFamily="18" charset="0"/>
+                <a:cs typeface="Times New Roman" panose="02020603050405020304" pitchFamily="18" charset="0"/>
+              </a:rPr>
+              <a:t>Contribution :</a:t>
+            </a:r>
+            <a:r>
+              <a:rPr lang="en-GB" sz="1600" dirty="0" smtClean="0">
+                <a:solidFill>
+                  <a:srgbClr val="FF0000"/>
+                </a:solidFill>
+                <a:latin typeface="Times New Roman" panose="02020603050405020304" pitchFamily="18" charset="0"/>
+                <a:cs typeface="Times New Roman" panose="02020603050405020304" pitchFamily="18" charset="0"/>
+              </a:rPr>
+              <a:t> </a:t>
+            </a:r>
+            <a:r>
+              <a:rPr lang="en-GB" sz="1600" dirty="0" smtClean="0">
+                <a:latin typeface="Times New Roman" panose="02020603050405020304" pitchFamily="18" charset="0"/>
+                <a:cs typeface="Times New Roman" panose="02020603050405020304" pitchFamily="18" charset="0"/>
+              </a:rPr>
+              <a:t>In the </a:t>
+            </a:r>
+            <a:r>
+              <a:rPr lang="en-GB" sz="1600" dirty="0" err="1" smtClean="0">
+                <a:latin typeface="Times New Roman" panose="02020603050405020304" pitchFamily="18" charset="0"/>
+                <a:cs typeface="Times New Roman" panose="02020603050405020304" pitchFamily="18" charset="0"/>
+              </a:rPr>
+              <a:t>Anoud</a:t>
+            </a:r>
+            <a:r>
+              <a:rPr lang="en-GB" sz="1600" dirty="0" smtClean="0">
+                <a:latin typeface="Times New Roman" panose="02020603050405020304" pitchFamily="18" charset="0"/>
+                <a:cs typeface="Times New Roman" panose="02020603050405020304" pitchFamily="18" charset="0"/>
+              </a:rPr>
+              <a:t>+ project, I work on backend development where I build REST APIs, implement business logic for insurance processes like policy and premium, handle database operations, fix bugs, and customize the application based on client requirements.</a:t>
+            </a:r>
+          </a:p>
+          <a:p>
+            <a:pPr marL="0" indent="0">
+              <a:buNone/>
+            </a:pPr>
+            <a:r>
+              <a:rPr lang="en-GB" sz="1600" dirty="0" smtClean="0">
+                <a:solidFill>
+                  <a:srgbClr val="C00000"/>
+                </a:solidFill>
+                <a:latin typeface="Times New Roman" panose="02020603050405020304" pitchFamily="18" charset="0"/>
+                <a:cs typeface="Times New Roman" panose="02020603050405020304" pitchFamily="18" charset="0"/>
+              </a:rPr>
+              <a:t>Clients : </a:t>
+            </a:r>
+            <a:r>
+              <a:rPr lang="en-GB" sz="1600" dirty="0" err="1" smtClean="0">
+                <a:latin typeface="Times New Roman" panose="02020603050405020304" pitchFamily="18" charset="0"/>
+                <a:cs typeface="Times New Roman" panose="02020603050405020304" pitchFamily="18" charset="0"/>
+              </a:rPr>
+              <a:t>Anoud</a:t>
+            </a:r>
+            <a:r>
+              <a:rPr lang="en-GB" sz="1600" dirty="0" smtClean="0">
+                <a:latin typeface="Times New Roman" panose="02020603050405020304" pitchFamily="18" charset="0"/>
+                <a:cs typeface="Times New Roman" panose="02020603050405020304" pitchFamily="18" charset="0"/>
+              </a:rPr>
+              <a:t> Technologies primarily serves insurance companies across the MENA region, Europe, and the Caribbean. These clients use the </a:t>
+            </a:r>
+            <a:r>
+              <a:rPr lang="en-GB" sz="1600" dirty="0" err="1" smtClean="0">
+                <a:latin typeface="Times New Roman" panose="02020603050405020304" pitchFamily="18" charset="0"/>
+                <a:cs typeface="Times New Roman" panose="02020603050405020304" pitchFamily="18" charset="0"/>
+              </a:rPr>
+              <a:t>Anoud</a:t>
+            </a:r>
+            <a:r>
+              <a:rPr lang="en-GB" sz="1600" dirty="0" smtClean="0">
+                <a:latin typeface="Times New Roman" panose="02020603050405020304" pitchFamily="18" charset="0"/>
+                <a:cs typeface="Times New Roman" panose="02020603050405020304" pitchFamily="18" charset="0"/>
+              </a:rPr>
+              <a:t>+ platform to manage their insurance operations and digital transformation.</a:t>
+            </a:r>
+          </a:p>
+          <a:p>
+            <a:pPr marL="0" indent="0">
+              <a:buNone/>
+            </a:pPr>
+            <a:r>
+              <a:rPr lang="en-GB" sz="1600" dirty="0" smtClean="0">
+                <a:solidFill>
+                  <a:srgbClr val="C00000"/>
+                </a:solidFill>
+                <a:latin typeface="Times New Roman" panose="02020603050405020304" pitchFamily="18" charset="0"/>
+                <a:cs typeface="Times New Roman" panose="02020603050405020304" pitchFamily="18" charset="0"/>
+              </a:rPr>
+              <a:t>Modules : </a:t>
+            </a:r>
+            <a:r>
+              <a:rPr lang="en-GB" sz="1600" dirty="0" err="1" smtClean="0">
+                <a:latin typeface="Times New Roman" panose="02020603050405020304" pitchFamily="18" charset="0"/>
+                <a:cs typeface="Times New Roman" panose="02020603050405020304" pitchFamily="18" charset="0"/>
+              </a:rPr>
+              <a:t>Anoud</a:t>
+            </a:r>
+            <a:r>
+              <a:rPr lang="en-GB" sz="1600" dirty="0" smtClean="0">
+                <a:latin typeface="Times New Roman" panose="02020603050405020304" pitchFamily="18" charset="0"/>
+                <a:cs typeface="Times New Roman" panose="02020603050405020304" pitchFamily="18" charset="0"/>
+              </a:rPr>
+              <a:t>+ consists of multiple modules such as policy management, premium calculation, underwriting, claims management, customer management, insurance-specific modules like medical and motor, analytics, and compliance. Each module handles a specific part of the insurance lifecycle.</a:t>
+            </a:r>
+          </a:p>
+          <a:p>
+            <a:pPr marL="0" indent="0">
+              <a:buNone/>
+            </a:pPr>
+            <a:r>
+              <a:rPr lang="en-GB" sz="1600" dirty="0" smtClean="0">
+                <a:solidFill>
+                  <a:srgbClr val="C00000"/>
+                </a:solidFill>
+                <a:latin typeface="Times New Roman" panose="02020603050405020304" pitchFamily="18" charset="0"/>
+                <a:cs typeface="Times New Roman" panose="02020603050405020304" pitchFamily="18" charset="0"/>
+              </a:rPr>
+              <a:t>Partners : </a:t>
+            </a:r>
+            <a:r>
+              <a:rPr lang="en-GB" sz="1600" dirty="0" err="1" smtClean="0">
+                <a:latin typeface="Times New Roman" panose="02020603050405020304" pitchFamily="18" charset="0"/>
+                <a:cs typeface="Times New Roman" panose="02020603050405020304" pitchFamily="18" charset="0"/>
+              </a:rPr>
+              <a:t>Anoud</a:t>
+            </a:r>
+            <a:r>
+              <a:rPr lang="en-GB" sz="1600" dirty="0" smtClean="0">
+                <a:latin typeface="Times New Roman" panose="02020603050405020304" pitchFamily="18" charset="0"/>
+                <a:cs typeface="Times New Roman" panose="02020603050405020304" pitchFamily="18" charset="0"/>
+              </a:rPr>
+              <a:t> partners with global insurance leaders and technology providers like Qatar Insurance Group, Swiss Re, and ACORD to deliver a complete digital insurance platform.</a:t>
+            </a:r>
+            <a:endParaRPr lang="en-GB" sz="1600" dirty="0" smtClean="0">
+              <a:solidFill>
+                <a:srgbClr val="C00000"/>
+              </a:solidFill>
               <a:latin typeface="Times New Roman" panose="02020603050405020304" pitchFamily="18" charset="0"/>
               <a:cs typeface="Times New Roman" panose="02020603050405020304" pitchFamily="18" charset="0"/>
             </a:endParaRPr>
           </a:p>
           <a:p>
-            <a:endParaRPr lang="en-IN" dirty="0"/>
+            <a:pPr marL="0" indent="0">
+              <a:buNone/>
+            </a:pPr>
+            <a:r>
+              <a:rPr lang="en-GB" sz="1600" dirty="0" smtClean="0">
+                <a:solidFill>
+                  <a:srgbClr val="C00000"/>
+                </a:solidFill>
+                <a:latin typeface="Times New Roman" panose="02020603050405020304" pitchFamily="18" charset="0"/>
+                <a:cs typeface="Times New Roman" panose="02020603050405020304" pitchFamily="18" charset="0"/>
+              </a:rPr>
+              <a:t>Policies :</a:t>
+            </a:r>
+            <a:r>
+              <a:rPr lang="en-GB" sz="1600" dirty="0" smtClean="0">
+                <a:solidFill>
+                  <a:srgbClr val="FF0000"/>
+                </a:solidFill>
+                <a:latin typeface="Times New Roman" panose="02020603050405020304" pitchFamily="18" charset="0"/>
+                <a:cs typeface="Times New Roman" panose="02020603050405020304" pitchFamily="18" charset="0"/>
+              </a:rPr>
+              <a:t> </a:t>
+            </a:r>
+            <a:r>
+              <a:rPr lang="en-GB" sz="1600" dirty="0" err="1" smtClean="0">
+                <a:latin typeface="Times New Roman" panose="02020603050405020304" pitchFamily="18" charset="0"/>
+                <a:cs typeface="Times New Roman" panose="02020603050405020304" pitchFamily="18" charset="0"/>
+              </a:rPr>
+              <a:t>Anoud</a:t>
+            </a:r>
+            <a:r>
+              <a:rPr lang="en-GB" sz="1600" dirty="0" smtClean="0">
+                <a:latin typeface="Times New Roman" panose="02020603050405020304" pitchFamily="18" charset="0"/>
+                <a:cs typeface="Times New Roman" panose="02020603050405020304" pitchFamily="18" charset="0"/>
+              </a:rPr>
+              <a:t>+ supports multiple insurance policies such as motor insurance (including comprehensive and third-party), medical, life, travel, corporate, property, and liability insurance. These policies are configurable based on client requirements.</a:t>
+            </a:r>
+          </a:p>
+          <a:p>
+            <a:pPr marL="0" indent="0">
+              <a:buNone/>
+            </a:pPr>
+            <a:r>
+              <a:rPr lang="en-GB" sz="1600" dirty="0" smtClean="0">
+                <a:solidFill>
+                  <a:srgbClr val="C00000"/>
+                </a:solidFill>
+                <a:latin typeface="Times New Roman" panose="02020603050405020304" pitchFamily="18" charset="0"/>
+                <a:cs typeface="Times New Roman" panose="02020603050405020304" pitchFamily="18" charset="0"/>
+              </a:rPr>
+              <a:t>Who Uses </a:t>
+            </a:r>
+            <a:r>
+              <a:rPr lang="en-GB" sz="1600" dirty="0" err="1" smtClean="0">
+                <a:solidFill>
+                  <a:srgbClr val="C00000"/>
+                </a:solidFill>
+                <a:latin typeface="Times New Roman" panose="02020603050405020304" pitchFamily="18" charset="0"/>
+                <a:cs typeface="Times New Roman" panose="02020603050405020304" pitchFamily="18" charset="0"/>
+              </a:rPr>
+              <a:t>Anoud</a:t>
+            </a:r>
+            <a:r>
+              <a:rPr lang="en-GB" sz="1600" dirty="0" smtClean="0">
+                <a:solidFill>
+                  <a:srgbClr val="C00000"/>
+                </a:solidFill>
+                <a:latin typeface="Times New Roman" panose="02020603050405020304" pitchFamily="18" charset="0"/>
+                <a:cs typeface="Times New Roman" panose="02020603050405020304" pitchFamily="18" charset="0"/>
+              </a:rPr>
+              <a:t>+ : </a:t>
+            </a:r>
+            <a:r>
+              <a:rPr lang="en-GB" sz="1600" dirty="0" err="1" smtClean="0"/>
+              <a:t>Anoud</a:t>
+            </a:r>
+            <a:r>
+              <a:rPr lang="en-GB" sz="1600" dirty="0" smtClean="0"/>
+              <a:t>+ is mainly used by insurance companies, including life, health, and motor insurers, as well as reinsurance companies and large insurance groups. It is used by different departments like underwriting, claims, and operations teams to manage the complete insurance lifecycle digitally.</a:t>
+            </a:r>
+            <a:endParaRPr lang="en-GB" sz="1600" dirty="0" smtClean="0">
+              <a:solidFill>
+                <a:srgbClr val="FF0000"/>
+              </a:solidFill>
+              <a:latin typeface="Times New Roman" panose="02020603050405020304" pitchFamily="18" charset="0"/>
+              <a:cs typeface="Times New Roman" panose="02020603050405020304" pitchFamily="18" charset="0"/>
+            </a:endParaRPr>
           </a:p>
         </p:txBody>
       </p:sp>
     </p:spTree>
     <p:extLst>
       <p:ext uri="{BB962C8B-B14F-4D97-AF65-F5344CB8AC3E}">
-        <p14:creationId xmlns:p14="http://schemas.microsoft.com/office/powerpoint/2010/main" val="3479039123"/>
+        <p14:creationId xmlns:p14="http://schemas.microsoft.com/office/powerpoint/2010/main" val="1541754079"/>
       </p:ext>
     </p:extLst>
   </p:cSld>
@@ -3586,39 +3533,39 @@
         <a:sysClr val="window" lastClr="FFFFFF"/>
       </a:lt1>
       <a:dk2>
-        <a:srgbClr val="0E2841"/>
+        <a:srgbClr val="44546A"/>
       </a:dk2>
       <a:lt2>
-        <a:srgbClr val="E8E8E8"/>
+        <a:srgbClr val="E7E6E6"/>
       </a:lt2>
       <a:accent1>
-        <a:srgbClr val="156082"/>
+        <a:srgbClr val="5B9BD5"/>
       </a:accent1>
       <a:accent2>
-        <a:srgbClr val="E97132"/>
+        <a:srgbClr val="ED7D31"/>
       </a:accent2>
       <a:accent3>
-        <a:srgbClr val="196B24"/>
+        <a:srgbClr val="A5A5A5"/>
       </a:accent3>
       <a:accent4>
-        <a:srgbClr val="0F9ED5"/>
+        <a:srgbClr val="FFC000"/>
       </a:accent4>
       <a:accent5>
-        <a:srgbClr val="A02B93"/>
+        <a:srgbClr val="4472C4"/>
       </a:accent5>
       <a:accent6>
-        <a:srgbClr val="4EA72E"/>
+        <a:srgbClr val="70AD47"/>
       </a:accent6>
       <a:hlink>
-        <a:srgbClr val="467886"/>
+        <a:srgbClr val="0563C1"/>
       </a:hlink>
       <a:folHlink>
-        <a:srgbClr val="96607D"/>
+        <a:srgbClr val="954F72"/>
       </a:folHlink>
     </a:clrScheme>
     <a:fontScheme name="Office">
       <a:majorFont>
-        <a:latin typeface="Aptos Display" panose="02110004020202020204"/>
+        <a:latin typeface="Calibri Light" panose="020F0302020204030204"/>
         <a:ea typeface=""/>
         <a:cs typeface=""/>
         <a:font script="Jpan" typeface="游ゴシック Light"/>
@@ -3651,26 +3598,9 @@
         <a:font script="Viet" typeface="Times New Roman"/>
         <a:font script="Uigh" typeface="Microsoft Uighur"/>
         <a:font script="Geor" typeface="Sylfaen"/>
-        <a:font script="Armn" typeface="Arial"/>
-        <a:font script="Bugi" typeface="Leelawadee UI"/>
-        <a:font script="Bopo" typeface="Microsoft JhengHei"/>
-        <a:font script="Java" typeface="Javanese Text"/>
-        <a:font script="Lisu" typeface="Segoe UI"/>
-        <a:font script="Mymr" typeface="Myanmar Text"/>
-        <a:font script="Nkoo" typeface="Ebrima"/>
-        <a:font script="Olck" typeface="Nirmala UI"/>
-        <a:font script="Osma" typeface="Ebrima"/>
-        <a:font script="Phag" typeface="Phagspa"/>
-        <a:font script="Syrn" typeface="Estrangelo Edessa"/>
-        <a:font script="Syrj" typeface="Estrangelo Edessa"/>
-        <a:font script="Syre" typeface="Estrangelo Edessa"/>
-        <a:font script="Sora" typeface="Nirmala UI"/>
-        <a:font script="Tale" typeface="Microsoft Tai Le"/>
-        <a:font script="Talu" typeface="Microsoft New Tai Lue"/>
-        <a:font script="Tfng" typeface="Ebrima"/>
       </a:majorFont>
       <a:minorFont>
-        <a:latin typeface="Aptos" panose="02110004020202020204"/>
+        <a:latin typeface="Calibri" panose="020F0502020204030204"/>
         <a:ea typeface=""/>
         <a:cs typeface=""/>
         <a:font script="Jpan" typeface="游ゴシック"/>
@@ -3703,23 +3633,6 @@
         <a:font script="Viet" typeface="Arial"/>
         <a:font script="Uigh" typeface="Microsoft Uighur"/>
         <a:font script="Geor" typeface="Sylfaen"/>
-        <a:font script="Armn" typeface="Arial"/>
-        <a:font script="Bugi" typeface="Leelawadee UI"/>
-        <a:font script="Bopo" typeface="Microsoft JhengHei"/>
-        <a:font script="Java" typeface="Javanese Text"/>
-        <a:font script="Lisu" typeface="Segoe UI"/>
-        <a:font script="Mymr" typeface="Myanmar Text"/>
-        <a:font script="Nkoo" typeface="Ebrima"/>
-        <a:font script="Olck" typeface="Nirmala UI"/>
-        <a:font script="Osma" typeface="Ebrima"/>
-        <a:font script="Phag" typeface="Phagspa"/>
-        <a:font script="Syrn" typeface="Estrangelo Edessa"/>
-        <a:font script="Syrj" typeface="Estrangelo Edessa"/>
-        <a:font script="Syre" typeface="Estrangelo Edessa"/>
-        <a:font script="Sora" typeface="Nirmala UI"/>
-        <a:font script="Tale" typeface="Microsoft Tai Le"/>
-        <a:font script="Talu" typeface="Microsoft New Tai Lue"/>
-        <a:font script="Tfng" typeface="Ebrima"/>
       </a:minorFont>
     </a:fontScheme>
     <a:fmtScheme name="Office">
@@ -3781,6 +3694,13 @@
         </a:gradFill>
       </a:fillStyleLst>
       <a:lnStyleLst>
+        <a:ln w="6350" cap="flat" cmpd="sng" algn="ctr">
+          <a:solidFill>
+            <a:schemeClr val="phClr"/>
+          </a:solidFill>
+          <a:prstDash val="solid"/>
+          <a:miter lim="800000"/>
+        </a:ln>
         <a:ln w="12700" cap="flat" cmpd="sng" algn="ctr">
           <a:solidFill>
             <a:schemeClr val="phClr"/>
@@ -3789,13 +3709,6 @@
           <a:miter lim="800000"/>
         </a:ln>
         <a:ln w="19050" cap="flat" cmpd="sng" algn="ctr">
-          <a:solidFill>
-            <a:schemeClr val="phClr"/>
-          </a:solidFill>
-          <a:prstDash val="solid"/>
-          <a:miter lim="800000"/>
-        </a:ln>
-        <a:ln w="25400" cap="flat" cmpd="sng" algn="ctr">
           <a:solidFill>
             <a:schemeClr val="phClr"/>
           </a:solidFill>
@@ -3860,31 +3773,11 @@
       </a:bgFillStyleLst>
     </a:fmtScheme>
   </a:themeElements>
-  <a:objectDefaults>
-    <a:lnDef>
-      <a:spPr/>
-      <a:bodyPr/>
-      <a:lstStyle/>
-      <a:style>
-        <a:lnRef idx="2">
-          <a:schemeClr val="accent1"/>
-        </a:lnRef>
-        <a:fillRef idx="0">
-          <a:schemeClr val="accent1"/>
-        </a:fillRef>
-        <a:effectRef idx="1">
-          <a:schemeClr val="accent1"/>
-        </a:effectRef>
-        <a:fontRef idx="minor">
-          <a:schemeClr val="tx1"/>
-        </a:fontRef>
-      </a:style>
-    </a:lnDef>
-  </a:objectDefaults>
+  <a:objectDefaults/>
   <a:extraClrSchemeLst/>
   <a:extLst>
     <a:ext uri="{05A4C25C-085E-4340-85A3-A5531E510DB2}">
-      <thm15:themeFamily xmlns:thm15="http://schemas.microsoft.com/office/thememl/2012/main" name="Office Theme" id="{2E142A2C-CD16-42D6-873A-C26D2A0506FA}" vid="{1BDDFF52-6CD6-40A5-AB3C-68EB2F1E4D0A}"/>
+      <thm15:themeFamily xmlns:thm15="http://schemas.microsoft.com/office/thememl/2012/main" name="Office Theme" id="{62F939B6-93AF-4DB8-9C6B-D6C7DFDC589F}" vid="{4A3C46E8-61CC-4603-A589-7422A47A8E4A}"/>
     </a:ext>
   </a:extLst>
 </a:theme>

--- a/Anoud.pptx
+++ b/Anoud.pptx
@@ -6,7 +6,6 @@
   </p:sldMasterIdLst>
   <p:sldIdLst>
     <p:sldId id="256" r:id="rId2"/>
-    <p:sldId id="257" r:id="rId3"/>
   </p:sldIdLst>
   <p:sldSz cx="12192000" cy="6858000"/>
   <p:notesSz cx="6858000" cy="9144000"/>
@@ -127,7 +126,13 @@
       </p:grpSpPr>
       <p:sp>
         <p:nvSpPr>
-          <p:cNvPr id="2" name="Title 1"/>
+          <p:cNvPr id="2" name="Title 1">
+            <a:extLst>
+              <a:ext uri="{FF2B5EF4-FFF2-40B4-BE49-F238E27FC236}">
+                <a16:creationId xmlns:a16="http://schemas.microsoft.com/office/drawing/2014/main" id="{9412E62F-E053-D195-2D57-C3257AAAB565}"/>
+              </a:ext>
+            </a:extLst>
+          </p:cNvPr>
           <p:cNvSpPr>
             <a:spLocks noGrp="1"/>
           </p:cNvSpPr>
@@ -150,16 +155,22 @@
           </a:lstStyle>
           <a:p>
             <a:r>
-              <a:rPr lang="en-US" smtClean="0"/>
+              <a:rPr lang="en-US"/>
               <a:t>Click to edit Master title style</a:t>
             </a:r>
-            <a:endParaRPr lang="en-US"/>
-          </a:p>
-        </p:txBody>
-      </p:sp>
-      <p:sp>
-        <p:nvSpPr>
-          <p:cNvPr id="3" name="Subtitle 2"/>
+            <a:endParaRPr lang="en-IN"/>
+          </a:p>
+        </p:txBody>
+      </p:sp>
+      <p:sp>
+        <p:nvSpPr>
+          <p:cNvPr id="3" name="Subtitle 2">
+            <a:extLst>
+              <a:ext uri="{FF2B5EF4-FFF2-40B4-BE49-F238E27FC236}">
+                <a16:creationId xmlns:a16="http://schemas.microsoft.com/office/drawing/2014/main" id="{3E328A0F-C76A-A0C8-D07C-3FE34C6DB8AC}"/>
+              </a:ext>
+            </a:extLst>
+          </p:cNvPr>
           <p:cNvSpPr>
             <a:spLocks noGrp="1"/>
           </p:cNvSpPr>
@@ -215,16 +226,22 @@
           </a:lstStyle>
           <a:p>
             <a:r>
-              <a:rPr lang="en-US" smtClean="0"/>
+              <a:rPr lang="en-US"/>
               <a:t>Click to edit Master subtitle style</a:t>
             </a:r>
-            <a:endParaRPr lang="en-US"/>
-          </a:p>
-        </p:txBody>
-      </p:sp>
-      <p:sp>
-        <p:nvSpPr>
-          <p:cNvPr id="4" name="Date Placeholder 3"/>
+            <a:endParaRPr lang="en-IN"/>
+          </a:p>
+        </p:txBody>
+      </p:sp>
+      <p:sp>
+        <p:nvSpPr>
+          <p:cNvPr id="4" name="Date Placeholder 3">
+            <a:extLst>
+              <a:ext uri="{FF2B5EF4-FFF2-40B4-BE49-F238E27FC236}">
+                <a16:creationId xmlns:a16="http://schemas.microsoft.com/office/drawing/2014/main" id="{225F26DF-89F9-B0D4-B996-05F5A16D5BBE}"/>
+              </a:ext>
+            </a:extLst>
+          </p:cNvPr>
           <p:cNvSpPr>
             <a:spLocks noGrp="1"/>
           </p:cNvSpPr>
@@ -237,17 +254,23 @@
           <a:bodyPr/>
           <a:lstStyle/>
           <a:p>
-            <a:fld id="{C8619975-09B3-45A9-981B-24156A02B11A}" type="datetimeFigureOut">
-              <a:rPr lang="en-US" smtClean="0"/>
-              <a:t>3/26/2026</a:t>
+            <a:fld id="{E471BDBF-D618-42A7-B9D8-B6E6A6C95C5A}" type="datetimeFigureOut">
+              <a:rPr lang="en-IN" smtClean="0"/>
+              <a:t>26-03-2026</a:t>
             </a:fld>
-            <a:endParaRPr lang="en-US"/>
-          </a:p>
-        </p:txBody>
-      </p:sp>
-      <p:sp>
-        <p:nvSpPr>
-          <p:cNvPr id="5" name="Footer Placeholder 4"/>
+            <a:endParaRPr lang="en-IN"/>
+          </a:p>
+        </p:txBody>
+      </p:sp>
+      <p:sp>
+        <p:nvSpPr>
+          <p:cNvPr id="5" name="Footer Placeholder 4">
+            <a:extLst>
+              <a:ext uri="{FF2B5EF4-FFF2-40B4-BE49-F238E27FC236}">
+                <a16:creationId xmlns:a16="http://schemas.microsoft.com/office/drawing/2014/main" id="{BF3D165A-06AB-4637-3CDE-361360DD223D}"/>
+              </a:ext>
+            </a:extLst>
+          </p:cNvPr>
           <p:cNvSpPr>
             <a:spLocks noGrp="1"/>
           </p:cNvSpPr>
@@ -260,13 +283,19 @@
           <a:bodyPr/>
           <a:lstStyle/>
           <a:p>
-            <a:endParaRPr lang="en-US"/>
-          </a:p>
-        </p:txBody>
-      </p:sp>
-      <p:sp>
-        <p:nvSpPr>
-          <p:cNvPr id="6" name="Slide Number Placeholder 5"/>
+            <a:endParaRPr lang="en-IN"/>
+          </a:p>
+        </p:txBody>
+      </p:sp>
+      <p:sp>
+        <p:nvSpPr>
+          <p:cNvPr id="6" name="Slide Number Placeholder 5">
+            <a:extLst>
+              <a:ext uri="{FF2B5EF4-FFF2-40B4-BE49-F238E27FC236}">
+                <a16:creationId xmlns:a16="http://schemas.microsoft.com/office/drawing/2014/main" id="{B690218E-0A38-5122-71F6-1CA5A86F0946}"/>
+              </a:ext>
+            </a:extLst>
+          </p:cNvPr>
           <p:cNvSpPr>
             <a:spLocks noGrp="1"/>
           </p:cNvSpPr>
@@ -279,18 +308,18 @@
           <a:bodyPr/>
           <a:lstStyle/>
           <a:p>
-            <a:fld id="{F8EBE27D-6BE1-4123-A15D-30EC878A573F}" type="slidenum">
-              <a:rPr lang="en-US" smtClean="0"/>
+            <a:fld id="{B8EAE59F-CC89-4136-872C-DCBA0EEB52F5}" type="slidenum">
+              <a:rPr lang="en-IN" smtClean="0"/>
               <a:t>‹#›</a:t>
             </a:fld>
-            <a:endParaRPr lang="en-US"/>
+            <a:endParaRPr lang="en-IN"/>
           </a:p>
         </p:txBody>
       </p:sp>
     </p:spTree>
     <p:extLst>
       <p:ext uri="{BB962C8B-B14F-4D97-AF65-F5344CB8AC3E}">
-        <p14:creationId xmlns:p14="http://schemas.microsoft.com/office/powerpoint/2010/main" val="3638977714"/>
+        <p14:creationId xmlns:p14="http://schemas.microsoft.com/office/powerpoint/2010/main" val="3806228860"/>
       </p:ext>
     </p:extLst>
   </p:cSld>
@@ -319,7 +348,13 @@
       </p:grpSpPr>
       <p:sp>
         <p:nvSpPr>
-          <p:cNvPr id="2" name="Title 1"/>
+          <p:cNvPr id="2" name="Title 1">
+            <a:extLst>
+              <a:ext uri="{FF2B5EF4-FFF2-40B4-BE49-F238E27FC236}">
+                <a16:creationId xmlns:a16="http://schemas.microsoft.com/office/drawing/2014/main" id="{AE5D98BD-CF49-73A2-1716-88F113225161}"/>
+              </a:ext>
+            </a:extLst>
+          </p:cNvPr>
           <p:cNvSpPr>
             <a:spLocks noGrp="1"/>
           </p:cNvSpPr>
@@ -333,16 +368,22 @@
           <a:lstStyle/>
           <a:p>
             <a:r>
-              <a:rPr lang="en-US" smtClean="0"/>
+              <a:rPr lang="en-US"/>
               <a:t>Click to edit Master title style</a:t>
             </a:r>
-            <a:endParaRPr lang="en-US"/>
-          </a:p>
-        </p:txBody>
-      </p:sp>
-      <p:sp>
-        <p:nvSpPr>
-          <p:cNvPr id="3" name="Vertical Text Placeholder 2"/>
+            <a:endParaRPr lang="en-IN"/>
+          </a:p>
+        </p:txBody>
+      </p:sp>
+      <p:sp>
+        <p:nvSpPr>
+          <p:cNvPr id="3" name="Vertical Text Placeholder 2">
+            <a:extLst>
+              <a:ext uri="{FF2B5EF4-FFF2-40B4-BE49-F238E27FC236}">
+                <a16:creationId xmlns:a16="http://schemas.microsoft.com/office/drawing/2014/main" id="{A9B3733C-DF58-1098-4E6C-39EB04E88875}"/>
+              </a:ext>
+            </a:extLst>
+          </p:cNvPr>
           <p:cNvSpPr>
             <a:spLocks noGrp="1"/>
           </p:cNvSpPr>
@@ -357,44 +398,50 @@
           <a:p>
             <a:pPr lvl="0"/>
             <a:r>
-              <a:rPr lang="en-US" smtClean="0"/>
-              <a:t>Edit Master text styles</a:t>
+              <a:rPr lang="en-US"/>
+              <a:t>Click to edit Master text styles</a:t>
             </a:r>
           </a:p>
           <a:p>
             <a:pPr lvl="1"/>
             <a:r>
-              <a:rPr lang="en-US" smtClean="0"/>
+              <a:rPr lang="en-US"/>
               <a:t>Second level</a:t>
             </a:r>
           </a:p>
           <a:p>
             <a:pPr lvl="2"/>
             <a:r>
-              <a:rPr lang="en-US" smtClean="0"/>
+              <a:rPr lang="en-US"/>
               <a:t>Third level</a:t>
             </a:r>
           </a:p>
           <a:p>
             <a:pPr lvl="3"/>
             <a:r>
-              <a:rPr lang="en-US" smtClean="0"/>
+              <a:rPr lang="en-US"/>
               <a:t>Fourth level</a:t>
             </a:r>
           </a:p>
           <a:p>
             <a:pPr lvl="4"/>
             <a:r>
-              <a:rPr lang="en-US" smtClean="0"/>
+              <a:rPr lang="en-US"/>
               <a:t>Fifth level</a:t>
             </a:r>
-            <a:endParaRPr lang="en-US"/>
-          </a:p>
-        </p:txBody>
-      </p:sp>
-      <p:sp>
-        <p:nvSpPr>
-          <p:cNvPr id="4" name="Date Placeholder 3"/>
+            <a:endParaRPr lang="en-IN"/>
+          </a:p>
+        </p:txBody>
+      </p:sp>
+      <p:sp>
+        <p:nvSpPr>
+          <p:cNvPr id="4" name="Date Placeholder 3">
+            <a:extLst>
+              <a:ext uri="{FF2B5EF4-FFF2-40B4-BE49-F238E27FC236}">
+                <a16:creationId xmlns:a16="http://schemas.microsoft.com/office/drawing/2014/main" id="{2C86184D-5EE3-BCBA-C2D6-C3FC9B1E51D8}"/>
+              </a:ext>
+            </a:extLst>
+          </p:cNvPr>
           <p:cNvSpPr>
             <a:spLocks noGrp="1"/>
           </p:cNvSpPr>
@@ -407,17 +454,23 @@
           <a:bodyPr/>
           <a:lstStyle/>
           <a:p>
-            <a:fld id="{C8619975-09B3-45A9-981B-24156A02B11A}" type="datetimeFigureOut">
-              <a:rPr lang="en-US" smtClean="0"/>
-              <a:t>3/26/2026</a:t>
+            <a:fld id="{E471BDBF-D618-42A7-B9D8-B6E6A6C95C5A}" type="datetimeFigureOut">
+              <a:rPr lang="en-IN" smtClean="0"/>
+              <a:t>26-03-2026</a:t>
             </a:fld>
-            <a:endParaRPr lang="en-US"/>
-          </a:p>
-        </p:txBody>
-      </p:sp>
-      <p:sp>
-        <p:nvSpPr>
-          <p:cNvPr id="5" name="Footer Placeholder 4"/>
+            <a:endParaRPr lang="en-IN"/>
+          </a:p>
+        </p:txBody>
+      </p:sp>
+      <p:sp>
+        <p:nvSpPr>
+          <p:cNvPr id="5" name="Footer Placeholder 4">
+            <a:extLst>
+              <a:ext uri="{FF2B5EF4-FFF2-40B4-BE49-F238E27FC236}">
+                <a16:creationId xmlns:a16="http://schemas.microsoft.com/office/drawing/2014/main" id="{E4795AD1-015D-8418-931A-8892EB32A539}"/>
+              </a:ext>
+            </a:extLst>
+          </p:cNvPr>
           <p:cNvSpPr>
             <a:spLocks noGrp="1"/>
           </p:cNvSpPr>
@@ -430,13 +483,19 @@
           <a:bodyPr/>
           <a:lstStyle/>
           <a:p>
-            <a:endParaRPr lang="en-US"/>
-          </a:p>
-        </p:txBody>
-      </p:sp>
-      <p:sp>
-        <p:nvSpPr>
-          <p:cNvPr id="6" name="Slide Number Placeholder 5"/>
+            <a:endParaRPr lang="en-IN"/>
+          </a:p>
+        </p:txBody>
+      </p:sp>
+      <p:sp>
+        <p:nvSpPr>
+          <p:cNvPr id="6" name="Slide Number Placeholder 5">
+            <a:extLst>
+              <a:ext uri="{FF2B5EF4-FFF2-40B4-BE49-F238E27FC236}">
+                <a16:creationId xmlns:a16="http://schemas.microsoft.com/office/drawing/2014/main" id="{6919F904-9A0A-7213-BEF3-C752E6DF2FD0}"/>
+              </a:ext>
+            </a:extLst>
+          </p:cNvPr>
           <p:cNvSpPr>
             <a:spLocks noGrp="1"/>
           </p:cNvSpPr>
@@ -449,18 +508,18 @@
           <a:bodyPr/>
           <a:lstStyle/>
           <a:p>
-            <a:fld id="{F8EBE27D-6BE1-4123-A15D-30EC878A573F}" type="slidenum">
-              <a:rPr lang="en-US" smtClean="0"/>
+            <a:fld id="{B8EAE59F-CC89-4136-872C-DCBA0EEB52F5}" type="slidenum">
+              <a:rPr lang="en-IN" smtClean="0"/>
               <a:t>‹#›</a:t>
             </a:fld>
-            <a:endParaRPr lang="en-US"/>
+            <a:endParaRPr lang="en-IN"/>
           </a:p>
         </p:txBody>
       </p:sp>
     </p:spTree>
     <p:extLst>
       <p:ext uri="{BB962C8B-B14F-4D97-AF65-F5344CB8AC3E}">
-        <p14:creationId xmlns:p14="http://schemas.microsoft.com/office/powerpoint/2010/main" val="973167214"/>
+        <p14:creationId xmlns:p14="http://schemas.microsoft.com/office/powerpoint/2010/main" val="1314177792"/>
       </p:ext>
     </p:extLst>
   </p:cSld>
@@ -489,7 +548,13 @@
       </p:grpSpPr>
       <p:sp>
         <p:nvSpPr>
-          <p:cNvPr id="2" name="Vertical Title 1"/>
+          <p:cNvPr id="2" name="Vertical Title 1">
+            <a:extLst>
+              <a:ext uri="{FF2B5EF4-FFF2-40B4-BE49-F238E27FC236}">
+                <a16:creationId xmlns:a16="http://schemas.microsoft.com/office/drawing/2014/main" id="{79B36254-B31E-57A3-609B-52AA9A983A96}"/>
+              </a:ext>
+            </a:extLst>
+          </p:cNvPr>
           <p:cNvSpPr>
             <a:spLocks noGrp="1"/>
           </p:cNvSpPr>
@@ -508,16 +573,22 @@
           <a:lstStyle/>
           <a:p>
             <a:r>
-              <a:rPr lang="en-US" smtClean="0"/>
+              <a:rPr lang="en-US"/>
               <a:t>Click to edit Master title style</a:t>
             </a:r>
-            <a:endParaRPr lang="en-US"/>
-          </a:p>
-        </p:txBody>
-      </p:sp>
-      <p:sp>
-        <p:nvSpPr>
-          <p:cNvPr id="3" name="Vertical Text Placeholder 2"/>
+            <a:endParaRPr lang="en-IN"/>
+          </a:p>
+        </p:txBody>
+      </p:sp>
+      <p:sp>
+        <p:nvSpPr>
+          <p:cNvPr id="3" name="Vertical Text Placeholder 2">
+            <a:extLst>
+              <a:ext uri="{FF2B5EF4-FFF2-40B4-BE49-F238E27FC236}">
+                <a16:creationId xmlns:a16="http://schemas.microsoft.com/office/drawing/2014/main" id="{38CABD68-27C0-C98F-BEBC-5FA4BCE563BC}"/>
+              </a:ext>
+            </a:extLst>
+          </p:cNvPr>
           <p:cNvSpPr>
             <a:spLocks noGrp="1"/>
           </p:cNvSpPr>
@@ -537,44 +608,50 @@
           <a:p>
             <a:pPr lvl="0"/>
             <a:r>
-              <a:rPr lang="en-US" smtClean="0"/>
-              <a:t>Edit Master text styles</a:t>
+              <a:rPr lang="en-US"/>
+              <a:t>Click to edit Master text styles</a:t>
             </a:r>
           </a:p>
           <a:p>
             <a:pPr lvl="1"/>
             <a:r>
-              <a:rPr lang="en-US" smtClean="0"/>
+              <a:rPr lang="en-US"/>
               <a:t>Second level</a:t>
             </a:r>
           </a:p>
           <a:p>
             <a:pPr lvl="2"/>
             <a:r>
-              <a:rPr lang="en-US" smtClean="0"/>
+              <a:rPr lang="en-US"/>
               <a:t>Third level</a:t>
             </a:r>
           </a:p>
           <a:p>
             <a:pPr lvl="3"/>
             <a:r>
-              <a:rPr lang="en-US" smtClean="0"/>
+              <a:rPr lang="en-US"/>
               <a:t>Fourth level</a:t>
             </a:r>
           </a:p>
           <a:p>
             <a:pPr lvl="4"/>
             <a:r>
-              <a:rPr lang="en-US" smtClean="0"/>
+              <a:rPr lang="en-US"/>
               <a:t>Fifth level</a:t>
             </a:r>
-            <a:endParaRPr lang="en-US"/>
-          </a:p>
-        </p:txBody>
-      </p:sp>
-      <p:sp>
-        <p:nvSpPr>
-          <p:cNvPr id="4" name="Date Placeholder 3"/>
+            <a:endParaRPr lang="en-IN"/>
+          </a:p>
+        </p:txBody>
+      </p:sp>
+      <p:sp>
+        <p:nvSpPr>
+          <p:cNvPr id="4" name="Date Placeholder 3">
+            <a:extLst>
+              <a:ext uri="{FF2B5EF4-FFF2-40B4-BE49-F238E27FC236}">
+                <a16:creationId xmlns:a16="http://schemas.microsoft.com/office/drawing/2014/main" id="{037A4D04-7D76-E7C9-7DB7-32C0DE4637FA}"/>
+              </a:ext>
+            </a:extLst>
+          </p:cNvPr>
           <p:cNvSpPr>
             <a:spLocks noGrp="1"/>
           </p:cNvSpPr>
@@ -587,17 +664,23 @@
           <a:bodyPr/>
           <a:lstStyle/>
           <a:p>
-            <a:fld id="{C8619975-09B3-45A9-981B-24156A02B11A}" type="datetimeFigureOut">
-              <a:rPr lang="en-US" smtClean="0"/>
-              <a:t>3/26/2026</a:t>
+            <a:fld id="{E471BDBF-D618-42A7-B9D8-B6E6A6C95C5A}" type="datetimeFigureOut">
+              <a:rPr lang="en-IN" smtClean="0"/>
+              <a:t>26-03-2026</a:t>
             </a:fld>
-            <a:endParaRPr lang="en-US"/>
-          </a:p>
-        </p:txBody>
-      </p:sp>
-      <p:sp>
-        <p:nvSpPr>
-          <p:cNvPr id="5" name="Footer Placeholder 4"/>
+            <a:endParaRPr lang="en-IN"/>
+          </a:p>
+        </p:txBody>
+      </p:sp>
+      <p:sp>
+        <p:nvSpPr>
+          <p:cNvPr id="5" name="Footer Placeholder 4">
+            <a:extLst>
+              <a:ext uri="{FF2B5EF4-FFF2-40B4-BE49-F238E27FC236}">
+                <a16:creationId xmlns:a16="http://schemas.microsoft.com/office/drawing/2014/main" id="{68234FE4-5800-71C7-E65E-52A296B497EE}"/>
+              </a:ext>
+            </a:extLst>
+          </p:cNvPr>
           <p:cNvSpPr>
             <a:spLocks noGrp="1"/>
           </p:cNvSpPr>
@@ -610,13 +693,19 @@
           <a:bodyPr/>
           <a:lstStyle/>
           <a:p>
-            <a:endParaRPr lang="en-US"/>
-          </a:p>
-        </p:txBody>
-      </p:sp>
-      <p:sp>
-        <p:nvSpPr>
-          <p:cNvPr id="6" name="Slide Number Placeholder 5"/>
+            <a:endParaRPr lang="en-IN"/>
+          </a:p>
+        </p:txBody>
+      </p:sp>
+      <p:sp>
+        <p:nvSpPr>
+          <p:cNvPr id="6" name="Slide Number Placeholder 5">
+            <a:extLst>
+              <a:ext uri="{FF2B5EF4-FFF2-40B4-BE49-F238E27FC236}">
+                <a16:creationId xmlns:a16="http://schemas.microsoft.com/office/drawing/2014/main" id="{FF9C5846-79BF-695E-D4E4-08BC0D2BB636}"/>
+              </a:ext>
+            </a:extLst>
+          </p:cNvPr>
           <p:cNvSpPr>
             <a:spLocks noGrp="1"/>
           </p:cNvSpPr>
@@ -629,18 +718,18 @@
           <a:bodyPr/>
           <a:lstStyle/>
           <a:p>
-            <a:fld id="{F8EBE27D-6BE1-4123-A15D-30EC878A573F}" type="slidenum">
-              <a:rPr lang="en-US" smtClean="0"/>
+            <a:fld id="{B8EAE59F-CC89-4136-872C-DCBA0EEB52F5}" type="slidenum">
+              <a:rPr lang="en-IN" smtClean="0"/>
               <a:t>‹#›</a:t>
             </a:fld>
-            <a:endParaRPr lang="en-US"/>
+            <a:endParaRPr lang="en-IN"/>
           </a:p>
         </p:txBody>
       </p:sp>
     </p:spTree>
     <p:extLst>
       <p:ext uri="{BB962C8B-B14F-4D97-AF65-F5344CB8AC3E}">
-        <p14:creationId xmlns:p14="http://schemas.microsoft.com/office/powerpoint/2010/main" val="2613128845"/>
+        <p14:creationId xmlns:p14="http://schemas.microsoft.com/office/powerpoint/2010/main" val="1318167179"/>
       </p:ext>
     </p:extLst>
   </p:cSld>
@@ -669,7 +758,13 @@
       </p:grpSpPr>
       <p:sp>
         <p:nvSpPr>
-          <p:cNvPr id="2" name="Title 1"/>
+          <p:cNvPr id="2" name="Title 1">
+            <a:extLst>
+              <a:ext uri="{FF2B5EF4-FFF2-40B4-BE49-F238E27FC236}">
+                <a16:creationId xmlns:a16="http://schemas.microsoft.com/office/drawing/2014/main" id="{A4DBC0BC-61B6-FCE7-4A46-ED11F5A5F2BC}"/>
+              </a:ext>
+            </a:extLst>
+          </p:cNvPr>
           <p:cNvSpPr>
             <a:spLocks noGrp="1"/>
           </p:cNvSpPr>
@@ -683,16 +778,22 @@
           <a:lstStyle/>
           <a:p>
             <a:r>
-              <a:rPr lang="en-US" smtClean="0"/>
+              <a:rPr lang="en-US"/>
               <a:t>Click to edit Master title style</a:t>
             </a:r>
-            <a:endParaRPr lang="en-US"/>
-          </a:p>
-        </p:txBody>
-      </p:sp>
-      <p:sp>
-        <p:nvSpPr>
-          <p:cNvPr id="3" name="Content Placeholder 2"/>
+            <a:endParaRPr lang="en-IN"/>
+          </a:p>
+        </p:txBody>
+      </p:sp>
+      <p:sp>
+        <p:nvSpPr>
+          <p:cNvPr id="3" name="Content Placeholder 2">
+            <a:extLst>
+              <a:ext uri="{FF2B5EF4-FFF2-40B4-BE49-F238E27FC236}">
+                <a16:creationId xmlns:a16="http://schemas.microsoft.com/office/drawing/2014/main" id="{8837341F-1CCA-D163-27F4-D61130485866}"/>
+              </a:ext>
+            </a:extLst>
+          </p:cNvPr>
           <p:cNvSpPr>
             <a:spLocks noGrp="1"/>
           </p:cNvSpPr>
@@ -707,44 +808,50 @@
           <a:p>
             <a:pPr lvl="0"/>
             <a:r>
-              <a:rPr lang="en-US" smtClean="0"/>
-              <a:t>Edit Master text styles</a:t>
+              <a:rPr lang="en-US"/>
+              <a:t>Click to edit Master text styles</a:t>
             </a:r>
           </a:p>
           <a:p>
             <a:pPr lvl="1"/>
             <a:r>
-              <a:rPr lang="en-US" smtClean="0"/>
+              <a:rPr lang="en-US"/>
               <a:t>Second level</a:t>
             </a:r>
           </a:p>
           <a:p>
             <a:pPr lvl="2"/>
             <a:r>
-              <a:rPr lang="en-US" smtClean="0"/>
+              <a:rPr lang="en-US"/>
               <a:t>Third level</a:t>
             </a:r>
           </a:p>
           <a:p>
             <a:pPr lvl="3"/>
             <a:r>
-              <a:rPr lang="en-US" smtClean="0"/>
+              <a:rPr lang="en-US"/>
               <a:t>Fourth level</a:t>
             </a:r>
           </a:p>
           <a:p>
             <a:pPr lvl="4"/>
             <a:r>
-              <a:rPr lang="en-US" smtClean="0"/>
+              <a:rPr lang="en-US"/>
               <a:t>Fifth level</a:t>
             </a:r>
-            <a:endParaRPr lang="en-US"/>
-          </a:p>
-        </p:txBody>
-      </p:sp>
-      <p:sp>
-        <p:nvSpPr>
-          <p:cNvPr id="4" name="Date Placeholder 3"/>
+            <a:endParaRPr lang="en-IN"/>
+          </a:p>
+        </p:txBody>
+      </p:sp>
+      <p:sp>
+        <p:nvSpPr>
+          <p:cNvPr id="4" name="Date Placeholder 3">
+            <a:extLst>
+              <a:ext uri="{FF2B5EF4-FFF2-40B4-BE49-F238E27FC236}">
+                <a16:creationId xmlns:a16="http://schemas.microsoft.com/office/drawing/2014/main" id="{FBA9010C-C6EF-16C1-27BA-EFDCEFBF804E}"/>
+              </a:ext>
+            </a:extLst>
+          </p:cNvPr>
           <p:cNvSpPr>
             <a:spLocks noGrp="1"/>
           </p:cNvSpPr>
@@ -757,17 +864,23 @@
           <a:bodyPr/>
           <a:lstStyle/>
           <a:p>
-            <a:fld id="{C8619975-09B3-45A9-981B-24156A02B11A}" type="datetimeFigureOut">
-              <a:rPr lang="en-US" smtClean="0"/>
-              <a:t>3/26/2026</a:t>
+            <a:fld id="{E471BDBF-D618-42A7-B9D8-B6E6A6C95C5A}" type="datetimeFigureOut">
+              <a:rPr lang="en-IN" smtClean="0"/>
+              <a:t>26-03-2026</a:t>
             </a:fld>
-            <a:endParaRPr lang="en-US"/>
-          </a:p>
-        </p:txBody>
-      </p:sp>
-      <p:sp>
-        <p:nvSpPr>
-          <p:cNvPr id="5" name="Footer Placeholder 4"/>
+            <a:endParaRPr lang="en-IN"/>
+          </a:p>
+        </p:txBody>
+      </p:sp>
+      <p:sp>
+        <p:nvSpPr>
+          <p:cNvPr id="5" name="Footer Placeholder 4">
+            <a:extLst>
+              <a:ext uri="{FF2B5EF4-FFF2-40B4-BE49-F238E27FC236}">
+                <a16:creationId xmlns:a16="http://schemas.microsoft.com/office/drawing/2014/main" id="{884C7055-3D4C-74C5-2F4F-F7FADCF1B314}"/>
+              </a:ext>
+            </a:extLst>
+          </p:cNvPr>
           <p:cNvSpPr>
             <a:spLocks noGrp="1"/>
           </p:cNvSpPr>
@@ -780,13 +893,19 @@
           <a:bodyPr/>
           <a:lstStyle/>
           <a:p>
-            <a:endParaRPr lang="en-US"/>
-          </a:p>
-        </p:txBody>
-      </p:sp>
-      <p:sp>
-        <p:nvSpPr>
-          <p:cNvPr id="6" name="Slide Number Placeholder 5"/>
+            <a:endParaRPr lang="en-IN"/>
+          </a:p>
+        </p:txBody>
+      </p:sp>
+      <p:sp>
+        <p:nvSpPr>
+          <p:cNvPr id="6" name="Slide Number Placeholder 5">
+            <a:extLst>
+              <a:ext uri="{FF2B5EF4-FFF2-40B4-BE49-F238E27FC236}">
+                <a16:creationId xmlns:a16="http://schemas.microsoft.com/office/drawing/2014/main" id="{FE212FA3-EE87-720E-22C2-8117F4AD79E9}"/>
+              </a:ext>
+            </a:extLst>
+          </p:cNvPr>
           <p:cNvSpPr>
             <a:spLocks noGrp="1"/>
           </p:cNvSpPr>
@@ -799,18 +918,18 @@
           <a:bodyPr/>
           <a:lstStyle/>
           <a:p>
-            <a:fld id="{F8EBE27D-6BE1-4123-A15D-30EC878A573F}" type="slidenum">
-              <a:rPr lang="en-US" smtClean="0"/>
+            <a:fld id="{B8EAE59F-CC89-4136-872C-DCBA0EEB52F5}" type="slidenum">
+              <a:rPr lang="en-IN" smtClean="0"/>
               <a:t>‹#›</a:t>
             </a:fld>
-            <a:endParaRPr lang="en-US"/>
+            <a:endParaRPr lang="en-IN"/>
           </a:p>
         </p:txBody>
       </p:sp>
     </p:spTree>
     <p:extLst>
       <p:ext uri="{BB962C8B-B14F-4D97-AF65-F5344CB8AC3E}">
-        <p14:creationId xmlns:p14="http://schemas.microsoft.com/office/powerpoint/2010/main" val="1382944240"/>
+        <p14:creationId xmlns:p14="http://schemas.microsoft.com/office/powerpoint/2010/main" val="962627378"/>
       </p:ext>
     </p:extLst>
   </p:cSld>
@@ -839,7 +958,13 @@
       </p:grpSpPr>
       <p:sp>
         <p:nvSpPr>
-          <p:cNvPr id="2" name="Title 1"/>
+          <p:cNvPr id="2" name="Title 1">
+            <a:extLst>
+              <a:ext uri="{FF2B5EF4-FFF2-40B4-BE49-F238E27FC236}">
+                <a16:creationId xmlns:a16="http://schemas.microsoft.com/office/drawing/2014/main" id="{94323431-5192-AE86-D02C-FA4A35A12D78}"/>
+              </a:ext>
+            </a:extLst>
+          </p:cNvPr>
           <p:cNvSpPr>
             <a:spLocks noGrp="1"/>
           </p:cNvSpPr>
@@ -862,16 +987,22 @@
           </a:lstStyle>
           <a:p>
             <a:r>
-              <a:rPr lang="en-US" smtClean="0"/>
+              <a:rPr lang="en-US"/>
               <a:t>Click to edit Master title style</a:t>
             </a:r>
-            <a:endParaRPr lang="en-US"/>
-          </a:p>
-        </p:txBody>
-      </p:sp>
-      <p:sp>
-        <p:nvSpPr>
-          <p:cNvPr id="3" name="Text Placeholder 2"/>
+            <a:endParaRPr lang="en-IN"/>
+          </a:p>
+        </p:txBody>
+      </p:sp>
+      <p:sp>
+        <p:nvSpPr>
+          <p:cNvPr id="3" name="Text Placeholder 2">
+            <a:extLst>
+              <a:ext uri="{FF2B5EF4-FFF2-40B4-BE49-F238E27FC236}">
+                <a16:creationId xmlns:a16="http://schemas.microsoft.com/office/drawing/2014/main" id="{0FC9BCAF-A9C5-3648-614D-7A643257D3E7}"/>
+              </a:ext>
+            </a:extLst>
+          </p:cNvPr>
           <p:cNvSpPr>
             <a:spLocks noGrp="1"/>
           </p:cNvSpPr>
@@ -893,7 +1024,7 @@
               <a:defRPr sz="2400">
                 <a:solidFill>
                   <a:schemeClr val="tx1">
-                    <a:tint val="75000"/>
+                    <a:tint val="82000"/>
                   </a:schemeClr>
                 </a:solidFill>
               </a:defRPr>
@@ -903,7 +1034,7 @@
               <a:defRPr sz="2000">
                 <a:solidFill>
                   <a:schemeClr val="tx1">
-                    <a:tint val="75000"/>
+                    <a:tint val="82000"/>
                   </a:schemeClr>
                 </a:solidFill>
               </a:defRPr>
@@ -913,7 +1044,7 @@
               <a:defRPr sz="1800">
                 <a:solidFill>
                   <a:schemeClr val="tx1">
-                    <a:tint val="75000"/>
+                    <a:tint val="82000"/>
                   </a:schemeClr>
                 </a:solidFill>
               </a:defRPr>
@@ -923,7 +1054,7 @@
               <a:defRPr sz="1600">
                 <a:solidFill>
                   <a:schemeClr val="tx1">
-                    <a:tint val="75000"/>
+                    <a:tint val="82000"/>
                   </a:schemeClr>
                 </a:solidFill>
               </a:defRPr>
@@ -933,7 +1064,7 @@
               <a:defRPr sz="1600">
                 <a:solidFill>
                   <a:schemeClr val="tx1">
-                    <a:tint val="75000"/>
+                    <a:tint val="82000"/>
                   </a:schemeClr>
                 </a:solidFill>
               </a:defRPr>
@@ -943,7 +1074,7 @@
               <a:defRPr sz="1600">
                 <a:solidFill>
                   <a:schemeClr val="tx1">
-                    <a:tint val="75000"/>
+                    <a:tint val="82000"/>
                   </a:schemeClr>
                 </a:solidFill>
               </a:defRPr>
@@ -953,7 +1084,7 @@
               <a:defRPr sz="1600">
                 <a:solidFill>
                   <a:schemeClr val="tx1">
-                    <a:tint val="75000"/>
+                    <a:tint val="82000"/>
                   </a:schemeClr>
                 </a:solidFill>
               </a:defRPr>
@@ -963,7 +1094,7 @@
               <a:defRPr sz="1600">
                 <a:solidFill>
                   <a:schemeClr val="tx1">
-                    <a:tint val="75000"/>
+                    <a:tint val="82000"/>
                   </a:schemeClr>
                 </a:solidFill>
               </a:defRPr>
@@ -973,7 +1104,7 @@
               <a:defRPr sz="1600">
                 <a:solidFill>
                   <a:schemeClr val="tx1">
-                    <a:tint val="75000"/>
+                    <a:tint val="82000"/>
                   </a:schemeClr>
                 </a:solidFill>
               </a:defRPr>
@@ -982,15 +1113,21 @@
           <a:p>
             <a:pPr lvl="0"/>
             <a:r>
-              <a:rPr lang="en-US" smtClean="0"/>
-              <a:t>Edit Master text styles</a:t>
-            </a:r>
-          </a:p>
-        </p:txBody>
-      </p:sp>
-      <p:sp>
-        <p:nvSpPr>
-          <p:cNvPr id="4" name="Date Placeholder 3"/>
+              <a:rPr lang="en-US"/>
+              <a:t>Click to edit Master text styles</a:t>
+            </a:r>
+          </a:p>
+        </p:txBody>
+      </p:sp>
+      <p:sp>
+        <p:nvSpPr>
+          <p:cNvPr id="4" name="Date Placeholder 3">
+            <a:extLst>
+              <a:ext uri="{FF2B5EF4-FFF2-40B4-BE49-F238E27FC236}">
+                <a16:creationId xmlns:a16="http://schemas.microsoft.com/office/drawing/2014/main" id="{0B0FF40C-A67F-C261-FDFD-1206AA425489}"/>
+              </a:ext>
+            </a:extLst>
+          </p:cNvPr>
           <p:cNvSpPr>
             <a:spLocks noGrp="1"/>
           </p:cNvSpPr>
@@ -1003,17 +1140,23 @@
           <a:bodyPr/>
           <a:lstStyle/>
           <a:p>
-            <a:fld id="{C8619975-09B3-45A9-981B-24156A02B11A}" type="datetimeFigureOut">
-              <a:rPr lang="en-US" smtClean="0"/>
-              <a:t>3/26/2026</a:t>
+            <a:fld id="{E471BDBF-D618-42A7-B9D8-B6E6A6C95C5A}" type="datetimeFigureOut">
+              <a:rPr lang="en-IN" smtClean="0"/>
+              <a:t>26-03-2026</a:t>
             </a:fld>
-            <a:endParaRPr lang="en-US"/>
-          </a:p>
-        </p:txBody>
-      </p:sp>
-      <p:sp>
-        <p:nvSpPr>
-          <p:cNvPr id="5" name="Footer Placeholder 4"/>
+            <a:endParaRPr lang="en-IN"/>
+          </a:p>
+        </p:txBody>
+      </p:sp>
+      <p:sp>
+        <p:nvSpPr>
+          <p:cNvPr id="5" name="Footer Placeholder 4">
+            <a:extLst>
+              <a:ext uri="{FF2B5EF4-FFF2-40B4-BE49-F238E27FC236}">
+                <a16:creationId xmlns:a16="http://schemas.microsoft.com/office/drawing/2014/main" id="{EC7A8E04-047A-F182-F0C9-FE0F1C1E35FC}"/>
+              </a:ext>
+            </a:extLst>
+          </p:cNvPr>
           <p:cNvSpPr>
             <a:spLocks noGrp="1"/>
           </p:cNvSpPr>
@@ -1026,13 +1169,19 @@
           <a:bodyPr/>
           <a:lstStyle/>
           <a:p>
-            <a:endParaRPr lang="en-US"/>
-          </a:p>
-        </p:txBody>
-      </p:sp>
-      <p:sp>
-        <p:nvSpPr>
-          <p:cNvPr id="6" name="Slide Number Placeholder 5"/>
+            <a:endParaRPr lang="en-IN"/>
+          </a:p>
+        </p:txBody>
+      </p:sp>
+      <p:sp>
+        <p:nvSpPr>
+          <p:cNvPr id="6" name="Slide Number Placeholder 5">
+            <a:extLst>
+              <a:ext uri="{FF2B5EF4-FFF2-40B4-BE49-F238E27FC236}">
+                <a16:creationId xmlns:a16="http://schemas.microsoft.com/office/drawing/2014/main" id="{34F56166-C823-24A6-B3B9-1D8B901327B4}"/>
+              </a:ext>
+            </a:extLst>
+          </p:cNvPr>
           <p:cNvSpPr>
             <a:spLocks noGrp="1"/>
           </p:cNvSpPr>
@@ -1045,18 +1194,18 @@
           <a:bodyPr/>
           <a:lstStyle/>
           <a:p>
-            <a:fld id="{F8EBE27D-6BE1-4123-A15D-30EC878A573F}" type="slidenum">
-              <a:rPr lang="en-US" smtClean="0"/>
+            <a:fld id="{B8EAE59F-CC89-4136-872C-DCBA0EEB52F5}" type="slidenum">
+              <a:rPr lang="en-IN" smtClean="0"/>
               <a:t>‹#›</a:t>
             </a:fld>
-            <a:endParaRPr lang="en-US"/>
+            <a:endParaRPr lang="en-IN"/>
           </a:p>
         </p:txBody>
       </p:sp>
     </p:spTree>
     <p:extLst>
       <p:ext uri="{BB962C8B-B14F-4D97-AF65-F5344CB8AC3E}">
-        <p14:creationId xmlns:p14="http://schemas.microsoft.com/office/powerpoint/2010/main" val="3208345847"/>
+        <p14:creationId xmlns:p14="http://schemas.microsoft.com/office/powerpoint/2010/main" val="653848327"/>
       </p:ext>
     </p:extLst>
   </p:cSld>
@@ -1085,7 +1234,13 @@
       </p:grpSpPr>
       <p:sp>
         <p:nvSpPr>
-          <p:cNvPr id="2" name="Title 1"/>
+          <p:cNvPr id="2" name="Title 1">
+            <a:extLst>
+              <a:ext uri="{FF2B5EF4-FFF2-40B4-BE49-F238E27FC236}">
+                <a16:creationId xmlns:a16="http://schemas.microsoft.com/office/drawing/2014/main" id="{09AF2B45-98DF-2630-3820-4BF21BDB7040}"/>
+              </a:ext>
+            </a:extLst>
+          </p:cNvPr>
           <p:cNvSpPr>
             <a:spLocks noGrp="1"/>
           </p:cNvSpPr>
@@ -1099,16 +1254,22 @@
           <a:lstStyle/>
           <a:p>
             <a:r>
-              <a:rPr lang="en-US" smtClean="0"/>
+              <a:rPr lang="en-US"/>
               <a:t>Click to edit Master title style</a:t>
             </a:r>
-            <a:endParaRPr lang="en-US"/>
-          </a:p>
-        </p:txBody>
-      </p:sp>
-      <p:sp>
-        <p:nvSpPr>
-          <p:cNvPr id="3" name="Content Placeholder 2"/>
+            <a:endParaRPr lang="en-IN"/>
+          </a:p>
+        </p:txBody>
+      </p:sp>
+      <p:sp>
+        <p:nvSpPr>
+          <p:cNvPr id="3" name="Content Placeholder 2">
+            <a:extLst>
+              <a:ext uri="{FF2B5EF4-FFF2-40B4-BE49-F238E27FC236}">
+                <a16:creationId xmlns:a16="http://schemas.microsoft.com/office/drawing/2014/main" id="{5F2132C0-6C0B-7FAE-EF52-D930271396A0}"/>
+              </a:ext>
+            </a:extLst>
+          </p:cNvPr>
           <p:cNvSpPr>
             <a:spLocks noGrp="1"/>
           </p:cNvSpPr>
@@ -1128,44 +1289,50 @@
           <a:p>
             <a:pPr lvl="0"/>
             <a:r>
-              <a:rPr lang="en-US" smtClean="0"/>
-              <a:t>Edit Master text styles</a:t>
+              <a:rPr lang="en-US"/>
+              <a:t>Click to edit Master text styles</a:t>
             </a:r>
           </a:p>
           <a:p>
             <a:pPr lvl="1"/>
             <a:r>
-              <a:rPr lang="en-US" smtClean="0"/>
+              <a:rPr lang="en-US"/>
               <a:t>Second level</a:t>
             </a:r>
           </a:p>
           <a:p>
             <a:pPr lvl="2"/>
             <a:r>
-              <a:rPr lang="en-US" smtClean="0"/>
+              <a:rPr lang="en-US"/>
               <a:t>Third level</a:t>
             </a:r>
           </a:p>
           <a:p>
             <a:pPr lvl="3"/>
             <a:r>
-              <a:rPr lang="en-US" smtClean="0"/>
+              <a:rPr lang="en-US"/>
               <a:t>Fourth level</a:t>
             </a:r>
           </a:p>
           <a:p>
             <a:pPr lvl="4"/>
             <a:r>
-              <a:rPr lang="en-US" smtClean="0"/>
+              <a:rPr lang="en-US"/>
               <a:t>Fifth level</a:t>
             </a:r>
-            <a:endParaRPr lang="en-US"/>
-          </a:p>
-        </p:txBody>
-      </p:sp>
-      <p:sp>
-        <p:nvSpPr>
-          <p:cNvPr id="4" name="Content Placeholder 3"/>
+            <a:endParaRPr lang="en-IN"/>
+          </a:p>
+        </p:txBody>
+      </p:sp>
+      <p:sp>
+        <p:nvSpPr>
+          <p:cNvPr id="4" name="Content Placeholder 3">
+            <a:extLst>
+              <a:ext uri="{FF2B5EF4-FFF2-40B4-BE49-F238E27FC236}">
+                <a16:creationId xmlns:a16="http://schemas.microsoft.com/office/drawing/2014/main" id="{E27A8CA1-0D40-7E81-6D19-40450E7443A2}"/>
+              </a:ext>
+            </a:extLst>
+          </p:cNvPr>
           <p:cNvSpPr>
             <a:spLocks noGrp="1"/>
           </p:cNvSpPr>
@@ -1185,44 +1352,50 @@
           <a:p>
             <a:pPr lvl="0"/>
             <a:r>
-              <a:rPr lang="en-US" smtClean="0"/>
-              <a:t>Edit Master text styles</a:t>
+              <a:rPr lang="en-US"/>
+              <a:t>Click to edit Master text styles</a:t>
             </a:r>
           </a:p>
           <a:p>
             <a:pPr lvl="1"/>
             <a:r>
-              <a:rPr lang="en-US" smtClean="0"/>
+              <a:rPr lang="en-US"/>
               <a:t>Second level</a:t>
             </a:r>
           </a:p>
           <a:p>
             <a:pPr lvl="2"/>
             <a:r>
-              <a:rPr lang="en-US" smtClean="0"/>
+              <a:rPr lang="en-US"/>
               <a:t>Third level</a:t>
             </a:r>
           </a:p>
           <a:p>
             <a:pPr lvl="3"/>
             <a:r>
-              <a:rPr lang="en-US" smtClean="0"/>
+              <a:rPr lang="en-US"/>
               <a:t>Fourth level</a:t>
             </a:r>
           </a:p>
           <a:p>
             <a:pPr lvl="4"/>
             <a:r>
-              <a:rPr lang="en-US" smtClean="0"/>
+              <a:rPr lang="en-US"/>
               <a:t>Fifth level</a:t>
             </a:r>
-            <a:endParaRPr lang="en-US"/>
-          </a:p>
-        </p:txBody>
-      </p:sp>
-      <p:sp>
-        <p:nvSpPr>
-          <p:cNvPr id="5" name="Date Placeholder 4"/>
+            <a:endParaRPr lang="en-IN"/>
+          </a:p>
+        </p:txBody>
+      </p:sp>
+      <p:sp>
+        <p:nvSpPr>
+          <p:cNvPr id="5" name="Date Placeholder 4">
+            <a:extLst>
+              <a:ext uri="{FF2B5EF4-FFF2-40B4-BE49-F238E27FC236}">
+                <a16:creationId xmlns:a16="http://schemas.microsoft.com/office/drawing/2014/main" id="{04769E2B-6439-6E24-CA6A-053F64E610EC}"/>
+              </a:ext>
+            </a:extLst>
+          </p:cNvPr>
           <p:cNvSpPr>
             <a:spLocks noGrp="1"/>
           </p:cNvSpPr>
@@ -1235,17 +1408,23 @@
           <a:bodyPr/>
           <a:lstStyle/>
           <a:p>
-            <a:fld id="{C8619975-09B3-45A9-981B-24156A02B11A}" type="datetimeFigureOut">
-              <a:rPr lang="en-US" smtClean="0"/>
-              <a:t>3/26/2026</a:t>
+            <a:fld id="{E471BDBF-D618-42A7-B9D8-B6E6A6C95C5A}" type="datetimeFigureOut">
+              <a:rPr lang="en-IN" smtClean="0"/>
+              <a:t>26-03-2026</a:t>
             </a:fld>
-            <a:endParaRPr lang="en-US"/>
-          </a:p>
-        </p:txBody>
-      </p:sp>
-      <p:sp>
-        <p:nvSpPr>
-          <p:cNvPr id="6" name="Footer Placeholder 5"/>
+            <a:endParaRPr lang="en-IN"/>
+          </a:p>
+        </p:txBody>
+      </p:sp>
+      <p:sp>
+        <p:nvSpPr>
+          <p:cNvPr id="6" name="Footer Placeholder 5">
+            <a:extLst>
+              <a:ext uri="{FF2B5EF4-FFF2-40B4-BE49-F238E27FC236}">
+                <a16:creationId xmlns:a16="http://schemas.microsoft.com/office/drawing/2014/main" id="{3606059F-1DC5-04B2-5FC5-998552E0EE94}"/>
+              </a:ext>
+            </a:extLst>
+          </p:cNvPr>
           <p:cNvSpPr>
             <a:spLocks noGrp="1"/>
           </p:cNvSpPr>
@@ -1258,13 +1437,19 @@
           <a:bodyPr/>
           <a:lstStyle/>
           <a:p>
-            <a:endParaRPr lang="en-US"/>
-          </a:p>
-        </p:txBody>
-      </p:sp>
-      <p:sp>
-        <p:nvSpPr>
-          <p:cNvPr id="7" name="Slide Number Placeholder 6"/>
+            <a:endParaRPr lang="en-IN"/>
+          </a:p>
+        </p:txBody>
+      </p:sp>
+      <p:sp>
+        <p:nvSpPr>
+          <p:cNvPr id="7" name="Slide Number Placeholder 6">
+            <a:extLst>
+              <a:ext uri="{FF2B5EF4-FFF2-40B4-BE49-F238E27FC236}">
+                <a16:creationId xmlns:a16="http://schemas.microsoft.com/office/drawing/2014/main" id="{ADB4BF12-25E2-ED7A-6B79-D7DEAD9A2458}"/>
+              </a:ext>
+            </a:extLst>
+          </p:cNvPr>
           <p:cNvSpPr>
             <a:spLocks noGrp="1"/>
           </p:cNvSpPr>
@@ -1277,18 +1462,18 @@
           <a:bodyPr/>
           <a:lstStyle/>
           <a:p>
-            <a:fld id="{F8EBE27D-6BE1-4123-A15D-30EC878A573F}" type="slidenum">
-              <a:rPr lang="en-US" smtClean="0"/>
+            <a:fld id="{B8EAE59F-CC89-4136-872C-DCBA0EEB52F5}" type="slidenum">
+              <a:rPr lang="en-IN" smtClean="0"/>
               <a:t>‹#›</a:t>
             </a:fld>
-            <a:endParaRPr lang="en-US"/>
+            <a:endParaRPr lang="en-IN"/>
           </a:p>
         </p:txBody>
       </p:sp>
     </p:spTree>
     <p:extLst>
       <p:ext uri="{BB962C8B-B14F-4D97-AF65-F5344CB8AC3E}">
-        <p14:creationId xmlns:p14="http://schemas.microsoft.com/office/powerpoint/2010/main" val="4108430967"/>
+        <p14:creationId xmlns:p14="http://schemas.microsoft.com/office/powerpoint/2010/main" val="215496065"/>
       </p:ext>
     </p:extLst>
   </p:cSld>
@@ -1317,7 +1502,13 @@
       </p:grpSpPr>
       <p:sp>
         <p:nvSpPr>
-          <p:cNvPr id="2" name="Title 1"/>
+          <p:cNvPr id="2" name="Title 1">
+            <a:extLst>
+              <a:ext uri="{FF2B5EF4-FFF2-40B4-BE49-F238E27FC236}">
+                <a16:creationId xmlns:a16="http://schemas.microsoft.com/office/drawing/2014/main" id="{DF285D3C-3EE2-12DA-6A94-9CEA037C22C2}"/>
+              </a:ext>
+            </a:extLst>
+          </p:cNvPr>
           <p:cNvSpPr>
             <a:spLocks noGrp="1"/>
           </p:cNvSpPr>
@@ -1336,16 +1527,22 @@
           <a:lstStyle/>
           <a:p>
             <a:r>
-              <a:rPr lang="en-US" smtClean="0"/>
+              <a:rPr lang="en-US"/>
               <a:t>Click to edit Master title style</a:t>
             </a:r>
-            <a:endParaRPr lang="en-US"/>
-          </a:p>
-        </p:txBody>
-      </p:sp>
-      <p:sp>
-        <p:nvSpPr>
-          <p:cNvPr id="3" name="Text Placeholder 2"/>
+            <a:endParaRPr lang="en-IN"/>
+          </a:p>
+        </p:txBody>
+      </p:sp>
+      <p:sp>
+        <p:nvSpPr>
+          <p:cNvPr id="3" name="Text Placeholder 2">
+            <a:extLst>
+              <a:ext uri="{FF2B5EF4-FFF2-40B4-BE49-F238E27FC236}">
+                <a16:creationId xmlns:a16="http://schemas.microsoft.com/office/drawing/2014/main" id="{65342437-BAC3-7E91-D9D6-F02D54F6578B}"/>
+              </a:ext>
+            </a:extLst>
+          </p:cNvPr>
           <p:cNvSpPr>
             <a:spLocks noGrp="1"/>
           </p:cNvSpPr>
@@ -1402,15 +1599,21 @@
           <a:p>
             <a:pPr lvl="0"/>
             <a:r>
-              <a:rPr lang="en-US" smtClean="0"/>
-              <a:t>Edit Master text styles</a:t>
-            </a:r>
-          </a:p>
-        </p:txBody>
-      </p:sp>
-      <p:sp>
-        <p:nvSpPr>
-          <p:cNvPr id="4" name="Content Placeholder 3"/>
+              <a:rPr lang="en-US"/>
+              <a:t>Click to edit Master text styles</a:t>
+            </a:r>
+          </a:p>
+        </p:txBody>
+      </p:sp>
+      <p:sp>
+        <p:nvSpPr>
+          <p:cNvPr id="4" name="Content Placeholder 3">
+            <a:extLst>
+              <a:ext uri="{FF2B5EF4-FFF2-40B4-BE49-F238E27FC236}">
+                <a16:creationId xmlns:a16="http://schemas.microsoft.com/office/drawing/2014/main" id="{A4E74866-A0B9-49A5-62DB-F77EE50C25BC}"/>
+              </a:ext>
+            </a:extLst>
+          </p:cNvPr>
           <p:cNvSpPr>
             <a:spLocks noGrp="1"/>
           </p:cNvSpPr>
@@ -1430,44 +1633,50 @@
           <a:p>
             <a:pPr lvl="0"/>
             <a:r>
-              <a:rPr lang="en-US" smtClean="0"/>
-              <a:t>Edit Master text styles</a:t>
+              <a:rPr lang="en-US"/>
+              <a:t>Click to edit Master text styles</a:t>
             </a:r>
           </a:p>
           <a:p>
             <a:pPr lvl="1"/>
             <a:r>
-              <a:rPr lang="en-US" smtClean="0"/>
+              <a:rPr lang="en-US"/>
               <a:t>Second level</a:t>
             </a:r>
           </a:p>
           <a:p>
             <a:pPr lvl="2"/>
             <a:r>
-              <a:rPr lang="en-US" smtClean="0"/>
+              <a:rPr lang="en-US"/>
               <a:t>Third level</a:t>
             </a:r>
           </a:p>
           <a:p>
             <a:pPr lvl="3"/>
             <a:r>
-              <a:rPr lang="en-US" smtClean="0"/>
+              <a:rPr lang="en-US"/>
               <a:t>Fourth level</a:t>
             </a:r>
           </a:p>
           <a:p>
             <a:pPr lvl="4"/>
             <a:r>
-              <a:rPr lang="en-US" smtClean="0"/>
+              <a:rPr lang="en-US"/>
               <a:t>Fifth level</a:t>
             </a:r>
-            <a:endParaRPr lang="en-US"/>
-          </a:p>
-        </p:txBody>
-      </p:sp>
-      <p:sp>
-        <p:nvSpPr>
-          <p:cNvPr id="5" name="Text Placeholder 4"/>
+            <a:endParaRPr lang="en-IN"/>
+          </a:p>
+        </p:txBody>
+      </p:sp>
+      <p:sp>
+        <p:nvSpPr>
+          <p:cNvPr id="5" name="Text Placeholder 4">
+            <a:extLst>
+              <a:ext uri="{FF2B5EF4-FFF2-40B4-BE49-F238E27FC236}">
+                <a16:creationId xmlns:a16="http://schemas.microsoft.com/office/drawing/2014/main" id="{28D94C41-07E2-5F86-A7A6-4EA2325B5F8B}"/>
+              </a:ext>
+            </a:extLst>
+          </p:cNvPr>
           <p:cNvSpPr>
             <a:spLocks noGrp="1"/>
           </p:cNvSpPr>
@@ -1524,15 +1733,21 @@
           <a:p>
             <a:pPr lvl="0"/>
             <a:r>
-              <a:rPr lang="en-US" smtClean="0"/>
-              <a:t>Edit Master text styles</a:t>
-            </a:r>
-          </a:p>
-        </p:txBody>
-      </p:sp>
-      <p:sp>
-        <p:nvSpPr>
-          <p:cNvPr id="6" name="Content Placeholder 5"/>
+              <a:rPr lang="en-US"/>
+              <a:t>Click to edit Master text styles</a:t>
+            </a:r>
+          </a:p>
+        </p:txBody>
+      </p:sp>
+      <p:sp>
+        <p:nvSpPr>
+          <p:cNvPr id="6" name="Content Placeholder 5">
+            <a:extLst>
+              <a:ext uri="{FF2B5EF4-FFF2-40B4-BE49-F238E27FC236}">
+                <a16:creationId xmlns:a16="http://schemas.microsoft.com/office/drawing/2014/main" id="{62B7345B-A2AF-E200-B13A-CBEA69C3CE2C}"/>
+              </a:ext>
+            </a:extLst>
+          </p:cNvPr>
           <p:cNvSpPr>
             <a:spLocks noGrp="1"/>
           </p:cNvSpPr>
@@ -1552,44 +1767,50 @@
           <a:p>
             <a:pPr lvl="0"/>
             <a:r>
-              <a:rPr lang="en-US" smtClean="0"/>
-              <a:t>Edit Master text styles</a:t>
+              <a:rPr lang="en-US"/>
+              <a:t>Click to edit Master text styles</a:t>
             </a:r>
           </a:p>
           <a:p>
             <a:pPr lvl="1"/>
             <a:r>
-              <a:rPr lang="en-US" smtClean="0"/>
+              <a:rPr lang="en-US"/>
               <a:t>Second level</a:t>
             </a:r>
           </a:p>
           <a:p>
             <a:pPr lvl="2"/>
             <a:r>
-              <a:rPr lang="en-US" smtClean="0"/>
+              <a:rPr lang="en-US"/>
               <a:t>Third level</a:t>
             </a:r>
           </a:p>
           <a:p>
             <a:pPr lvl="3"/>
             <a:r>
-              <a:rPr lang="en-US" smtClean="0"/>
+              <a:rPr lang="en-US"/>
               <a:t>Fourth level</a:t>
             </a:r>
           </a:p>
           <a:p>
             <a:pPr lvl="4"/>
             <a:r>
-              <a:rPr lang="en-US" smtClean="0"/>
+              <a:rPr lang="en-US"/>
               <a:t>Fifth level</a:t>
             </a:r>
-            <a:endParaRPr lang="en-US"/>
-          </a:p>
-        </p:txBody>
-      </p:sp>
-      <p:sp>
-        <p:nvSpPr>
-          <p:cNvPr id="7" name="Date Placeholder 6"/>
+            <a:endParaRPr lang="en-IN"/>
+          </a:p>
+        </p:txBody>
+      </p:sp>
+      <p:sp>
+        <p:nvSpPr>
+          <p:cNvPr id="7" name="Date Placeholder 6">
+            <a:extLst>
+              <a:ext uri="{FF2B5EF4-FFF2-40B4-BE49-F238E27FC236}">
+                <a16:creationId xmlns:a16="http://schemas.microsoft.com/office/drawing/2014/main" id="{DD4C3074-DA8A-01CA-9094-3AF3CC32E9DF}"/>
+              </a:ext>
+            </a:extLst>
+          </p:cNvPr>
           <p:cNvSpPr>
             <a:spLocks noGrp="1"/>
           </p:cNvSpPr>
@@ -1602,17 +1823,23 @@
           <a:bodyPr/>
           <a:lstStyle/>
           <a:p>
-            <a:fld id="{C8619975-09B3-45A9-981B-24156A02B11A}" type="datetimeFigureOut">
-              <a:rPr lang="en-US" smtClean="0"/>
-              <a:t>3/26/2026</a:t>
+            <a:fld id="{E471BDBF-D618-42A7-B9D8-B6E6A6C95C5A}" type="datetimeFigureOut">
+              <a:rPr lang="en-IN" smtClean="0"/>
+              <a:t>26-03-2026</a:t>
             </a:fld>
-            <a:endParaRPr lang="en-US"/>
-          </a:p>
-        </p:txBody>
-      </p:sp>
-      <p:sp>
-        <p:nvSpPr>
-          <p:cNvPr id="8" name="Footer Placeholder 7"/>
+            <a:endParaRPr lang="en-IN"/>
+          </a:p>
+        </p:txBody>
+      </p:sp>
+      <p:sp>
+        <p:nvSpPr>
+          <p:cNvPr id="8" name="Footer Placeholder 7">
+            <a:extLst>
+              <a:ext uri="{FF2B5EF4-FFF2-40B4-BE49-F238E27FC236}">
+                <a16:creationId xmlns:a16="http://schemas.microsoft.com/office/drawing/2014/main" id="{55EBA05F-B126-493F-4AE5-C4987F8C6A17}"/>
+              </a:ext>
+            </a:extLst>
+          </p:cNvPr>
           <p:cNvSpPr>
             <a:spLocks noGrp="1"/>
           </p:cNvSpPr>
@@ -1625,13 +1852,19 @@
           <a:bodyPr/>
           <a:lstStyle/>
           <a:p>
-            <a:endParaRPr lang="en-US"/>
-          </a:p>
-        </p:txBody>
-      </p:sp>
-      <p:sp>
-        <p:nvSpPr>
-          <p:cNvPr id="9" name="Slide Number Placeholder 8"/>
+            <a:endParaRPr lang="en-IN"/>
+          </a:p>
+        </p:txBody>
+      </p:sp>
+      <p:sp>
+        <p:nvSpPr>
+          <p:cNvPr id="9" name="Slide Number Placeholder 8">
+            <a:extLst>
+              <a:ext uri="{FF2B5EF4-FFF2-40B4-BE49-F238E27FC236}">
+                <a16:creationId xmlns:a16="http://schemas.microsoft.com/office/drawing/2014/main" id="{2F7F5D63-E7F9-B3CF-9949-5E156C662B80}"/>
+              </a:ext>
+            </a:extLst>
+          </p:cNvPr>
           <p:cNvSpPr>
             <a:spLocks noGrp="1"/>
           </p:cNvSpPr>
@@ -1644,18 +1877,18 @@
           <a:bodyPr/>
           <a:lstStyle/>
           <a:p>
-            <a:fld id="{F8EBE27D-6BE1-4123-A15D-30EC878A573F}" type="slidenum">
-              <a:rPr lang="en-US" smtClean="0"/>
+            <a:fld id="{B8EAE59F-CC89-4136-872C-DCBA0EEB52F5}" type="slidenum">
+              <a:rPr lang="en-IN" smtClean="0"/>
               <a:t>‹#›</a:t>
             </a:fld>
-            <a:endParaRPr lang="en-US"/>
+            <a:endParaRPr lang="en-IN"/>
           </a:p>
         </p:txBody>
       </p:sp>
     </p:spTree>
     <p:extLst>
       <p:ext uri="{BB962C8B-B14F-4D97-AF65-F5344CB8AC3E}">
-        <p14:creationId xmlns:p14="http://schemas.microsoft.com/office/powerpoint/2010/main" val="770302015"/>
+        <p14:creationId xmlns:p14="http://schemas.microsoft.com/office/powerpoint/2010/main" val="1853618347"/>
       </p:ext>
     </p:extLst>
   </p:cSld>
@@ -1684,7 +1917,13 @@
       </p:grpSpPr>
       <p:sp>
         <p:nvSpPr>
-          <p:cNvPr id="2" name="Title 1"/>
+          <p:cNvPr id="2" name="Title 1">
+            <a:extLst>
+              <a:ext uri="{FF2B5EF4-FFF2-40B4-BE49-F238E27FC236}">
+                <a16:creationId xmlns:a16="http://schemas.microsoft.com/office/drawing/2014/main" id="{2EB76744-6D27-092C-8753-0F4C10456E21}"/>
+              </a:ext>
+            </a:extLst>
+          </p:cNvPr>
           <p:cNvSpPr>
             <a:spLocks noGrp="1"/>
           </p:cNvSpPr>
@@ -1698,16 +1937,22 @@
           <a:lstStyle/>
           <a:p>
             <a:r>
-              <a:rPr lang="en-US" smtClean="0"/>
+              <a:rPr lang="en-US"/>
               <a:t>Click to edit Master title style</a:t>
             </a:r>
-            <a:endParaRPr lang="en-US"/>
-          </a:p>
-        </p:txBody>
-      </p:sp>
-      <p:sp>
-        <p:nvSpPr>
-          <p:cNvPr id="3" name="Date Placeholder 2"/>
+            <a:endParaRPr lang="en-IN"/>
+          </a:p>
+        </p:txBody>
+      </p:sp>
+      <p:sp>
+        <p:nvSpPr>
+          <p:cNvPr id="3" name="Date Placeholder 2">
+            <a:extLst>
+              <a:ext uri="{FF2B5EF4-FFF2-40B4-BE49-F238E27FC236}">
+                <a16:creationId xmlns:a16="http://schemas.microsoft.com/office/drawing/2014/main" id="{50C60CF3-C455-8F50-AB42-AE636ED5FC00}"/>
+              </a:ext>
+            </a:extLst>
+          </p:cNvPr>
           <p:cNvSpPr>
             <a:spLocks noGrp="1"/>
           </p:cNvSpPr>
@@ -1720,17 +1965,23 @@
           <a:bodyPr/>
           <a:lstStyle/>
           <a:p>
-            <a:fld id="{C8619975-09B3-45A9-981B-24156A02B11A}" type="datetimeFigureOut">
-              <a:rPr lang="en-US" smtClean="0"/>
-              <a:t>3/26/2026</a:t>
+            <a:fld id="{E471BDBF-D618-42A7-B9D8-B6E6A6C95C5A}" type="datetimeFigureOut">
+              <a:rPr lang="en-IN" smtClean="0"/>
+              <a:t>26-03-2026</a:t>
             </a:fld>
-            <a:endParaRPr lang="en-US"/>
-          </a:p>
-        </p:txBody>
-      </p:sp>
-      <p:sp>
-        <p:nvSpPr>
-          <p:cNvPr id="4" name="Footer Placeholder 3"/>
+            <a:endParaRPr lang="en-IN"/>
+          </a:p>
+        </p:txBody>
+      </p:sp>
+      <p:sp>
+        <p:nvSpPr>
+          <p:cNvPr id="4" name="Footer Placeholder 3">
+            <a:extLst>
+              <a:ext uri="{FF2B5EF4-FFF2-40B4-BE49-F238E27FC236}">
+                <a16:creationId xmlns:a16="http://schemas.microsoft.com/office/drawing/2014/main" id="{09077850-44DD-6460-1EEB-C5FC0F48768F}"/>
+              </a:ext>
+            </a:extLst>
+          </p:cNvPr>
           <p:cNvSpPr>
             <a:spLocks noGrp="1"/>
           </p:cNvSpPr>
@@ -1743,13 +1994,19 @@
           <a:bodyPr/>
           <a:lstStyle/>
           <a:p>
-            <a:endParaRPr lang="en-US"/>
-          </a:p>
-        </p:txBody>
-      </p:sp>
-      <p:sp>
-        <p:nvSpPr>
-          <p:cNvPr id="5" name="Slide Number Placeholder 4"/>
+            <a:endParaRPr lang="en-IN"/>
+          </a:p>
+        </p:txBody>
+      </p:sp>
+      <p:sp>
+        <p:nvSpPr>
+          <p:cNvPr id="5" name="Slide Number Placeholder 4">
+            <a:extLst>
+              <a:ext uri="{FF2B5EF4-FFF2-40B4-BE49-F238E27FC236}">
+                <a16:creationId xmlns:a16="http://schemas.microsoft.com/office/drawing/2014/main" id="{AA49F0AF-0524-763D-31A4-A6EE7CEC85F0}"/>
+              </a:ext>
+            </a:extLst>
+          </p:cNvPr>
           <p:cNvSpPr>
             <a:spLocks noGrp="1"/>
           </p:cNvSpPr>
@@ -1762,18 +2019,18 @@
           <a:bodyPr/>
           <a:lstStyle/>
           <a:p>
-            <a:fld id="{F8EBE27D-6BE1-4123-A15D-30EC878A573F}" type="slidenum">
-              <a:rPr lang="en-US" smtClean="0"/>
+            <a:fld id="{B8EAE59F-CC89-4136-872C-DCBA0EEB52F5}" type="slidenum">
+              <a:rPr lang="en-IN" smtClean="0"/>
               <a:t>‹#›</a:t>
             </a:fld>
-            <a:endParaRPr lang="en-US"/>
+            <a:endParaRPr lang="en-IN"/>
           </a:p>
         </p:txBody>
       </p:sp>
     </p:spTree>
     <p:extLst>
       <p:ext uri="{BB962C8B-B14F-4D97-AF65-F5344CB8AC3E}">
-        <p14:creationId xmlns:p14="http://schemas.microsoft.com/office/powerpoint/2010/main" val="2260709"/>
+        <p14:creationId xmlns:p14="http://schemas.microsoft.com/office/powerpoint/2010/main" val="29177909"/>
       </p:ext>
     </p:extLst>
   </p:cSld>
@@ -1802,7 +2059,13 @@
       </p:grpSpPr>
       <p:sp>
         <p:nvSpPr>
-          <p:cNvPr id="2" name="Date Placeholder 1"/>
+          <p:cNvPr id="2" name="Date Placeholder 1">
+            <a:extLst>
+              <a:ext uri="{FF2B5EF4-FFF2-40B4-BE49-F238E27FC236}">
+                <a16:creationId xmlns:a16="http://schemas.microsoft.com/office/drawing/2014/main" id="{A2B6B6EC-AD41-40CA-A702-5ACC13BB6D1D}"/>
+              </a:ext>
+            </a:extLst>
+          </p:cNvPr>
           <p:cNvSpPr>
             <a:spLocks noGrp="1"/>
           </p:cNvSpPr>
@@ -1815,17 +2078,23 @@
           <a:bodyPr/>
           <a:lstStyle/>
           <a:p>
-            <a:fld id="{C8619975-09B3-45A9-981B-24156A02B11A}" type="datetimeFigureOut">
-              <a:rPr lang="en-US" smtClean="0"/>
-              <a:t>3/26/2026</a:t>
+            <a:fld id="{E471BDBF-D618-42A7-B9D8-B6E6A6C95C5A}" type="datetimeFigureOut">
+              <a:rPr lang="en-IN" smtClean="0"/>
+              <a:t>26-03-2026</a:t>
             </a:fld>
-            <a:endParaRPr lang="en-US"/>
-          </a:p>
-        </p:txBody>
-      </p:sp>
-      <p:sp>
-        <p:nvSpPr>
-          <p:cNvPr id="3" name="Footer Placeholder 2"/>
+            <a:endParaRPr lang="en-IN"/>
+          </a:p>
+        </p:txBody>
+      </p:sp>
+      <p:sp>
+        <p:nvSpPr>
+          <p:cNvPr id="3" name="Footer Placeholder 2">
+            <a:extLst>
+              <a:ext uri="{FF2B5EF4-FFF2-40B4-BE49-F238E27FC236}">
+                <a16:creationId xmlns:a16="http://schemas.microsoft.com/office/drawing/2014/main" id="{AA0E4CFC-E20B-9D8C-2D7D-578004D863B2}"/>
+              </a:ext>
+            </a:extLst>
+          </p:cNvPr>
           <p:cNvSpPr>
             <a:spLocks noGrp="1"/>
           </p:cNvSpPr>
@@ -1838,13 +2107,19 @@
           <a:bodyPr/>
           <a:lstStyle/>
           <a:p>
-            <a:endParaRPr lang="en-US"/>
-          </a:p>
-        </p:txBody>
-      </p:sp>
-      <p:sp>
-        <p:nvSpPr>
-          <p:cNvPr id="4" name="Slide Number Placeholder 3"/>
+            <a:endParaRPr lang="en-IN"/>
+          </a:p>
+        </p:txBody>
+      </p:sp>
+      <p:sp>
+        <p:nvSpPr>
+          <p:cNvPr id="4" name="Slide Number Placeholder 3">
+            <a:extLst>
+              <a:ext uri="{FF2B5EF4-FFF2-40B4-BE49-F238E27FC236}">
+                <a16:creationId xmlns:a16="http://schemas.microsoft.com/office/drawing/2014/main" id="{DFE8398D-DD33-5E29-6776-67724C240BF2}"/>
+              </a:ext>
+            </a:extLst>
+          </p:cNvPr>
           <p:cNvSpPr>
             <a:spLocks noGrp="1"/>
           </p:cNvSpPr>
@@ -1857,18 +2132,18 @@
           <a:bodyPr/>
           <a:lstStyle/>
           <a:p>
-            <a:fld id="{F8EBE27D-6BE1-4123-A15D-30EC878A573F}" type="slidenum">
-              <a:rPr lang="en-US" smtClean="0"/>
+            <a:fld id="{B8EAE59F-CC89-4136-872C-DCBA0EEB52F5}" type="slidenum">
+              <a:rPr lang="en-IN" smtClean="0"/>
               <a:t>‹#›</a:t>
             </a:fld>
-            <a:endParaRPr lang="en-US"/>
+            <a:endParaRPr lang="en-IN"/>
           </a:p>
         </p:txBody>
       </p:sp>
     </p:spTree>
     <p:extLst>
       <p:ext uri="{BB962C8B-B14F-4D97-AF65-F5344CB8AC3E}">
-        <p14:creationId xmlns:p14="http://schemas.microsoft.com/office/powerpoint/2010/main" val="173712499"/>
+        <p14:creationId xmlns:p14="http://schemas.microsoft.com/office/powerpoint/2010/main" val="1892577295"/>
       </p:ext>
     </p:extLst>
   </p:cSld>
@@ -1897,7 +2172,13 @@
       </p:grpSpPr>
       <p:sp>
         <p:nvSpPr>
-          <p:cNvPr id="2" name="Title 1"/>
+          <p:cNvPr id="2" name="Title 1">
+            <a:extLst>
+              <a:ext uri="{FF2B5EF4-FFF2-40B4-BE49-F238E27FC236}">
+                <a16:creationId xmlns:a16="http://schemas.microsoft.com/office/drawing/2014/main" id="{EF683DC2-8D50-F1A2-A8AB-B5D698B89271}"/>
+              </a:ext>
+            </a:extLst>
+          </p:cNvPr>
           <p:cNvSpPr>
             <a:spLocks noGrp="1"/>
           </p:cNvSpPr>
@@ -1920,16 +2201,22 @@
           </a:lstStyle>
           <a:p>
             <a:r>
-              <a:rPr lang="en-US" smtClean="0"/>
+              <a:rPr lang="en-US"/>
               <a:t>Click to edit Master title style</a:t>
             </a:r>
-            <a:endParaRPr lang="en-US"/>
-          </a:p>
-        </p:txBody>
-      </p:sp>
-      <p:sp>
-        <p:nvSpPr>
-          <p:cNvPr id="3" name="Content Placeholder 2"/>
+            <a:endParaRPr lang="en-IN"/>
+          </a:p>
+        </p:txBody>
+      </p:sp>
+      <p:sp>
+        <p:nvSpPr>
+          <p:cNvPr id="3" name="Content Placeholder 2">
+            <a:extLst>
+              <a:ext uri="{FF2B5EF4-FFF2-40B4-BE49-F238E27FC236}">
+                <a16:creationId xmlns:a16="http://schemas.microsoft.com/office/drawing/2014/main" id="{6A94D157-A066-6559-9253-FDBEBC1016D7}"/>
+              </a:ext>
+            </a:extLst>
+          </p:cNvPr>
           <p:cNvSpPr>
             <a:spLocks noGrp="1"/>
           </p:cNvSpPr>
@@ -1977,44 +2264,50 @@
           <a:p>
             <a:pPr lvl="0"/>
             <a:r>
-              <a:rPr lang="en-US" smtClean="0"/>
-              <a:t>Edit Master text styles</a:t>
+              <a:rPr lang="en-US"/>
+              <a:t>Click to edit Master text styles</a:t>
             </a:r>
           </a:p>
           <a:p>
             <a:pPr lvl="1"/>
             <a:r>
-              <a:rPr lang="en-US" smtClean="0"/>
+              <a:rPr lang="en-US"/>
               <a:t>Second level</a:t>
             </a:r>
           </a:p>
           <a:p>
             <a:pPr lvl="2"/>
             <a:r>
-              <a:rPr lang="en-US" smtClean="0"/>
+              <a:rPr lang="en-US"/>
               <a:t>Third level</a:t>
             </a:r>
           </a:p>
           <a:p>
             <a:pPr lvl="3"/>
             <a:r>
-              <a:rPr lang="en-US" smtClean="0"/>
+              <a:rPr lang="en-US"/>
               <a:t>Fourth level</a:t>
             </a:r>
           </a:p>
           <a:p>
             <a:pPr lvl="4"/>
             <a:r>
-              <a:rPr lang="en-US" smtClean="0"/>
+              <a:rPr lang="en-US"/>
               <a:t>Fifth level</a:t>
             </a:r>
-            <a:endParaRPr lang="en-US"/>
-          </a:p>
-        </p:txBody>
-      </p:sp>
-      <p:sp>
-        <p:nvSpPr>
-          <p:cNvPr id="4" name="Text Placeholder 3"/>
+            <a:endParaRPr lang="en-IN"/>
+          </a:p>
+        </p:txBody>
+      </p:sp>
+      <p:sp>
+        <p:nvSpPr>
+          <p:cNvPr id="4" name="Text Placeholder 3">
+            <a:extLst>
+              <a:ext uri="{FF2B5EF4-FFF2-40B4-BE49-F238E27FC236}">
+                <a16:creationId xmlns:a16="http://schemas.microsoft.com/office/drawing/2014/main" id="{8EF6F78C-BEF6-8C7A-878C-2AA9CC2635BE}"/>
+              </a:ext>
+            </a:extLst>
+          </p:cNvPr>
           <p:cNvSpPr>
             <a:spLocks noGrp="1"/>
           </p:cNvSpPr>
@@ -2071,15 +2364,21 @@
           <a:p>
             <a:pPr lvl="0"/>
             <a:r>
-              <a:rPr lang="en-US" smtClean="0"/>
-              <a:t>Edit Master text styles</a:t>
-            </a:r>
-          </a:p>
-        </p:txBody>
-      </p:sp>
-      <p:sp>
-        <p:nvSpPr>
-          <p:cNvPr id="5" name="Date Placeholder 4"/>
+              <a:rPr lang="en-US"/>
+              <a:t>Click to edit Master text styles</a:t>
+            </a:r>
+          </a:p>
+        </p:txBody>
+      </p:sp>
+      <p:sp>
+        <p:nvSpPr>
+          <p:cNvPr id="5" name="Date Placeholder 4">
+            <a:extLst>
+              <a:ext uri="{FF2B5EF4-FFF2-40B4-BE49-F238E27FC236}">
+                <a16:creationId xmlns:a16="http://schemas.microsoft.com/office/drawing/2014/main" id="{F76FF910-B684-A145-6838-A1EF9C138D80}"/>
+              </a:ext>
+            </a:extLst>
+          </p:cNvPr>
           <p:cNvSpPr>
             <a:spLocks noGrp="1"/>
           </p:cNvSpPr>
@@ -2092,17 +2391,23 @@
           <a:bodyPr/>
           <a:lstStyle/>
           <a:p>
-            <a:fld id="{C8619975-09B3-45A9-981B-24156A02B11A}" type="datetimeFigureOut">
-              <a:rPr lang="en-US" smtClean="0"/>
-              <a:t>3/26/2026</a:t>
+            <a:fld id="{E471BDBF-D618-42A7-B9D8-B6E6A6C95C5A}" type="datetimeFigureOut">
+              <a:rPr lang="en-IN" smtClean="0"/>
+              <a:t>26-03-2026</a:t>
             </a:fld>
-            <a:endParaRPr lang="en-US"/>
-          </a:p>
-        </p:txBody>
-      </p:sp>
-      <p:sp>
-        <p:nvSpPr>
-          <p:cNvPr id="6" name="Footer Placeholder 5"/>
+            <a:endParaRPr lang="en-IN"/>
+          </a:p>
+        </p:txBody>
+      </p:sp>
+      <p:sp>
+        <p:nvSpPr>
+          <p:cNvPr id="6" name="Footer Placeholder 5">
+            <a:extLst>
+              <a:ext uri="{FF2B5EF4-FFF2-40B4-BE49-F238E27FC236}">
+                <a16:creationId xmlns:a16="http://schemas.microsoft.com/office/drawing/2014/main" id="{FFF51B16-65CF-E8A2-1C28-E30981308CF1}"/>
+              </a:ext>
+            </a:extLst>
+          </p:cNvPr>
           <p:cNvSpPr>
             <a:spLocks noGrp="1"/>
           </p:cNvSpPr>
@@ -2115,13 +2420,19 @@
           <a:bodyPr/>
           <a:lstStyle/>
           <a:p>
-            <a:endParaRPr lang="en-US"/>
-          </a:p>
-        </p:txBody>
-      </p:sp>
-      <p:sp>
-        <p:nvSpPr>
-          <p:cNvPr id="7" name="Slide Number Placeholder 6"/>
+            <a:endParaRPr lang="en-IN"/>
+          </a:p>
+        </p:txBody>
+      </p:sp>
+      <p:sp>
+        <p:nvSpPr>
+          <p:cNvPr id="7" name="Slide Number Placeholder 6">
+            <a:extLst>
+              <a:ext uri="{FF2B5EF4-FFF2-40B4-BE49-F238E27FC236}">
+                <a16:creationId xmlns:a16="http://schemas.microsoft.com/office/drawing/2014/main" id="{006A8045-4A64-BAF6-DBD4-5DB34016132E}"/>
+              </a:ext>
+            </a:extLst>
+          </p:cNvPr>
           <p:cNvSpPr>
             <a:spLocks noGrp="1"/>
           </p:cNvSpPr>
@@ -2134,18 +2445,18 @@
           <a:bodyPr/>
           <a:lstStyle/>
           <a:p>
-            <a:fld id="{F8EBE27D-6BE1-4123-A15D-30EC878A573F}" type="slidenum">
-              <a:rPr lang="en-US" smtClean="0"/>
+            <a:fld id="{B8EAE59F-CC89-4136-872C-DCBA0EEB52F5}" type="slidenum">
+              <a:rPr lang="en-IN" smtClean="0"/>
               <a:t>‹#›</a:t>
             </a:fld>
-            <a:endParaRPr lang="en-US"/>
+            <a:endParaRPr lang="en-IN"/>
           </a:p>
         </p:txBody>
       </p:sp>
     </p:spTree>
     <p:extLst>
       <p:ext uri="{BB962C8B-B14F-4D97-AF65-F5344CB8AC3E}">
-        <p14:creationId xmlns:p14="http://schemas.microsoft.com/office/powerpoint/2010/main" val="348877746"/>
+        <p14:creationId xmlns:p14="http://schemas.microsoft.com/office/powerpoint/2010/main" val="1858079475"/>
       </p:ext>
     </p:extLst>
   </p:cSld>
@@ -2174,7 +2485,13 @@
       </p:grpSpPr>
       <p:sp>
         <p:nvSpPr>
-          <p:cNvPr id="2" name="Title 1"/>
+          <p:cNvPr id="2" name="Title 1">
+            <a:extLst>
+              <a:ext uri="{FF2B5EF4-FFF2-40B4-BE49-F238E27FC236}">
+                <a16:creationId xmlns:a16="http://schemas.microsoft.com/office/drawing/2014/main" id="{5FCE24F6-1F93-BC6D-22A8-8FDA40E23F95}"/>
+              </a:ext>
+            </a:extLst>
+          </p:cNvPr>
           <p:cNvSpPr>
             <a:spLocks noGrp="1"/>
           </p:cNvSpPr>
@@ -2197,16 +2514,22 @@
           </a:lstStyle>
           <a:p>
             <a:r>
-              <a:rPr lang="en-US" smtClean="0"/>
+              <a:rPr lang="en-US"/>
               <a:t>Click to edit Master title style</a:t>
             </a:r>
-            <a:endParaRPr lang="en-US"/>
-          </a:p>
-        </p:txBody>
-      </p:sp>
-      <p:sp>
-        <p:nvSpPr>
-          <p:cNvPr id="3" name="Picture Placeholder 2"/>
+            <a:endParaRPr lang="en-IN"/>
+          </a:p>
+        </p:txBody>
+      </p:sp>
+      <p:sp>
+        <p:nvSpPr>
+          <p:cNvPr id="3" name="Picture Placeholder 2">
+            <a:extLst>
+              <a:ext uri="{FF2B5EF4-FFF2-40B4-BE49-F238E27FC236}">
+                <a16:creationId xmlns:a16="http://schemas.microsoft.com/office/drawing/2014/main" id="{A8DAD4DA-E3B3-1FBB-E76F-9A4BEDC5A609}"/>
+              </a:ext>
+            </a:extLst>
+          </p:cNvPr>
           <p:cNvSpPr>
             <a:spLocks noGrp="1"/>
           </p:cNvSpPr>
@@ -2261,13 +2584,19 @@
             </a:lvl9pPr>
           </a:lstStyle>
           <a:p>
-            <a:endParaRPr lang="en-US"/>
-          </a:p>
-        </p:txBody>
-      </p:sp>
-      <p:sp>
-        <p:nvSpPr>
-          <p:cNvPr id="4" name="Text Placeholder 3"/>
+            <a:endParaRPr lang="en-IN"/>
+          </a:p>
+        </p:txBody>
+      </p:sp>
+      <p:sp>
+        <p:nvSpPr>
+          <p:cNvPr id="4" name="Text Placeholder 3">
+            <a:extLst>
+              <a:ext uri="{FF2B5EF4-FFF2-40B4-BE49-F238E27FC236}">
+                <a16:creationId xmlns:a16="http://schemas.microsoft.com/office/drawing/2014/main" id="{AC3E698C-BA30-5024-B008-FF7493BDC46A}"/>
+              </a:ext>
+            </a:extLst>
+          </p:cNvPr>
           <p:cNvSpPr>
             <a:spLocks noGrp="1"/>
           </p:cNvSpPr>
@@ -2324,15 +2653,21 @@
           <a:p>
             <a:pPr lvl="0"/>
             <a:r>
-              <a:rPr lang="en-US" smtClean="0"/>
-              <a:t>Edit Master text styles</a:t>
-            </a:r>
-          </a:p>
-        </p:txBody>
-      </p:sp>
-      <p:sp>
-        <p:nvSpPr>
-          <p:cNvPr id="5" name="Date Placeholder 4"/>
+              <a:rPr lang="en-US"/>
+              <a:t>Click to edit Master text styles</a:t>
+            </a:r>
+          </a:p>
+        </p:txBody>
+      </p:sp>
+      <p:sp>
+        <p:nvSpPr>
+          <p:cNvPr id="5" name="Date Placeholder 4">
+            <a:extLst>
+              <a:ext uri="{FF2B5EF4-FFF2-40B4-BE49-F238E27FC236}">
+                <a16:creationId xmlns:a16="http://schemas.microsoft.com/office/drawing/2014/main" id="{7382D247-D68F-9750-D587-1A4545CCF107}"/>
+              </a:ext>
+            </a:extLst>
+          </p:cNvPr>
           <p:cNvSpPr>
             <a:spLocks noGrp="1"/>
           </p:cNvSpPr>
@@ -2345,17 +2680,23 @@
           <a:bodyPr/>
           <a:lstStyle/>
           <a:p>
-            <a:fld id="{C8619975-09B3-45A9-981B-24156A02B11A}" type="datetimeFigureOut">
-              <a:rPr lang="en-US" smtClean="0"/>
-              <a:t>3/26/2026</a:t>
+            <a:fld id="{E471BDBF-D618-42A7-B9D8-B6E6A6C95C5A}" type="datetimeFigureOut">
+              <a:rPr lang="en-IN" smtClean="0"/>
+              <a:t>26-03-2026</a:t>
             </a:fld>
-            <a:endParaRPr lang="en-US"/>
-          </a:p>
-        </p:txBody>
-      </p:sp>
-      <p:sp>
-        <p:nvSpPr>
-          <p:cNvPr id="6" name="Footer Placeholder 5"/>
+            <a:endParaRPr lang="en-IN"/>
+          </a:p>
+        </p:txBody>
+      </p:sp>
+      <p:sp>
+        <p:nvSpPr>
+          <p:cNvPr id="6" name="Footer Placeholder 5">
+            <a:extLst>
+              <a:ext uri="{FF2B5EF4-FFF2-40B4-BE49-F238E27FC236}">
+                <a16:creationId xmlns:a16="http://schemas.microsoft.com/office/drawing/2014/main" id="{798F805B-17AB-BB45-B444-2B2CEA47930A}"/>
+              </a:ext>
+            </a:extLst>
+          </p:cNvPr>
           <p:cNvSpPr>
             <a:spLocks noGrp="1"/>
           </p:cNvSpPr>
@@ -2368,13 +2709,19 @@
           <a:bodyPr/>
           <a:lstStyle/>
           <a:p>
-            <a:endParaRPr lang="en-US"/>
-          </a:p>
-        </p:txBody>
-      </p:sp>
-      <p:sp>
-        <p:nvSpPr>
-          <p:cNvPr id="7" name="Slide Number Placeholder 6"/>
+            <a:endParaRPr lang="en-IN"/>
+          </a:p>
+        </p:txBody>
+      </p:sp>
+      <p:sp>
+        <p:nvSpPr>
+          <p:cNvPr id="7" name="Slide Number Placeholder 6">
+            <a:extLst>
+              <a:ext uri="{FF2B5EF4-FFF2-40B4-BE49-F238E27FC236}">
+                <a16:creationId xmlns:a16="http://schemas.microsoft.com/office/drawing/2014/main" id="{0F27A691-5B6E-FFDD-F397-F7EAD8A91DCB}"/>
+              </a:ext>
+            </a:extLst>
+          </p:cNvPr>
           <p:cNvSpPr>
             <a:spLocks noGrp="1"/>
           </p:cNvSpPr>
@@ -2387,18 +2734,18 @@
           <a:bodyPr/>
           <a:lstStyle/>
           <a:p>
-            <a:fld id="{F8EBE27D-6BE1-4123-A15D-30EC878A573F}" type="slidenum">
-              <a:rPr lang="en-US" smtClean="0"/>
+            <a:fld id="{B8EAE59F-CC89-4136-872C-DCBA0EEB52F5}" type="slidenum">
+              <a:rPr lang="en-IN" smtClean="0"/>
               <a:t>‹#›</a:t>
             </a:fld>
-            <a:endParaRPr lang="en-US"/>
+            <a:endParaRPr lang="en-IN"/>
           </a:p>
         </p:txBody>
       </p:sp>
     </p:spTree>
     <p:extLst>
       <p:ext uri="{BB962C8B-B14F-4D97-AF65-F5344CB8AC3E}">
-        <p14:creationId xmlns:p14="http://schemas.microsoft.com/office/powerpoint/2010/main" val="2802308386"/>
+        <p14:creationId xmlns:p14="http://schemas.microsoft.com/office/powerpoint/2010/main" val="2090622244"/>
       </p:ext>
     </p:extLst>
   </p:cSld>
@@ -2432,7 +2779,13 @@
       </p:grpSpPr>
       <p:sp>
         <p:nvSpPr>
-          <p:cNvPr id="2" name="Title Placeholder 1"/>
+          <p:cNvPr id="2" name="Title Placeholder 1">
+            <a:extLst>
+              <a:ext uri="{FF2B5EF4-FFF2-40B4-BE49-F238E27FC236}">
+                <a16:creationId xmlns:a16="http://schemas.microsoft.com/office/drawing/2014/main" id="{04525D1C-CC34-6AE5-680C-81E07FCB215E}"/>
+              </a:ext>
+            </a:extLst>
+          </p:cNvPr>
           <p:cNvSpPr>
             <a:spLocks noGrp="1"/>
           </p:cNvSpPr>
@@ -2456,16 +2809,22 @@
           <a:lstStyle/>
           <a:p>
             <a:r>
-              <a:rPr lang="en-US" smtClean="0"/>
+              <a:rPr lang="en-US"/>
               <a:t>Click to edit Master title style</a:t>
             </a:r>
-            <a:endParaRPr lang="en-US"/>
-          </a:p>
-        </p:txBody>
-      </p:sp>
-      <p:sp>
-        <p:nvSpPr>
-          <p:cNvPr id="3" name="Text Placeholder 2"/>
+            <a:endParaRPr lang="en-IN"/>
+          </a:p>
+        </p:txBody>
+      </p:sp>
+      <p:sp>
+        <p:nvSpPr>
+          <p:cNvPr id="3" name="Text Placeholder 2">
+            <a:extLst>
+              <a:ext uri="{FF2B5EF4-FFF2-40B4-BE49-F238E27FC236}">
+                <a16:creationId xmlns:a16="http://schemas.microsoft.com/office/drawing/2014/main" id="{5C329796-E377-CAB3-5B44-24EC257D7194}"/>
+              </a:ext>
+            </a:extLst>
+          </p:cNvPr>
           <p:cNvSpPr>
             <a:spLocks noGrp="1"/>
           </p:cNvSpPr>
@@ -2490,44 +2849,50 @@
           <a:p>
             <a:pPr lvl="0"/>
             <a:r>
-              <a:rPr lang="en-US" smtClean="0"/>
-              <a:t>Edit Master text styles</a:t>
+              <a:rPr lang="en-US"/>
+              <a:t>Click to edit Master text styles</a:t>
             </a:r>
           </a:p>
           <a:p>
             <a:pPr lvl="1"/>
             <a:r>
-              <a:rPr lang="en-US" smtClean="0"/>
+              <a:rPr lang="en-US"/>
               <a:t>Second level</a:t>
             </a:r>
           </a:p>
           <a:p>
             <a:pPr lvl="2"/>
             <a:r>
-              <a:rPr lang="en-US" smtClean="0"/>
+              <a:rPr lang="en-US"/>
               <a:t>Third level</a:t>
             </a:r>
           </a:p>
           <a:p>
             <a:pPr lvl="3"/>
             <a:r>
-              <a:rPr lang="en-US" smtClean="0"/>
+              <a:rPr lang="en-US"/>
               <a:t>Fourth level</a:t>
             </a:r>
           </a:p>
           <a:p>
             <a:pPr lvl="4"/>
             <a:r>
-              <a:rPr lang="en-US" smtClean="0"/>
+              <a:rPr lang="en-US"/>
               <a:t>Fifth level</a:t>
             </a:r>
-            <a:endParaRPr lang="en-US"/>
-          </a:p>
-        </p:txBody>
-      </p:sp>
-      <p:sp>
-        <p:nvSpPr>
-          <p:cNvPr id="4" name="Date Placeholder 3"/>
+            <a:endParaRPr lang="en-IN"/>
+          </a:p>
+        </p:txBody>
+      </p:sp>
+      <p:sp>
+        <p:nvSpPr>
+          <p:cNvPr id="4" name="Date Placeholder 3">
+            <a:extLst>
+              <a:ext uri="{FF2B5EF4-FFF2-40B4-BE49-F238E27FC236}">
+                <a16:creationId xmlns:a16="http://schemas.microsoft.com/office/drawing/2014/main" id="{377401F3-4CCF-97EB-1B4F-FDF954175F1B}"/>
+              </a:ext>
+            </a:extLst>
+          </p:cNvPr>
           <p:cNvSpPr>
             <a:spLocks noGrp="1"/>
           </p:cNvSpPr>
@@ -2551,24 +2916,30 @@
               <a:defRPr sz="1200">
                 <a:solidFill>
                   <a:schemeClr val="tx1">
-                    <a:tint val="75000"/>
+                    <a:tint val="82000"/>
                   </a:schemeClr>
                 </a:solidFill>
               </a:defRPr>
             </a:lvl1pPr>
           </a:lstStyle>
           <a:p>
-            <a:fld id="{C8619975-09B3-45A9-981B-24156A02B11A}" type="datetimeFigureOut">
-              <a:rPr lang="en-US" smtClean="0"/>
-              <a:t>3/26/2026</a:t>
+            <a:fld id="{E471BDBF-D618-42A7-B9D8-B6E6A6C95C5A}" type="datetimeFigureOut">
+              <a:rPr lang="en-IN" smtClean="0"/>
+              <a:t>26-03-2026</a:t>
             </a:fld>
-            <a:endParaRPr lang="en-US"/>
-          </a:p>
-        </p:txBody>
-      </p:sp>
-      <p:sp>
-        <p:nvSpPr>
-          <p:cNvPr id="5" name="Footer Placeholder 4"/>
+            <a:endParaRPr lang="en-IN"/>
+          </a:p>
+        </p:txBody>
+      </p:sp>
+      <p:sp>
+        <p:nvSpPr>
+          <p:cNvPr id="5" name="Footer Placeholder 4">
+            <a:extLst>
+              <a:ext uri="{FF2B5EF4-FFF2-40B4-BE49-F238E27FC236}">
+                <a16:creationId xmlns:a16="http://schemas.microsoft.com/office/drawing/2014/main" id="{9478DF53-0935-6528-A47C-DF085C23F59A}"/>
+              </a:ext>
+            </a:extLst>
+          </p:cNvPr>
           <p:cNvSpPr>
             <a:spLocks noGrp="1"/>
           </p:cNvSpPr>
@@ -2592,20 +2963,26 @@
               <a:defRPr sz="1200">
                 <a:solidFill>
                   <a:schemeClr val="tx1">
-                    <a:tint val="75000"/>
+                    <a:tint val="82000"/>
                   </a:schemeClr>
                 </a:solidFill>
               </a:defRPr>
             </a:lvl1pPr>
           </a:lstStyle>
           <a:p>
-            <a:endParaRPr lang="en-US"/>
-          </a:p>
-        </p:txBody>
-      </p:sp>
-      <p:sp>
-        <p:nvSpPr>
-          <p:cNvPr id="6" name="Slide Number Placeholder 5"/>
+            <a:endParaRPr lang="en-IN"/>
+          </a:p>
+        </p:txBody>
+      </p:sp>
+      <p:sp>
+        <p:nvSpPr>
+          <p:cNvPr id="6" name="Slide Number Placeholder 5">
+            <a:extLst>
+              <a:ext uri="{FF2B5EF4-FFF2-40B4-BE49-F238E27FC236}">
+                <a16:creationId xmlns:a16="http://schemas.microsoft.com/office/drawing/2014/main" id="{F83CDCC5-7F7B-DB26-366E-96F3F9171304}"/>
+              </a:ext>
+            </a:extLst>
+          </p:cNvPr>
           <p:cNvSpPr>
             <a:spLocks noGrp="1"/>
           </p:cNvSpPr>
@@ -2629,25 +3006,25 @@
               <a:defRPr sz="1200">
                 <a:solidFill>
                   <a:schemeClr val="tx1">
-                    <a:tint val="75000"/>
+                    <a:tint val="82000"/>
                   </a:schemeClr>
                 </a:solidFill>
               </a:defRPr>
             </a:lvl1pPr>
           </a:lstStyle>
           <a:p>
-            <a:fld id="{F8EBE27D-6BE1-4123-A15D-30EC878A573F}" type="slidenum">
-              <a:rPr lang="en-US" smtClean="0"/>
+            <a:fld id="{B8EAE59F-CC89-4136-872C-DCBA0EEB52F5}" type="slidenum">
+              <a:rPr lang="en-IN" smtClean="0"/>
               <a:t>‹#›</a:t>
             </a:fld>
-            <a:endParaRPr lang="en-US"/>
+            <a:endParaRPr lang="en-IN"/>
           </a:p>
         </p:txBody>
       </p:sp>
     </p:spTree>
     <p:extLst>
       <p:ext uri="{BB962C8B-B14F-4D97-AF65-F5344CB8AC3E}">
-        <p14:creationId xmlns:p14="http://schemas.microsoft.com/office/powerpoint/2010/main" val="1088947322"/>
+        <p14:creationId xmlns:p14="http://schemas.microsoft.com/office/powerpoint/2010/main" val="178466310"/>
       </p:ext>
     </p:extLst>
   </p:cSld>
@@ -2965,35 +3342,15 @@
           <a:chExt cx="0" cy="0"/>
         </a:xfrm>
       </p:grpSpPr>
-      <p:sp>
-        <p:nvSpPr>
-          <p:cNvPr id="3" name="Subtitle 2"/>
-          <p:cNvSpPr>
-            <a:spLocks noGrp="1"/>
-          </p:cNvSpPr>
-          <p:nvPr>
-            <p:ph type="subTitle" idx="1"/>
-          </p:nvPr>
-        </p:nvSpPr>
-        <p:spPr>
-          <a:xfrm>
-            <a:off x="1524000" y="5110480"/>
-            <a:ext cx="9144000" cy="147320"/>
-          </a:xfrm>
-        </p:spPr>
-        <p:txBody>
-          <a:bodyPr>
-            <a:normAutofit fontScale="25000" lnSpcReduction="20000"/>
-          </a:bodyPr>
-          <a:lstStyle/>
-          <a:p>
-            <a:endParaRPr lang="en-US" dirty="0"/>
-          </a:p>
-        </p:txBody>
-      </p:sp>
       <p:pic>
         <p:nvPicPr>
-          <p:cNvPr id="1030" name="Picture 6" descr="https://anoudtechnologies.com/wp-content/uploads/2021/01/banner0033.png"/>
+          <p:cNvPr id="1028" name="Picture 4">
+            <a:extLst>
+              <a:ext uri="{FF2B5EF4-FFF2-40B4-BE49-F238E27FC236}">
+                <a16:creationId xmlns:a16="http://schemas.microsoft.com/office/drawing/2014/main" id="{33F16738-2734-7BCC-B83E-7D72FE06033B}"/>
+              </a:ext>
+            </a:extLst>
+          </p:cNvPr>
           <p:cNvPicPr>
             <a:picLocks noChangeAspect="1" noChangeArrowheads="1"/>
           </p:cNvPicPr>
@@ -3014,8 +3371,8 @@
         </p:blipFill>
         <p:spPr bwMode="auto">
           <a:xfrm>
-            <a:off x="0" y="0"/>
-            <a:ext cx="12192000" cy="6858000"/>
+            <a:off x="64558" y="1"/>
+            <a:ext cx="1357842" cy="1167969"/>
           </a:xfrm>
           <a:prstGeom prst="rect">
             <a:avLst/>
@@ -3032,487 +3389,183 @@
           </a:extLst>
         </p:spPr>
       </p:pic>
+      <p:sp>
+        <p:nvSpPr>
+          <p:cNvPr id="5" name="TextBox 4">
+            <a:extLst>
+              <a:ext uri="{FF2B5EF4-FFF2-40B4-BE49-F238E27FC236}">
+                <a16:creationId xmlns:a16="http://schemas.microsoft.com/office/drawing/2014/main" id="{E0ECCF53-CD69-EFC0-41D5-CC9CBF64FACD}"/>
+              </a:ext>
+            </a:extLst>
+          </p:cNvPr>
+          <p:cNvSpPr txBox="1"/>
+          <p:nvPr/>
+        </p:nvSpPr>
+        <p:spPr>
+          <a:xfrm>
+            <a:off x="330200" y="1015032"/>
+            <a:ext cx="11514668" cy="5339923"/>
+          </a:xfrm>
+          <a:prstGeom prst="rect">
+            <a:avLst/>
+          </a:prstGeom>
+          <a:noFill/>
+        </p:spPr>
+        <p:txBody>
+          <a:bodyPr wrap="square" rtlCol="0">
+            <a:spAutoFit/>
+          </a:bodyPr>
+          <a:lstStyle/>
+          <a:p>
+            <a:pPr marL="285750" indent="-285750">
+              <a:lnSpc>
+                <a:spcPct val="150000"/>
+              </a:lnSpc>
+              <a:buFont typeface="Wingdings" panose="05000000000000000000" pitchFamily="2" charset="2"/>
+              <a:buChar char="q"/>
+            </a:pPr>
+            <a:r>
+              <a:rPr lang="en-IN" sz="1600" dirty="0">
+                <a:latin typeface="Times New Roman" panose="02020603050405020304" pitchFamily="18" charset="0"/>
+                <a:cs typeface="Times New Roman" panose="02020603050405020304" pitchFamily="18" charset="0"/>
+              </a:rPr>
+              <a:t>About Anoud- Anoud Technologies LLC MENA-headquartered</a:t>
+            </a:r>
+            <a:r>
+              <a:rPr lang="en-IN" dirty="0"/>
+              <a:t> </a:t>
+            </a:r>
+            <a:r>
+              <a:rPr lang="en-US" sz="1600" dirty="0" err="1">
+                <a:latin typeface="Times New Roman" panose="02020603050405020304" pitchFamily="18" charset="0"/>
+                <a:cs typeface="Times New Roman" panose="02020603050405020304" pitchFamily="18" charset="0"/>
+              </a:rPr>
+              <a:t>InsurTech</a:t>
+            </a:r>
+            <a:r>
+              <a:rPr lang="en-US" sz="1600" dirty="0">
+                <a:latin typeface="Times New Roman" panose="02020603050405020304" pitchFamily="18" charset="0"/>
+                <a:cs typeface="Times New Roman" panose="02020603050405020304" pitchFamily="18" charset="0"/>
+              </a:rPr>
+              <a:t> / insurance core systems and digital solutions , around 2020 via QIC–Swiss Re collaboration.</a:t>
+            </a:r>
+          </a:p>
+          <a:p>
+            <a:pPr marL="285750" indent="-285750">
+              <a:lnSpc>
+                <a:spcPct val="150000"/>
+              </a:lnSpc>
+              <a:buFont typeface="Wingdings" panose="05000000000000000000" pitchFamily="2" charset="2"/>
+              <a:buChar char="q"/>
+            </a:pPr>
+            <a:r>
+              <a:rPr lang="en-US" sz="1600" dirty="0">
+                <a:latin typeface="Times New Roman" panose="02020603050405020304" pitchFamily="18" charset="0"/>
+                <a:cs typeface="Times New Roman" panose="02020603050405020304" pitchFamily="18" charset="0"/>
+              </a:rPr>
+              <a:t>About my Role- I work closely with business requirements to ensure the system aligns with real-world insurance workflows.</a:t>
+            </a:r>
+          </a:p>
+          <a:p>
+            <a:pPr marL="285750" indent="-285750">
+              <a:lnSpc>
+                <a:spcPct val="150000"/>
+              </a:lnSpc>
+              <a:buFont typeface="Wingdings" panose="05000000000000000000" pitchFamily="2" charset="2"/>
+              <a:buChar char="q"/>
+            </a:pPr>
+            <a:r>
+              <a:rPr lang="en-US" sz="1600" dirty="0">
+                <a:latin typeface="Times New Roman" panose="02020603050405020304" pitchFamily="18" charset="0"/>
+                <a:cs typeface="Times New Roman" panose="02020603050405020304" pitchFamily="18" charset="0"/>
+              </a:rPr>
+              <a:t>About Anoud+ Product- Anoud is an end-to-end digital insurance platform that streamlines operations, offering high-speed performance and platform independence across both Android and iOS.</a:t>
+            </a:r>
+          </a:p>
+          <a:p>
+            <a:pPr>
+              <a:lnSpc>
+                <a:spcPct val="150000"/>
+              </a:lnSpc>
+            </a:pPr>
+            <a:r>
+              <a:rPr lang="en-US" sz="1600" dirty="0">
+                <a:latin typeface="Times New Roman" panose="02020603050405020304" pitchFamily="18" charset="0"/>
+                <a:cs typeface="Times New Roman" panose="02020603050405020304" pitchFamily="18" charset="0"/>
+              </a:rPr>
+              <a:t>        Anoud+ consists of Core Solutions for insurance operations and Digital Solutions for analytics and business support.</a:t>
+            </a:r>
+          </a:p>
+          <a:p>
+            <a:pPr marL="285750" indent="-285750">
+              <a:lnSpc>
+                <a:spcPct val="150000"/>
+              </a:lnSpc>
+              <a:buFont typeface="Wingdings" panose="05000000000000000000" pitchFamily="2" charset="2"/>
+              <a:buChar char="q"/>
+            </a:pPr>
+            <a:r>
+              <a:rPr lang="en-US" sz="1600" dirty="0">
+                <a:latin typeface="Times New Roman" panose="02020603050405020304" pitchFamily="18" charset="0"/>
+                <a:cs typeface="Times New Roman" panose="02020603050405020304" pitchFamily="18" charset="0"/>
+              </a:rPr>
+              <a:t>Clients of Anoud: Anoud Technologies provides solutions to insurance companies globally, especially in the MENA region, Europe, and the Caribbean, enabling them to efficiently manage their business through the Anoud+ platform.</a:t>
+            </a:r>
+          </a:p>
+          <a:p>
+            <a:pPr marL="285750" indent="-285750">
+              <a:lnSpc>
+                <a:spcPct val="150000"/>
+              </a:lnSpc>
+              <a:buFont typeface="Wingdings" panose="05000000000000000000" pitchFamily="2" charset="2"/>
+              <a:buChar char="q"/>
+            </a:pPr>
+            <a:r>
+              <a:rPr lang="en-US" sz="1600" dirty="0">
+                <a:latin typeface="Times New Roman" panose="02020603050405020304" pitchFamily="18" charset="0"/>
+                <a:cs typeface="Times New Roman" panose="02020603050405020304" pitchFamily="18" charset="0"/>
+              </a:rPr>
+              <a:t>About QIC : In the Qatar Insurance Company (QIC) application, different user roles such as admin, user, and employee access modules like underwriting, reports, and claims to manage policies and process customer claims efficiently.</a:t>
+            </a:r>
+          </a:p>
+          <a:p>
+            <a:pPr marL="285750" indent="-285750">
+              <a:lnSpc>
+                <a:spcPct val="150000"/>
+              </a:lnSpc>
+              <a:buFont typeface="Wingdings" panose="05000000000000000000" pitchFamily="2" charset="2"/>
+              <a:buChar char="q"/>
+            </a:pPr>
+            <a:r>
+              <a:rPr lang="en-US" sz="1600" dirty="0">
+                <a:latin typeface="Times New Roman" panose="02020603050405020304" pitchFamily="18" charset="0"/>
+                <a:cs typeface="Times New Roman" panose="02020603050405020304" pitchFamily="18" charset="0"/>
+              </a:rPr>
+              <a:t>About Policies : Anoud+ supports multiple insurance policies such as motor insurance (including comprehensive and third-party), medical, life, travel, corporate, property, and liability insurance. These policies are configurable based on client requirements.</a:t>
+            </a:r>
+          </a:p>
+          <a:p>
+            <a:endParaRPr lang="en-US" sz="1600" dirty="0">
+              <a:latin typeface="Times New Roman" panose="02020603050405020304" pitchFamily="18" charset="0"/>
+              <a:cs typeface="Times New Roman" panose="02020603050405020304" pitchFamily="18" charset="0"/>
+            </a:endParaRPr>
+          </a:p>
+          <a:p>
+            <a:endParaRPr lang="en-IN" sz="1600" dirty="0">
+              <a:effectLst/>
+              <a:latin typeface="Times New Roman" panose="02020603050405020304" pitchFamily="18" charset="0"/>
+              <a:cs typeface="Times New Roman" panose="02020603050405020304" pitchFamily="18" charset="0"/>
+            </a:endParaRPr>
+          </a:p>
+          <a:p>
+            <a:endParaRPr lang="en-IN" dirty="0"/>
+          </a:p>
+        </p:txBody>
+      </p:sp>
     </p:spTree>
     <p:extLst>
       <p:ext uri="{BB962C8B-B14F-4D97-AF65-F5344CB8AC3E}">
-        <p14:creationId xmlns:p14="http://schemas.microsoft.com/office/powerpoint/2010/main" val="3662180199"/>
-      </p:ext>
-    </p:extLst>
-  </p:cSld>
-  <p:clrMapOvr>
-    <a:masterClrMapping/>
-  </p:clrMapOvr>
-</p:sld>
-</file>
-
-<file path=ppt/slides/slide2.xml><?xml version="1.0" encoding="utf-8"?>
-<p:sld xmlns:a="http://schemas.openxmlformats.org/drawingml/2006/main" xmlns:r="http://schemas.openxmlformats.org/officeDocument/2006/relationships" xmlns:p="http://schemas.openxmlformats.org/presentationml/2006/main">
-  <p:cSld>
-    <p:spTree>
-      <p:nvGrpSpPr>
-        <p:cNvPr id="1" name=""/>
-        <p:cNvGrpSpPr/>
-        <p:nvPr/>
-      </p:nvGrpSpPr>
-      <p:grpSpPr>
-        <a:xfrm>
-          <a:off x="0" y="0"/>
-          <a:ext cx="0" cy="0"/>
-          <a:chOff x="0" y="0"/>
-          <a:chExt cx="0" cy="0"/>
-        </a:xfrm>
-      </p:grpSpPr>
-      <p:sp>
-        <p:nvSpPr>
-          <p:cNvPr id="3" name="Content Placeholder 2"/>
-          <p:cNvSpPr>
-            <a:spLocks noGrp="1"/>
-          </p:cNvSpPr>
-          <p:nvPr>
-            <p:ph idx="1"/>
-          </p:nvPr>
-        </p:nvSpPr>
-        <p:spPr>
-          <a:xfrm>
-            <a:off x="838200" y="243840"/>
-            <a:ext cx="10515600" cy="6167120"/>
-          </a:xfrm>
-        </p:spPr>
-        <p:txBody>
-          <a:bodyPr/>
-          <a:lstStyle/>
-          <a:p>
-            <a:pPr marL="0" indent="0">
-              <a:buNone/>
-            </a:pPr>
-            <a:r>
-              <a:rPr lang="en-US" sz="1600" dirty="0" err="1" smtClean="0">
-                <a:solidFill>
-                  <a:srgbClr val="C00000"/>
-                </a:solidFill>
-                <a:latin typeface="Times New Roman" panose="02020603050405020304" pitchFamily="18" charset="0"/>
-                <a:cs typeface="Times New Roman" panose="02020603050405020304" pitchFamily="18" charset="0"/>
-              </a:rPr>
-              <a:t>Anoud</a:t>
-            </a:r>
-            <a:r>
-              <a:rPr lang="en-US" sz="1600" dirty="0" smtClean="0">
-                <a:solidFill>
-                  <a:srgbClr val="C00000"/>
-                </a:solidFill>
-                <a:latin typeface="Times New Roman" panose="02020603050405020304" pitchFamily="18" charset="0"/>
-                <a:cs typeface="Times New Roman" panose="02020603050405020304" pitchFamily="18" charset="0"/>
-              </a:rPr>
-              <a:t> :</a:t>
-            </a:r>
-            <a:r>
-              <a:rPr lang="en-US" sz="1600" dirty="0" smtClean="0">
-                <a:solidFill>
-                  <a:srgbClr val="FF0000"/>
-                </a:solidFill>
-                <a:latin typeface="Times New Roman" panose="02020603050405020304" pitchFamily="18" charset="0"/>
-                <a:cs typeface="Times New Roman" panose="02020603050405020304" pitchFamily="18" charset="0"/>
-              </a:rPr>
-              <a:t>  </a:t>
-            </a:r>
-            <a:r>
-              <a:rPr lang="en-GB" sz="1600" dirty="0" err="1" smtClean="0">
-                <a:latin typeface="Times New Roman" panose="02020603050405020304" pitchFamily="18" charset="0"/>
-                <a:cs typeface="Times New Roman" panose="02020603050405020304" pitchFamily="18" charset="0"/>
-              </a:rPr>
-              <a:t>Anoud</a:t>
-            </a:r>
-            <a:r>
-              <a:rPr lang="en-GB" sz="1600" dirty="0" smtClean="0">
-                <a:latin typeface="Times New Roman" panose="02020603050405020304" pitchFamily="18" charset="0"/>
-                <a:cs typeface="Times New Roman" panose="02020603050405020304" pitchFamily="18" charset="0"/>
-              </a:rPr>
-              <a:t> is a technology company that builds software solutions for insurance companies to manage their entire business digitally.</a:t>
-            </a:r>
-            <a:endParaRPr lang="en-US" sz="1600" dirty="0">
-              <a:solidFill>
-                <a:srgbClr val="FF0000"/>
-              </a:solidFill>
-              <a:latin typeface="Times New Roman" panose="02020603050405020304" pitchFamily="18" charset="0"/>
-              <a:cs typeface="Times New Roman" panose="02020603050405020304" pitchFamily="18" charset="0"/>
-            </a:endParaRPr>
-          </a:p>
-          <a:p>
-            <a:pPr marL="0" indent="0">
-              <a:buNone/>
-            </a:pPr>
-            <a:r>
-              <a:rPr lang="en-US" sz="1600" dirty="0" smtClean="0">
-                <a:solidFill>
-                  <a:srgbClr val="C00000"/>
-                </a:solidFill>
-                <a:latin typeface="Times New Roman" panose="02020603050405020304" pitchFamily="18" charset="0"/>
-                <a:cs typeface="Times New Roman" panose="02020603050405020304" pitchFamily="18" charset="0"/>
-              </a:rPr>
-              <a:t>Product : </a:t>
-            </a:r>
-            <a:r>
-              <a:rPr lang="en-GB" sz="1600" b="1" dirty="0" err="1" smtClean="0">
-                <a:latin typeface="Times New Roman" panose="02020603050405020304" pitchFamily="18" charset="0"/>
-                <a:cs typeface="Times New Roman" panose="02020603050405020304" pitchFamily="18" charset="0"/>
-              </a:rPr>
-              <a:t>Anoud</a:t>
-            </a:r>
-            <a:r>
-              <a:rPr lang="en-GB" sz="1600" b="1" dirty="0" smtClean="0">
-                <a:latin typeface="Times New Roman" panose="02020603050405020304" pitchFamily="18" charset="0"/>
-                <a:cs typeface="Times New Roman" panose="02020603050405020304" pitchFamily="18" charset="0"/>
-              </a:rPr>
-              <a:t>+</a:t>
-            </a:r>
-            <a:r>
-              <a:rPr lang="en-GB" sz="1600" dirty="0" smtClean="0">
-                <a:latin typeface="Times New Roman" panose="02020603050405020304" pitchFamily="18" charset="0"/>
-                <a:cs typeface="Times New Roman" panose="02020603050405020304" pitchFamily="18" charset="0"/>
-              </a:rPr>
-              <a:t> is a </a:t>
-            </a:r>
-            <a:r>
-              <a:rPr lang="en-GB" sz="1600" b="1" dirty="0" smtClean="0">
-                <a:latin typeface="Times New Roman" panose="02020603050405020304" pitchFamily="18" charset="0"/>
-                <a:cs typeface="Times New Roman" panose="02020603050405020304" pitchFamily="18" charset="0"/>
-              </a:rPr>
-              <a:t>cloud-based insurance software platform</a:t>
-            </a:r>
-            <a:r>
-              <a:rPr lang="en-GB" sz="1600" dirty="0" smtClean="0">
-                <a:latin typeface="Times New Roman" panose="02020603050405020304" pitchFamily="18" charset="0"/>
-                <a:cs typeface="Times New Roman" panose="02020603050405020304" pitchFamily="18" charset="0"/>
-              </a:rPr>
-              <a:t> used by insurance companies to manage their entire business in one place.</a:t>
-            </a:r>
-          </a:p>
-          <a:p>
-            <a:pPr marL="0" indent="0">
-              <a:buNone/>
-            </a:pPr>
-            <a:r>
-              <a:rPr lang="en-GB" sz="1600" dirty="0" smtClean="0">
-                <a:solidFill>
-                  <a:srgbClr val="C00000"/>
-                </a:solidFill>
-                <a:latin typeface="Times New Roman" panose="02020603050405020304" pitchFamily="18" charset="0"/>
-                <a:cs typeface="Times New Roman" panose="02020603050405020304" pitchFamily="18" charset="0"/>
-              </a:rPr>
-              <a:t>What </a:t>
-            </a:r>
-            <a:r>
-              <a:rPr lang="en-GB" sz="1600" dirty="0" err="1" smtClean="0">
-                <a:solidFill>
-                  <a:srgbClr val="C00000"/>
-                </a:solidFill>
-                <a:latin typeface="Times New Roman" panose="02020603050405020304" pitchFamily="18" charset="0"/>
-                <a:cs typeface="Times New Roman" panose="02020603050405020304" pitchFamily="18" charset="0"/>
-              </a:rPr>
-              <a:t>Anoud</a:t>
-            </a:r>
-            <a:r>
-              <a:rPr lang="en-GB" sz="1600" dirty="0" smtClean="0">
-                <a:solidFill>
-                  <a:srgbClr val="C00000"/>
-                </a:solidFill>
-                <a:latin typeface="Times New Roman" panose="02020603050405020304" pitchFamily="18" charset="0"/>
-                <a:cs typeface="Times New Roman" panose="02020603050405020304" pitchFamily="18" charset="0"/>
-              </a:rPr>
-              <a:t>+ does : </a:t>
-            </a:r>
-            <a:r>
-              <a:rPr lang="en-GB" sz="1600" dirty="0" smtClean="0">
-                <a:latin typeface="Times New Roman" panose="02020603050405020304" pitchFamily="18" charset="0"/>
-                <a:cs typeface="Times New Roman" panose="02020603050405020304" pitchFamily="18" charset="0"/>
-              </a:rPr>
-              <a:t>It handles the </a:t>
-            </a:r>
-            <a:r>
-              <a:rPr lang="en-GB" sz="1600" b="1" dirty="0" smtClean="0">
-                <a:latin typeface="Times New Roman" panose="02020603050405020304" pitchFamily="18" charset="0"/>
-                <a:cs typeface="Times New Roman" panose="02020603050405020304" pitchFamily="18" charset="0"/>
-              </a:rPr>
-              <a:t>complete insurance lifecycle</a:t>
-            </a:r>
-            <a:r>
-              <a:rPr lang="en-GB" sz="1600" dirty="0">
-                <a:latin typeface="Times New Roman" panose="02020603050405020304" pitchFamily="18" charset="0"/>
-                <a:cs typeface="Times New Roman" panose="02020603050405020304" pitchFamily="18" charset="0"/>
-              </a:rPr>
-              <a:t> </a:t>
-            </a:r>
-            <a:r>
-              <a:rPr lang="en-GB" sz="1600" dirty="0" smtClean="0">
-                <a:latin typeface="Times New Roman" panose="02020603050405020304" pitchFamily="18" charset="0"/>
-                <a:cs typeface="Times New Roman" panose="02020603050405020304" pitchFamily="18" charset="0"/>
-              </a:rPr>
-              <a:t>Customer </a:t>
-            </a:r>
-            <a:r>
-              <a:rPr lang="en-GB" sz="1600" dirty="0" err="1" smtClean="0">
-                <a:latin typeface="Times New Roman" panose="02020603050405020304" pitchFamily="18" charset="0"/>
-                <a:cs typeface="Times New Roman" panose="02020603050405020304" pitchFamily="18" charset="0"/>
-              </a:rPr>
-              <a:t>onboarding</a:t>
-            </a:r>
-            <a:r>
-              <a:rPr lang="en-GB" sz="1600" dirty="0" smtClean="0">
-                <a:latin typeface="Times New Roman" panose="02020603050405020304" pitchFamily="18" charset="0"/>
-                <a:cs typeface="Times New Roman" panose="02020603050405020304" pitchFamily="18" charset="0"/>
-              </a:rPr>
-              <a:t> , Policy creation and management , Premium calculation , Claims processing , Reports and analytics.</a:t>
-            </a:r>
-          </a:p>
-          <a:p>
-            <a:pPr marL="0" indent="0">
-              <a:buNone/>
-            </a:pPr>
-            <a:r>
-              <a:rPr lang="en-GB" sz="1600" dirty="0" smtClean="0">
-                <a:solidFill>
-                  <a:srgbClr val="C00000"/>
-                </a:solidFill>
-                <a:latin typeface="Times New Roman" panose="02020603050405020304" pitchFamily="18" charset="0"/>
-                <a:cs typeface="Times New Roman" panose="02020603050405020304" pitchFamily="18" charset="0"/>
-              </a:rPr>
-              <a:t>Contribution :</a:t>
-            </a:r>
-            <a:r>
-              <a:rPr lang="en-GB" sz="1600" dirty="0" smtClean="0">
-                <a:solidFill>
-                  <a:srgbClr val="FF0000"/>
-                </a:solidFill>
-                <a:latin typeface="Times New Roman" panose="02020603050405020304" pitchFamily="18" charset="0"/>
-                <a:cs typeface="Times New Roman" panose="02020603050405020304" pitchFamily="18" charset="0"/>
-              </a:rPr>
-              <a:t> </a:t>
-            </a:r>
-            <a:r>
-              <a:rPr lang="en-GB" sz="1600" dirty="0" smtClean="0">
-                <a:latin typeface="Times New Roman" panose="02020603050405020304" pitchFamily="18" charset="0"/>
-                <a:cs typeface="Times New Roman" panose="02020603050405020304" pitchFamily="18" charset="0"/>
-              </a:rPr>
-              <a:t>In the </a:t>
-            </a:r>
-            <a:r>
-              <a:rPr lang="en-GB" sz="1600" dirty="0" err="1" smtClean="0">
-                <a:latin typeface="Times New Roman" panose="02020603050405020304" pitchFamily="18" charset="0"/>
-                <a:cs typeface="Times New Roman" panose="02020603050405020304" pitchFamily="18" charset="0"/>
-              </a:rPr>
-              <a:t>Anoud</a:t>
-            </a:r>
-            <a:r>
-              <a:rPr lang="en-GB" sz="1600" dirty="0" smtClean="0">
-                <a:latin typeface="Times New Roman" panose="02020603050405020304" pitchFamily="18" charset="0"/>
-                <a:cs typeface="Times New Roman" panose="02020603050405020304" pitchFamily="18" charset="0"/>
-              </a:rPr>
-              <a:t>+ project, I work on backend development where I build REST APIs, implement business logic for insurance processes like policy and premium, handle database operations, fix bugs, and customize the application based on client requirements.</a:t>
-            </a:r>
-          </a:p>
-          <a:p>
-            <a:pPr marL="0" indent="0">
-              <a:buNone/>
-            </a:pPr>
-            <a:r>
-              <a:rPr lang="en-GB" sz="1600" dirty="0" smtClean="0">
-                <a:solidFill>
-                  <a:srgbClr val="C00000"/>
-                </a:solidFill>
-                <a:latin typeface="Times New Roman" panose="02020603050405020304" pitchFamily="18" charset="0"/>
-                <a:cs typeface="Times New Roman" panose="02020603050405020304" pitchFamily="18" charset="0"/>
-              </a:rPr>
-              <a:t>Clients : </a:t>
-            </a:r>
-            <a:r>
-              <a:rPr lang="en-GB" sz="1600" dirty="0" err="1" smtClean="0">
-                <a:latin typeface="Times New Roman" panose="02020603050405020304" pitchFamily="18" charset="0"/>
-                <a:cs typeface="Times New Roman" panose="02020603050405020304" pitchFamily="18" charset="0"/>
-              </a:rPr>
-              <a:t>Anoud</a:t>
-            </a:r>
-            <a:r>
-              <a:rPr lang="en-GB" sz="1600" dirty="0" smtClean="0">
-                <a:latin typeface="Times New Roman" panose="02020603050405020304" pitchFamily="18" charset="0"/>
-                <a:cs typeface="Times New Roman" panose="02020603050405020304" pitchFamily="18" charset="0"/>
-              </a:rPr>
-              <a:t> Technologies primarily serves insurance companies across the MENA region, Europe, and the Caribbean. These clients use the </a:t>
-            </a:r>
-            <a:r>
-              <a:rPr lang="en-GB" sz="1600" dirty="0" err="1" smtClean="0">
-                <a:latin typeface="Times New Roman" panose="02020603050405020304" pitchFamily="18" charset="0"/>
-                <a:cs typeface="Times New Roman" panose="02020603050405020304" pitchFamily="18" charset="0"/>
-              </a:rPr>
-              <a:t>Anoud</a:t>
-            </a:r>
-            <a:r>
-              <a:rPr lang="en-GB" sz="1600" dirty="0" smtClean="0">
-                <a:latin typeface="Times New Roman" panose="02020603050405020304" pitchFamily="18" charset="0"/>
-                <a:cs typeface="Times New Roman" panose="02020603050405020304" pitchFamily="18" charset="0"/>
-              </a:rPr>
-              <a:t>+ platform to manage their insurance operations and digital transformation.</a:t>
-            </a:r>
-          </a:p>
-          <a:p>
-            <a:pPr marL="0" indent="0">
-              <a:buNone/>
-            </a:pPr>
-            <a:r>
-              <a:rPr lang="en-GB" sz="1600" dirty="0" smtClean="0">
-                <a:solidFill>
-                  <a:srgbClr val="C00000"/>
-                </a:solidFill>
-                <a:latin typeface="Times New Roman" panose="02020603050405020304" pitchFamily="18" charset="0"/>
-                <a:cs typeface="Times New Roman" panose="02020603050405020304" pitchFamily="18" charset="0"/>
-              </a:rPr>
-              <a:t>Modules : </a:t>
-            </a:r>
-            <a:r>
-              <a:rPr lang="en-GB" sz="1600" dirty="0" err="1" smtClean="0">
-                <a:latin typeface="Times New Roman" panose="02020603050405020304" pitchFamily="18" charset="0"/>
-                <a:cs typeface="Times New Roman" panose="02020603050405020304" pitchFamily="18" charset="0"/>
-              </a:rPr>
-              <a:t>Anoud</a:t>
-            </a:r>
-            <a:r>
-              <a:rPr lang="en-GB" sz="1600" dirty="0" smtClean="0">
-                <a:latin typeface="Times New Roman" panose="02020603050405020304" pitchFamily="18" charset="0"/>
-                <a:cs typeface="Times New Roman" panose="02020603050405020304" pitchFamily="18" charset="0"/>
-              </a:rPr>
-              <a:t>+ consists of multiple modules such as policy management, premium calculation, underwriting, claims management, customer management, insurance-specific modules like medical and motor, analytics, and compliance. Each module handles a specific part of the insurance lifecycle.</a:t>
-            </a:r>
-          </a:p>
-          <a:p>
-            <a:pPr marL="0" indent="0">
-              <a:buNone/>
-            </a:pPr>
-            <a:r>
-              <a:rPr lang="en-GB" sz="1600" dirty="0" smtClean="0">
-                <a:solidFill>
-                  <a:srgbClr val="C00000"/>
-                </a:solidFill>
-                <a:latin typeface="Times New Roman" panose="02020603050405020304" pitchFamily="18" charset="0"/>
-                <a:cs typeface="Times New Roman" panose="02020603050405020304" pitchFamily="18" charset="0"/>
-              </a:rPr>
-              <a:t>Partners : </a:t>
-            </a:r>
-            <a:r>
-              <a:rPr lang="en-GB" sz="1600" dirty="0" err="1" smtClean="0">
-                <a:latin typeface="Times New Roman" panose="02020603050405020304" pitchFamily="18" charset="0"/>
-                <a:cs typeface="Times New Roman" panose="02020603050405020304" pitchFamily="18" charset="0"/>
-              </a:rPr>
-              <a:t>Anoud</a:t>
-            </a:r>
-            <a:r>
-              <a:rPr lang="en-GB" sz="1600" dirty="0" smtClean="0">
-                <a:latin typeface="Times New Roman" panose="02020603050405020304" pitchFamily="18" charset="0"/>
-                <a:cs typeface="Times New Roman" panose="02020603050405020304" pitchFamily="18" charset="0"/>
-              </a:rPr>
-              <a:t> partners with global insurance leaders and technology providers like Qatar Insurance Group, Swiss Re, and ACORD to deliver a complete digital insurance platform.</a:t>
-            </a:r>
-            <a:endParaRPr lang="en-GB" sz="1600" dirty="0" smtClean="0">
-              <a:solidFill>
-                <a:srgbClr val="C00000"/>
-              </a:solidFill>
-              <a:latin typeface="Times New Roman" panose="02020603050405020304" pitchFamily="18" charset="0"/>
-              <a:cs typeface="Times New Roman" panose="02020603050405020304" pitchFamily="18" charset="0"/>
-            </a:endParaRPr>
-          </a:p>
-          <a:p>
-            <a:pPr marL="0" indent="0">
-              <a:buNone/>
-            </a:pPr>
-            <a:r>
-              <a:rPr lang="en-GB" sz="1600" dirty="0" smtClean="0">
-                <a:solidFill>
-                  <a:srgbClr val="C00000"/>
-                </a:solidFill>
-                <a:latin typeface="Times New Roman" panose="02020603050405020304" pitchFamily="18" charset="0"/>
-                <a:cs typeface="Times New Roman" panose="02020603050405020304" pitchFamily="18" charset="0"/>
-              </a:rPr>
-              <a:t>Policies :</a:t>
-            </a:r>
-            <a:r>
-              <a:rPr lang="en-GB" sz="1600" dirty="0" smtClean="0">
-                <a:solidFill>
-                  <a:srgbClr val="FF0000"/>
-                </a:solidFill>
-                <a:latin typeface="Times New Roman" panose="02020603050405020304" pitchFamily="18" charset="0"/>
-                <a:cs typeface="Times New Roman" panose="02020603050405020304" pitchFamily="18" charset="0"/>
-              </a:rPr>
-              <a:t> </a:t>
-            </a:r>
-            <a:r>
-              <a:rPr lang="en-GB" sz="1600" dirty="0" err="1" smtClean="0">
-                <a:latin typeface="Times New Roman" panose="02020603050405020304" pitchFamily="18" charset="0"/>
-                <a:cs typeface="Times New Roman" panose="02020603050405020304" pitchFamily="18" charset="0"/>
-              </a:rPr>
-              <a:t>Anoud</a:t>
-            </a:r>
-            <a:r>
-              <a:rPr lang="en-GB" sz="1600" dirty="0" smtClean="0">
-                <a:latin typeface="Times New Roman" panose="02020603050405020304" pitchFamily="18" charset="0"/>
-                <a:cs typeface="Times New Roman" panose="02020603050405020304" pitchFamily="18" charset="0"/>
-              </a:rPr>
-              <a:t>+ supports multiple insurance policies such as motor insurance (including comprehensive and third-party), medical, life, travel, corporate, property, and liability insurance. These policies are configurable based on client requirements.</a:t>
-            </a:r>
-          </a:p>
-          <a:p>
-            <a:pPr marL="0" indent="0">
-              <a:buNone/>
-            </a:pPr>
-            <a:r>
-              <a:rPr lang="en-GB" sz="1600" dirty="0" smtClean="0">
-                <a:solidFill>
-                  <a:srgbClr val="C00000"/>
-                </a:solidFill>
-                <a:latin typeface="Times New Roman" panose="02020603050405020304" pitchFamily="18" charset="0"/>
-                <a:cs typeface="Times New Roman" panose="02020603050405020304" pitchFamily="18" charset="0"/>
-              </a:rPr>
-              <a:t>Who Uses </a:t>
-            </a:r>
-            <a:r>
-              <a:rPr lang="en-GB" sz="1600" dirty="0" err="1" smtClean="0">
-                <a:solidFill>
-                  <a:srgbClr val="C00000"/>
-                </a:solidFill>
-                <a:latin typeface="Times New Roman" panose="02020603050405020304" pitchFamily="18" charset="0"/>
-                <a:cs typeface="Times New Roman" panose="02020603050405020304" pitchFamily="18" charset="0"/>
-              </a:rPr>
-              <a:t>Anoud</a:t>
-            </a:r>
-            <a:r>
-              <a:rPr lang="en-GB" sz="1600" dirty="0" smtClean="0">
-                <a:solidFill>
-                  <a:srgbClr val="C00000"/>
-                </a:solidFill>
-                <a:latin typeface="Times New Roman" panose="02020603050405020304" pitchFamily="18" charset="0"/>
-                <a:cs typeface="Times New Roman" panose="02020603050405020304" pitchFamily="18" charset="0"/>
-              </a:rPr>
-              <a:t>+ : </a:t>
-            </a:r>
-            <a:r>
-              <a:rPr lang="en-GB" sz="1600" dirty="0" err="1" smtClean="0"/>
-              <a:t>Anoud</a:t>
-            </a:r>
-            <a:r>
-              <a:rPr lang="en-GB" sz="1600" dirty="0" smtClean="0"/>
-              <a:t>+ is mainly used by insurance companies, including life, health, and motor insurers, as well as reinsurance companies and large insurance groups. It is used by different departments like underwriting, claims, and operations teams to manage the complete insurance lifecycle digitally.</a:t>
-            </a:r>
-            <a:endParaRPr lang="en-GB" sz="1600" dirty="0" smtClean="0">
-              <a:solidFill>
-                <a:srgbClr val="FF0000"/>
-              </a:solidFill>
-              <a:latin typeface="Times New Roman" panose="02020603050405020304" pitchFamily="18" charset="0"/>
-              <a:cs typeface="Times New Roman" panose="02020603050405020304" pitchFamily="18" charset="0"/>
-            </a:endParaRPr>
-          </a:p>
-        </p:txBody>
-      </p:sp>
-    </p:spTree>
-    <p:extLst>
-      <p:ext uri="{BB962C8B-B14F-4D97-AF65-F5344CB8AC3E}">
-        <p14:creationId xmlns:p14="http://schemas.microsoft.com/office/powerpoint/2010/main" val="1541754079"/>
+        <p14:creationId xmlns:p14="http://schemas.microsoft.com/office/powerpoint/2010/main" val="3479039123"/>
       </p:ext>
     </p:extLst>
   </p:cSld>
@@ -3533,39 +3586,39 @@
         <a:sysClr val="window" lastClr="FFFFFF"/>
       </a:lt1>
       <a:dk2>
-        <a:srgbClr val="44546A"/>
+        <a:srgbClr val="0E2841"/>
       </a:dk2>
       <a:lt2>
-        <a:srgbClr val="E7E6E6"/>
+        <a:srgbClr val="E8E8E8"/>
       </a:lt2>
       <a:accent1>
-        <a:srgbClr val="5B9BD5"/>
+        <a:srgbClr val="156082"/>
       </a:accent1>
       <a:accent2>
-        <a:srgbClr val="ED7D31"/>
+        <a:srgbClr val="E97132"/>
       </a:accent2>
       <a:accent3>
-        <a:srgbClr val="A5A5A5"/>
+        <a:srgbClr val="196B24"/>
       </a:accent3>
       <a:accent4>
-        <a:srgbClr val="FFC000"/>
+        <a:srgbClr val="0F9ED5"/>
       </a:accent4>
       <a:accent5>
-        <a:srgbClr val="4472C4"/>
+        <a:srgbClr val="A02B93"/>
       </a:accent5>
       <a:accent6>
-        <a:srgbClr val="70AD47"/>
+        <a:srgbClr val="4EA72E"/>
       </a:accent6>
       <a:hlink>
-        <a:srgbClr val="0563C1"/>
+        <a:srgbClr val="467886"/>
       </a:hlink>
       <a:folHlink>
-        <a:srgbClr val="954F72"/>
+        <a:srgbClr val="96607D"/>
       </a:folHlink>
     </a:clrScheme>
     <a:fontScheme name="Office">
       <a:majorFont>
-        <a:latin typeface="Calibri Light" panose="020F0302020204030204"/>
+        <a:latin typeface="Aptos Display" panose="02110004020202020204"/>
         <a:ea typeface=""/>
         <a:cs typeface=""/>
         <a:font script="Jpan" typeface="游ゴシック Light"/>
@@ -3598,9 +3651,26 @@
         <a:font script="Viet" typeface="Times New Roman"/>
         <a:font script="Uigh" typeface="Microsoft Uighur"/>
         <a:font script="Geor" typeface="Sylfaen"/>
+        <a:font script="Armn" typeface="Arial"/>
+        <a:font script="Bugi" typeface="Leelawadee UI"/>
+        <a:font script="Bopo" typeface="Microsoft JhengHei"/>
+        <a:font script="Java" typeface="Javanese Text"/>
+        <a:font script="Lisu" typeface="Segoe UI"/>
+        <a:font script="Mymr" typeface="Myanmar Text"/>
+        <a:font script="Nkoo" typeface="Ebrima"/>
+        <a:font script="Olck" typeface="Nirmala UI"/>
+        <a:font script="Osma" typeface="Ebrima"/>
+        <a:font script="Phag" typeface="Phagspa"/>
+        <a:font script="Syrn" typeface="Estrangelo Edessa"/>
+        <a:font script="Syrj" typeface="Estrangelo Edessa"/>
+        <a:font script="Syre" typeface="Estrangelo Edessa"/>
+        <a:font script="Sora" typeface="Nirmala UI"/>
+        <a:font script="Tale" typeface="Microsoft Tai Le"/>
+        <a:font script="Talu" typeface="Microsoft New Tai Lue"/>
+        <a:font script="Tfng" typeface="Ebrima"/>
       </a:majorFont>
       <a:minorFont>
-        <a:latin typeface="Calibri" panose="020F0502020204030204"/>
+        <a:latin typeface="Aptos" panose="02110004020202020204"/>
         <a:ea typeface=""/>
         <a:cs typeface=""/>
         <a:font script="Jpan" typeface="游ゴシック"/>
@@ -3633,6 +3703,23 @@
         <a:font script="Viet" typeface="Arial"/>
         <a:font script="Uigh" typeface="Microsoft Uighur"/>
         <a:font script="Geor" typeface="Sylfaen"/>
+        <a:font script="Armn" typeface="Arial"/>
+        <a:font script="Bugi" typeface="Leelawadee UI"/>
+        <a:font script="Bopo" typeface="Microsoft JhengHei"/>
+        <a:font script="Java" typeface="Javanese Text"/>
+        <a:font script="Lisu" typeface="Segoe UI"/>
+        <a:font script="Mymr" typeface="Myanmar Text"/>
+        <a:font script="Nkoo" typeface="Ebrima"/>
+        <a:font script="Olck" typeface="Nirmala UI"/>
+        <a:font script="Osma" typeface="Ebrima"/>
+        <a:font script="Phag" typeface="Phagspa"/>
+        <a:font script="Syrn" typeface="Estrangelo Edessa"/>
+        <a:font script="Syrj" typeface="Estrangelo Edessa"/>
+        <a:font script="Syre" typeface="Estrangelo Edessa"/>
+        <a:font script="Sora" typeface="Nirmala UI"/>
+        <a:font script="Tale" typeface="Microsoft Tai Le"/>
+        <a:font script="Talu" typeface="Microsoft New Tai Lue"/>
+        <a:font script="Tfng" typeface="Ebrima"/>
       </a:minorFont>
     </a:fontScheme>
     <a:fmtScheme name="Office">
@@ -3694,13 +3781,6 @@
         </a:gradFill>
       </a:fillStyleLst>
       <a:lnStyleLst>
-        <a:ln w="6350" cap="flat" cmpd="sng" algn="ctr">
-          <a:solidFill>
-            <a:schemeClr val="phClr"/>
-          </a:solidFill>
-          <a:prstDash val="solid"/>
-          <a:miter lim="800000"/>
-        </a:ln>
         <a:ln w="12700" cap="flat" cmpd="sng" algn="ctr">
           <a:solidFill>
             <a:schemeClr val="phClr"/>
@@ -3709,6 +3789,13 @@
           <a:miter lim="800000"/>
         </a:ln>
         <a:ln w="19050" cap="flat" cmpd="sng" algn="ctr">
+          <a:solidFill>
+            <a:schemeClr val="phClr"/>
+          </a:solidFill>
+          <a:prstDash val="solid"/>
+          <a:miter lim="800000"/>
+        </a:ln>
+        <a:ln w="25400" cap="flat" cmpd="sng" algn="ctr">
           <a:solidFill>
             <a:schemeClr val="phClr"/>
           </a:solidFill>
@@ -3773,11 +3860,31 @@
       </a:bgFillStyleLst>
     </a:fmtScheme>
   </a:themeElements>
-  <a:objectDefaults/>
+  <a:objectDefaults>
+    <a:lnDef>
+      <a:spPr/>
+      <a:bodyPr/>
+      <a:lstStyle/>
+      <a:style>
+        <a:lnRef idx="2">
+          <a:schemeClr val="accent1"/>
+        </a:lnRef>
+        <a:fillRef idx="0">
+          <a:schemeClr val="accent1"/>
+        </a:fillRef>
+        <a:effectRef idx="1">
+          <a:schemeClr val="accent1"/>
+        </a:effectRef>
+        <a:fontRef idx="minor">
+          <a:schemeClr val="tx1"/>
+        </a:fontRef>
+      </a:style>
+    </a:lnDef>
+  </a:objectDefaults>
   <a:extraClrSchemeLst/>
   <a:extLst>
     <a:ext uri="{05A4C25C-085E-4340-85A3-A5531E510DB2}">
-      <thm15:themeFamily xmlns:thm15="http://schemas.microsoft.com/office/thememl/2012/main" name="Office Theme" id="{62F939B6-93AF-4DB8-9C6B-D6C7DFDC589F}" vid="{4A3C46E8-61CC-4603-A589-7422A47A8E4A}"/>
+      <thm15:themeFamily xmlns:thm15="http://schemas.microsoft.com/office/thememl/2012/main" name="Office Theme" id="{2E142A2C-CD16-42D6-873A-C26D2A0506FA}" vid="{1BDDFF52-6CD6-40A5-AB3C-68EB2F1E4D0A}"/>
     </a:ext>
   </a:extLst>
 </a:theme>
